--- a/templates/shortlist-template.pptx
+++ b/templates/shortlist-template.pptx
@@ -6,13 +6,11 @@
     <p:sldMasterId id="2147483648" r:id="rId2"/>
   </p:sldMasterIdLst>
   <p:notesMasterIdLst>
-    <p:notesMasterId r:id="rId7"/>
+    <p:notesMasterId r:id="rId5"/>
   </p:notesMasterIdLst>
   <p:sldIdLst>
     <p:sldId id="266" r:id="rId3"/>
-    <p:sldId id="272" r:id="rId4"/>
-    <p:sldId id="273" r:id="rId5"/>
-    <p:sldId id="274" r:id="rId6"/>
+    <p:sldId id="274" r:id="rId4"/>
   </p:sldIdLst>
   <p:sldSz cx="6858000" cy="9906000" type="A4"/>
   <p:notesSz cx="6858000" cy="9144000"/>
@@ -111,6 +109,11 @@
       </a:defRPr>
     </a:lvl9pPr>
   </p:defaultTextStyle>
+  <p:extLst>
+    <p:ext uri="{EFAFB233-063F-42B5-8137-9DF3F51BA10A}">
+      <p15:sldGuideLst xmlns:p15="http://schemas.microsoft.com/office/powerpoint/2012/main"/>
+    </p:ext>
+  </p:extLst>
 </p:presentation>
 </file>
 
@@ -5118,7 +5121,7 @@
                 </a:lnSpc>
               </a:pPr>
               <a:r>
-                <a:rPr lang="en-US" sz="1451" b="1">
+                <a:rPr lang="en-US" sz="1451" b="1" dirty="0" err="1">
                   <a:solidFill>
                     <a:srgbClr val="FFFFFF"/>
                   </a:solidFill>
@@ -5127,8 +5130,17 @@
                   <a:cs typeface="Mark OT 1 Heavy"/>
                   <a:sym typeface="Mark OT 1 Heavy"/>
                 </a:rPr>
-                <a:t>INFINITAS</a:t>
+                <a:t>Infinitas</a:t>
               </a:r>
+              <a:endParaRPr lang="en-US" sz="1451" b="1" dirty="0">
+                <a:solidFill>
+                  <a:srgbClr val="FFFFFF"/>
+                </a:solidFill>
+                <a:latin typeface="Inter Bold" panose="020B0604020202020204" charset="0"/>
+                <a:ea typeface="Inter Bold" panose="020B0604020202020204" charset="0"/>
+                <a:cs typeface="Mark OT 1 Heavy"/>
+                <a:sym typeface="Mark OT 1 Heavy"/>
+              </a:endParaRPr>
             </a:p>
           </p:txBody>
         </p:sp>
@@ -5411,8 +5423,8 @@
         </p:nvSpPr>
         <p:spPr>
           <a:xfrm>
-            <a:off x="686117" y="3646378"/>
-            <a:ext cx="5755625" cy="377667"/>
+            <a:off x="-1628843" y="2681906"/>
+            <a:ext cx="5755625" cy="359073"/>
           </a:xfrm>
           <a:prstGeom prst="rect">
             <a:avLst/>
@@ -5524,7 +5536,7 @@
               </a:lnSpc>
             </a:pPr>
             <a:r>
-              <a:rPr lang="en-US" sz="3200" b="1">
+              <a:rPr lang="en-US" sz="2400" b="1" dirty="0">
                 <a:solidFill>
                   <a:srgbClr val="004899"/>
                 </a:solidFill>
@@ -5533,29 +5545,8 @@
                 <a:cs typeface="Mark OT 2 Heavy"/>
                 <a:sym typeface="Mark OT 2 Heavy"/>
               </a:rPr>
-              <a:t>SHORTLIST </a:t>
-            </a:r>
-            <a:r>
-              <a:rPr lang="en-US" sz="1800" b="1">
-                <a:solidFill>
-                  <a:srgbClr val="004899"/>
-                </a:solidFill>
-                <a:latin typeface="Inter Bold" panose="020B0604020202020204" charset="0"/>
-                <a:ea typeface="Inter Bold" panose="020B0604020202020204" charset="0"/>
-                <a:cs typeface="Mark OT 2 Heavy"/>
-                <a:sym typeface="Mark OT 2 Heavy"/>
-              </a:rPr>
-              <a:t>Additional Candidates </a:t>
-            </a:r>
-            <a:endParaRPr lang="en-US" sz="3200" b="1">
-              <a:solidFill>
-                <a:srgbClr val="004899"/>
-              </a:solidFill>
-              <a:latin typeface="Inter Bold" panose="020B0604020202020204" charset="0"/>
-              <a:ea typeface="Inter Bold" panose="020B0604020202020204" charset="0"/>
-              <a:cs typeface="Mark OT 2 Heavy"/>
-              <a:sym typeface="Mark OT 2 Heavy"/>
-            </a:endParaRPr>
+              <a:t>Shortlist</a:t>
+            </a:r>
           </a:p>
         </p:txBody>
       </p:sp>
@@ -5866,7 +5857,7 @@
         <p:spPr>
           <a:xfrm>
             <a:off x="686118" y="2051434"/>
-            <a:ext cx="6441749" cy="1491177"/>
+            <a:ext cx="6441749" cy="605615"/>
           </a:xfrm>
           <a:prstGeom prst="rect">
             <a:avLst/>
@@ -5984,7 +5975,7 @@
               </a:spcAft>
             </a:pPr>
             <a:r>
-              <a:rPr lang="en-US" sz="5400" b="1" dirty="0">
+              <a:rPr lang="en-US" sz="3400" b="1" dirty="0">
                 <a:solidFill>
                   <a:srgbClr val="004899"/>
                 </a:solidFill>
@@ -5993,32 +5984,7 @@
                 <a:cs typeface="Mark OT 1 Heavy"/>
                 <a:sym typeface="Mark OT 1 Heavy"/>
               </a:rPr>
-              <a:t>COMMERCIAL</a:t>
-            </a:r>
-          </a:p>
-          <a:p>
-            <a:pPr algn="l">
-              <a:lnSpc>
-                <a:spcPts val="5100"/>
-              </a:lnSpc>
-              <a:spcBef>
-                <a:spcPts val="600"/>
-              </a:spcBef>
-              <a:spcAft>
-                <a:spcPts val="600"/>
-              </a:spcAft>
-            </a:pPr>
-            <a:r>
-              <a:rPr lang="en-US" sz="5400" b="1" dirty="0">
-                <a:solidFill>
-                  <a:srgbClr val="004899"/>
-                </a:solidFill>
-                <a:latin typeface="Inter Bold" panose="020B0604020202020204" charset="0"/>
-                <a:ea typeface="Inter Bold" panose="020B0604020202020204" charset="0"/>
-                <a:cs typeface="Mark OT 1 Heavy"/>
-                <a:sym typeface="Mark OT 1 Heavy"/>
-              </a:rPr>
-              <a:t>DIRECTOR</a:t>
+              <a:t>CHIEF EXECUTIVE OFFICER</a:t>
             </a:r>
           </a:p>
         </p:txBody>
@@ -6038,7 +6004,7 @@
         <p:spPr>
           <a:xfrm>
             <a:off x="730190" y="7147825"/>
-            <a:ext cx="1719949" cy="410369"/>
+            <a:ext cx="1719949" cy="205184"/>
           </a:xfrm>
           <a:prstGeom prst="rect">
             <a:avLst/>
@@ -6150,7 +6116,7 @@
               </a:lnSpc>
             </a:pPr>
             <a:r>
-              <a:rPr lang="en-US" sz="1451" b="1">
+              <a:rPr lang="en-US" sz="1451" b="1" dirty="0">
                 <a:solidFill>
                   <a:srgbClr val="FFFFFF"/>
                 </a:solidFill>
@@ -6159,7 +6125,7 @@
                 <a:cs typeface="Mark OT 1 Heavy"/>
                 <a:sym typeface="Mark OT 1 Heavy"/>
               </a:rPr>
-              <a:t>EVOLUTION HEALTHCARE</a:t>
+              <a:t>Unico Group</a:t>
             </a:r>
           </a:p>
         </p:txBody>
@@ -6185,7 +6151,7 @@
         <p:cNvPr id="1" name="">
           <a:extLst>
             <a:ext uri="{FF2B5EF4-FFF2-40B4-BE49-F238E27FC236}">
-              <a16:creationId xmlns:a16="http://schemas.microsoft.com/office/drawing/2014/main" id="{3B7DD9BB-70BE-072D-ECA8-E5373A344729}"/>
+              <a16:creationId xmlns:a16="http://schemas.microsoft.com/office/drawing/2014/main" id="{1BB28CE0-98E3-F09C-2894-5E684CC91FAB}"/>
             </a:ext>
           </a:extLst>
         </p:cNvPr>
@@ -6202,10 +6168,45 @@
       </p:grpSpPr>
       <p:sp>
         <p:nvSpPr>
+          <p:cNvPr id="2" name="FooterBar">
+            <a:extLst>
+              <a:ext uri="{FF2B5EF4-FFF2-40B4-BE49-F238E27FC236}">
+                <a16:creationId xmlns:a16="http://schemas.microsoft.com/office/drawing/2014/main" id="{2183C1C6-2288-1547-26F0-734366D2C27F}"/>
+              </a:ext>
+            </a:extLst>
+          </p:cNvPr>
+          <p:cNvSpPr/>
+          <p:nvPr/>
+        </p:nvSpPr>
+        <p:spPr>
+          <a:xfrm>
+            <a:off x="0" y="9525000"/>
+            <a:ext cx="6858000" cy="381000"/>
+          </a:xfrm>
+          <a:prstGeom prst="rect">
+            <a:avLst/>
+          </a:prstGeom>
+          <a:solidFill>
+            <a:srgbClr val="004899"/>
+          </a:solidFill>
+          <a:ln>
+            <a:noFill/>
+          </a:ln>
+        </p:spPr>
+        <p:txBody>
+          <a:bodyPr/>
+          <a:lstStyle/>
+          <a:p>
+            <a:endParaRPr lang="en-NZ"/>
+          </a:p>
+        </p:txBody>
+      </p:sp>
+      <p:sp>
+        <p:nvSpPr>
           <p:cNvPr id="4" name="Rectangle: Rounded Corners 3">
             <a:extLst>
               <a:ext uri="{FF2B5EF4-FFF2-40B4-BE49-F238E27FC236}">
-                <a16:creationId xmlns:a16="http://schemas.microsoft.com/office/drawing/2014/main" id="{1D8ABA76-F9F3-2090-E556-2A0180669B0F}"/>
+                <a16:creationId xmlns:a16="http://schemas.microsoft.com/office/drawing/2014/main" id="{B93F0481-94F8-7253-2884-D95547AC7AF9}"/>
               </a:ext>
             </a:extLst>
           </p:cNvPr>
@@ -6216,8 +6217,8 @@
         </p:nvSpPr>
         <p:spPr>
           <a:xfrm>
-            <a:off x="143586" y="76200"/>
-            <a:ext cx="6580646" cy="5061686"/>
+            <a:off x="-42935" y="-17569"/>
+            <a:ext cx="6941489" cy="4781725"/>
           </a:xfrm>
           <a:prstGeom prst="roundRect">
             <a:avLst>
@@ -6267,19 +6268,19 @@
           <p:cNvPr id="7" name="TextBox 6">
             <a:extLst>
               <a:ext uri="{FF2B5EF4-FFF2-40B4-BE49-F238E27FC236}">
-                <a16:creationId xmlns:a16="http://schemas.microsoft.com/office/drawing/2014/main" id="{B5EFD4CC-A547-8444-ABA1-D149321AC930}"/>
+                <a16:creationId xmlns:a16="http://schemas.microsoft.com/office/drawing/2014/main" id="{4E730D17-CB42-D586-5C53-5F5EF429BB2E}"/>
               </a:ext>
             </a:extLst>
           </p:cNvPr>
           <p:cNvSpPr txBox="1">
-            <a:spLocks noGrp="1" noRot="1" noMove="1" noResize="1" noEditPoints="1" noAdjustHandles="1" noChangeArrowheads="1" noChangeShapeType="1"/>
+            <a:spLocks/>
           </p:cNvSpPr>
           <p:nvPr/>
         </p:nvSpPr>
         <p:spPr>
           <a:xfrm>
-            <a:off x="376929" y="136682"/>
-            <a:ext cx="2053005" cy="369332"/>
+            <a:off x="397086" y="129895"/>
+            <a:ext cx="1985388" cy="369332"/>
           </a:xfrm>
           <a:prstGeom prst="rect">
             <a:avLst/>
@@ -6294,14 +6295,14 @@
           <a:p>
             <a:pPr algn="ctr"/>
             <a:r>
-              <a:rPr lang="en-NZ" b="1">
+              <a:rPr lang="en-NZ" b="1" dirty="0">
                 <a:solidFill>
                   <a:schemeClr val="bg1"/>
                 </a:solidFill>
                 <a:ea typeface="Roboto" panose="02000000000000000000" pitchFamily="2" charset="0"/>
                 <a:cs typeface="Roboto" panose="02000000000000000000" pitchFamily="2" charset="0"/>
               </a:rPr>
-              <a:t>Emma Hardie</a:t>
+              <a:t>Phillip Worsley</a:t>
             </a:r>
           </a:p>
         </p:txBody>
@@ -6311,24 +6312,24 @@
           <p:cNvPr id="8" name="Table 7">
             <a:extLst>
               <a:ext uri="{FF2B5EF4-FFF2-40B4-BE49-F238E27FC236}">
-                <a16:creationId xmlns:a16="http://schemas.microsoft.com/office/drawing/2014/main" id="{5D1F3BCA-A460-475E-DB24-B995DD2538C1}"/>
+                <a16:creationId xmlns:a16="http://schemas.microsoft.com/office/drawing/2014/main" id="{FFBD6999-8248-1B7C-C6F3-3AA736010ED6}"/>
               </a:ext>
             </a:extLst>
           </p:cNvPr>
           <p:cNvGraphicFramePr>
-            <a:graphicFrameLocks noGrp="1" noDrilldown="1" noMove="1" noResize="1"/>
+            <a:graphicFrameLocks/>
           </p:cNvGraphicFramePr>
           <p:nvPr>
             <p:extLst>
               <p:ext uri="{D42A27DB-BD31-4B8C-83A1-F6EECF244321}">
-                <p14:modId xmlns:p14="http://schemas.microsoft.com/office/powerpoint/2010/main" val="3681647206"/>
+                <p14:modId xmlns:p14="http://schemas.microsoft.com/office/powerpoint/2010/main" val="2710157690"/>
               </p:ext>
             </p:extLst>
           </p:nvPr>
         </p:nvGraphicFramePr>
         <p:xfrm>
-          <a:off x="277440" y="2487015"/>
-          <a:ext cx="6344340" cy="2561048"/>
+          <a:off x="192428" y="2209085"/>
+          <a:ext cx="6519606" cy="2436950"/>
         </p:xfrm>
         <a:graphic>
           <a:graphicData uri="http://schemas.openxmlformats.org/drawingml/2006/table">
@@ -6337,35 +6338,35 @@
                 <a:tableStyleId>{8EC20E35-A176-4012-BC5E-935CFFF8708E}</a:tableStyleId>
               </a:tblPr>
               <a:tblGrid>
-                <a:gridCol w="1788776">
+                <a:gridCol w="1325979">
                   <a:extLst>
                     <a:ext uri="{9D8B030D-6E8A-4147-A177-3AD203B41FA5}">
                       <a16:colId xmlns:a16="http://schemas.microsoft.com/office/drawing/2014/main" val="2119135538"/>
                     </a:ext>
                   </a:extLst>
                 </a:gridCol>
-                <a:gridCol w="2044709">
+                <a:gridCol w="2214694">
                   <a:extLst>
                     <a:ext uri="{9D8B030D-6E8A-4147-A177-3AD203B41FA5}">
                       <a16:colId xmlns:a16="http://schemas.microsoft.com/office/drawing/2014/main" val="819543413"/>
                     </a:ext>
                   </a:extLst>
                 </a:gridCol>
-                <a:gridCol w="836952">
+                <a:gridCol w="813732">
                   <a:extLst>
                     <a:ext uri="{9D8B030D-6E8A-4147-A177-3AD203B41FA5}">
                       <a16:colId xmlns:a16="http://schemas.microsoft.com/office/drawing/2014/main" val="2699358850"/>
                     </a:ext>
                   </a:extLst>
                 </a:gridCol>
-                <a:gridCol w="676825">
+                <a:gridCol w="738231">
                   <a:extLst>
                     <a:ext uri="{9D8B030D-6E8A-4147-A177-3AD203B41FA5}">
                       <a16:colId xmlns:a16="http://schemas.microsoft.com/office/drawing/2014/main" val="3271143972"/>
                     </a:ext>
                   </a:extLst>
                 </a:gridCol>
-                <a:gridCol w="997078">
+                <a:gridCol w="1426970">
                   <a:extLst>
                     <a:ext uri="{9D8B030D-6E8A-4147-A177-3AD203B41FA5}">
                       <a16:colId xmlns:a16="http://schemas.microsoft.com/office/drawing/2014/main" val="3189428181"/>
@@ -6383,7 +6384,7 @@
                         <a:buNone/>
                       </a:pPr>
                       <a:r>
-                        <a:rPr lang="en-NZ" sz="700"/>
+                        <a:rPr lang="en-NZ" sz="900"/>
                         <a:t>Company</a:t>
                       </a:r>
                     </a:p>
@@ -6447,7 +6448,7 @@
                         <a:buNone/>
                       </a:pPr>
                       <a:r>
-                        <a:rPr lang="en-NZ" sz="700"/>
+                        <a:rPr lang="en-NZ" sz="900"/>
                         <a:t>Title</a:t>
                       </a:r>
                     </a:p>
@@ -6462,8 +6463,14 @@
                       <a:headEnd type="none" w="med" len="med"/>
                       <a:tailEnd type="none" w="med" len="med"/>
                     </a:lnL>
-                    <a:lnR>
-                      <a:noFill/>
+                    <a:lnR w="12700" cap="flat" cmpd="sng" algn="ctr">
+                      <a:solidFill>
+                        <a:schemeClr val="bg1"/>
+                      </a:solidFill>
+                      <a:prstDash val="solid"/>
+                      <a:round/>
+                      <a:headEnd type="none" w="med" len="med"/>
+                      <a:tailEnd type="none" w="med" len="med"/>
                     </a:lnR>
                     <a:lnT w="12700" cap="flat" cmpd="sng" algn="ctr">
                       <a:solidFill>
@@ -6505,17 +6512,29 @@
                         <a:buNone/>
                       </a:pPr>
                       <a:r>
-                        <a:rPr lang="en-NZ" sz="700"/>
+                        <a:rPr lang="en-NZ" sz="900"/>
                         <a:t>Start Date</a:t>
                       </a:r>
                     </a:p>
                   </a:txBody>
                   <a:tcPr anchor="ctr">
-                    <a:lnL>
-                      <a:noFill/>
+                    <a:lnL w="12700" cap="flat" cmpd="sng" algn="ctr">
+                      <a:solidFill>
+                        <a:schemeClr val="bg1"/>
+                      </a:solidFill>
+                      <a:prstDash val="solid"/>
+                      <a:round/>
+                      <a:headEnd type="none" w="med" len="med"/>
+                      <a:tailEnd type="none" w="med" len="med"/>
                     </a:lnL>
-                    <a:lnR>
-                      <a:noFill/>
+                    <a:lnR w="12700" cap="flat" cmpd="sng" algn="ctr">
+                      <a:solidFill>
+                        <a:schemeClr val="bg1"/>
+                      </a:solidFill>
+                      <a:prstDash val="solid"/>
+                      <a:round/>
+                      <a:headEnd type="none" w="med" len="med"/>
+                      <a:tailEnd type="none" w="med" len="med"/>
                     </a:lnR>
                     <a:lnT w="12700" cap="flat" cmpd="sng" algn="ctr">
                       <a:solidFill>
@@ -6557,17 +6576,29 @@
                         <a:buNone/>
                       </a:pPr>
                       <a:r>
-                        <a:rPr lang="en-NZ" sz="700"/>
+                        <a:rPr lang="en-NZ" sz="900"/>
                         <a:t>End Date</a:t>
                       </a:r>
                     </a:p>
                   </a:txBody>
                   <a:tcPr anchor="ctr">
-                    <a:lnL>
-                      <a:noFill/>
+                    <a:lnL w="12700" cap="flat" cmpd="sng" algn="ctr">
+                      <a:solidFill>
+                        <a:schemeClr val="bg1"/>
+                      </a:solidFill>
+                      <a:prstDash val="solid"/>
+                      <a:round/>
+                      <a:headEnd type="none" w="med" len="med"/>
+                      <a:tailEnd type="none" w="med" len="med"/>
                     </a:lnL>
-                    <a:lnR>
-                      <a:noFill/>
+                    <a:lnR w="12700" cap="flat" cmpd="sng" algn="ctr">
+                      <a:solidFill>
+                        <a:schemeClr val="bg1"/>
+                      </a:solidFill>
+                      <a:prstDash val="solid"/>
+                      <a:round/>
+                      <a:headEnd type="none" w="med" len="med"/>
+                      <a:tailEnd type="none" w="med" len="med"/>
                     </a:lnR>
                     <a:lnT w="12700" cap="flat" cmpd="sng" algn="ctr">
                       <a:solidFill>
@@ -6609,14 +6640,20 @@
                         <a:buNone/>
                       </a:pPr>
                       <a:r>
-                        <a:rPr lang="en-NZ" sz="700"/>
+                        <a:rPr lang="en-NZ" sz="900" dirty="0"/>
                         <a:t>Duration</a:t>
                       </a:r>
                     </a:p>
                   </a:txBody>
                   <a:tcPr anchor="ctr">
-                    <a:lnL>
-                      <a:noFill/>
+                    <a:lnL w="12700" cap="flat" cmpd="sng" algn="ctr">
+                      <a:solidFill>
+                        <a:schemeClr val="bg1"/>
+                      </a:solidFill>
+                      <a:prstDash val="solid"/>
+                      <a:round/>
+                      <a:headEnd type="none" w="med" len="med"/>
+                      <a:tailEnd type="none" w="med" len="med"/>
                     </a:lnL>
                     <a:lnR w="12700" cap="flat" cmpd="sng" algn="ctr">
                       <a:solidFill>
@@ -6674,8 +6711,8 @@
                         <a:buNone/>
                       </a:pPr>
                       <a:r>
-                        <a:rPr lang="en-GB" sz="700" b="1"/>
-                        <a:t>NZ Green Investment Finance Ltd </a:t>
+                        <a:rPr lang="en-GB" sz="900" b="1"/>
+                        <a:t>Lumino The Dentists</a:t>
                       </a:r>
                     </a:p>
                   </a:txBody>
@@ -6729,8 +6766,8 @@
                         <a:buNone/>
                       </a:pPr>
                       <a:r>
-                        <a:rPr lang="en-NZ" sz="700"/>
-                        <a:t>Head of Portfolio Investments</a:t>
+                        <a:rPr lang="en-NZ" sz="900"/>
+                        <a:t>General Manager</a:t>
                       </a:r>
                     </a:p>
                   </a:txBody>
@@ -6778,8 +6815,8 @@
                         <a:buNone/>
                       </a:pPr>
                       <a:r>
-                        <a:rPr lang="en-NZ" sz="700"/>
-                        <a:t>May 2025</a:t>
+                        <a:rPr lang="en-NZ" sz="900"/>
+                        <a:t>Jan 2020</a:t>
                       </a:r>
                     </a:p>
                   </a:txBody>
@@ -6827,8 +6864,8 @@
                         <a:buNone/>
                       </a:pPr>
                       <a:r>
-                        <a:rPr lang="en-NZ" sz="700"/>
-                        <a:t>Oct 2025</a:t>
+                        <a:rPr lang="en-NZ" sz="900" dirty="0"/>
+                        <a:t>Apr 2024</a:t>
                       </a:r>
                     </a:p>
                   </a:txBody>
@@ -6876,8 +6913,8 @@
                         <a:buNone/>
                       </a:pPr>
                       <a:r>
-                        <a:rPr lang="en-NZ" sz="700"/>
-                        <a:t>6 months</a:t>
+                        <a:rPr lang="en-NZ" sz="900" dirty="0"/>
+                        <a:t>4 years, 3 months</a:t>
                       </a:r>
                     </a:p>
                   </a:txBody>
@@ -6937,7 +6974,10 @@
                       <a:pPr>
                         <a:buNone/>
                       </a:pPr>
-                      <a:endParaRPr lang="en-GB" sz="700" b="1"/>
+                      <a:r>
+                        <a:rPr lang="en-GB" sz="900" b="1"/>
+                        <a:t>Spark New Zealand</a:t>
+                      </a:r>
                     </a:p>
                   </a:txBody>
                   <a:tcPr anchor="ctr">
@@ -6962,8 +7002,14 @@
                       <a:headEnd type="none" w="med" len="med"/>
                       <a:tailEnd type="none" w="med" len="med"/>
                     </a:lnT>
-                    <a:lnB>
-                      <a:noFill/>
+                    <a:lnB w="12700" cap="flat" cmpd="sng" algn="ctr">
+                      <a:solidFill>
+                        <a:schemeClr val="bg1"/>
+                      </a:solidFill>
+                      <a:prstDash val="solid"/>
+                      <a:round/>
+                      <a:headEnd type="none" w="med" len="med"/>
+                      <a:tailEnd type="none" w="med" len="med"/>
                     </a:lnB>
                     <a:lnTlToBr w="12700" cmpd="sng">
                       <a:noFill/>
@@ -6984,8 +7030,8 @@
                         <a:buNone/>
                       </a:pPr>
                       <a:r>
-                        <a:rPr lang="en-NZ" sz="700"/>
-                        <a:t>Investment Manager</a:t>
+                        <a:rPr lang="en-NZ" sz="900" dirty="0"/>
+                        <a:t>Omni Channel Tribe Lead</a:t>
                       </a:r>
                     </a:p>
                   </a:txBody>
@@ -7005,8 +7051,14 @@
                       <a:headEnd type="none" w="med" len="med"/>
                       <a:tailEnd type="none" w="med" len="med"/>
                     </a:lnT>
-                    <a:lnB>
-                      <a:noFill/>
+                    <a:lnB w="12700" cap="flat" cmpd="sng" algn="ctr">
+                      <a:solidFill>
+                        <a:schemeClr val="bg1"/>
+                      </a:solidFill>
+                      <a:prstDash val="solid"/>
+                      <a:round/>
+                      <a:headEnd type="none" w="med" len="med"/>
+                      <a:tailEnd type="none" w="med" len="med"/>
                     </a:lnB>
                     <a:lnTlToBr w="12700" cmpd="sng">
                       <a:noFill/>
@@ -7027,8 +7079,8 @@
                         <a:buNone/>
                       </a:pPr>
                       <a:r>
-                        <a:rPr lang="en-NZ" sz="700"/>
-                        <a:t>Aug 2021</a:t>
+                        <a:rPr lang="en-NZ" sz="900" dirty="0"/>
+                        <a:t>Jul 2018</a:t>
                       </a:r>
                     </a:p>
                   </a:txBody>
@@ -7048,8 +7100,14 @@
                       <a:headEnd type="none" w="med" len="med"/>
                       <a:tailEnd type="none" w="med" len="med"/>
                     </a:lnT>
-                    <a:lnB>
-                      <a:noFill/>
+                    <a:lnB w="12700" cap="flat" cmpd="sng" algn="ctr">
+                      <a:solidFill>
+                        <a:schemeClr val="bg1"/>
+                      </a:solidFill>
+                      <a:prstDash val="solid"/>
+                      <a:round/>
+                      <a:headEnd type="none" w="med" len="med"/>
+                      <a:tailEnd type="none" w="med" len="med"/>
                     </a:lnB>
                     <a:lnTlToBr w="12700" cmpd="sng">
                       <a:noFill/>
@@ -7070,8 +7128,8 @@
                         <a:buNone/>
                       </a:pPr>
                       <a:r>
-                        <a:rPr lang="en-NZ" sz="700"/>
-                        <a:t>May 2025</a:t>
+                        <a:rPr lang="en-NZ" sz="900"/>
+                        <a:t>Aug 2019</a:t>
                       </a:r>
                     </a:p>
                   </a:txBody>
@@ -7091,8 +7149,14 @@
                       <a:headEnd type="none" w="med" len="med"/>
                       <a:tailEnd type="none" w="med" len="med"/>
                     </a:lnT>
-                    <a:lnB>
-                      <a:noFill/>
+                    <a:lnB w="12700" cap="flat" cmpd="sng" algn="ctr">
+                      <a:solidFill>
+                        <a:schemeClr val="bg1"/>
+                      </a:solidFill>
+                      <a:prstDash val="solid"/>
+                      <a:round/>
+                      <a:headEnd type="none" w="med" len="med"/>
+                      <a:tailEnd type="none" w="med" len="med"/>
                     </a:lnB>
                     <a:lnTlToBr w="12700" cmpd="sng">
                       <a:noFill/>
@@ -7113,8 +7177,8 @@
                         <a:buNone/>
                       </a:pPr>
                       <a:r>
-                        <a:rPr lang="en-NZ" sz="700"/>
-                        <a:t>3 years, 9 months</a:t>
+                        <a:rPr lang="en-NZ" sz="900"/>
+                        <a:t>1 year, 1 month</a:t>
                       </a:r>
                     </a:p>
                   </a:txBody>
@@ -7140,8 +7204,14 @@
                       <a:headEnd type="none" w="med" len="med"/>
                       <a:tailEnd type="none" w="med" len="med"/>
                     </a:lnT>
-                    <a:lnB>
-                      <a:noFill/>
+                    <a:lnB w="12700" cap="flat" cmpd="sng" algn="ctr">
+                      <a:solidFill>
+                        <a:schemeClr val="bg1"/>
+                      </a:solidFill>
+                      <a:prstDash val="solid"/>
+                      <a:round/>
+                      <a:headEnd type="none" w="med" len="med"/>
+                      <a:tailEnd type="none" w="med" len="med"/>
                     </a:lnB>
                     <a:lnTlToBr w="12700" cmpd="sng">
                       <a:noFill/>
@@ -7155,7 +7225,529 @@
                 </a:tc>
                 <a:extLst>
                   <a:ext uri="{0D108BD9-81ED-4DB2-BD59-A6C34878D82A}">
-                    <a16:rowId xmlns:a16="http://schemas.microsoft.com/office/drawing/2014/main" val="1388529160"/>
+                    <a16:rowId xmlns:a16="http://schemas.microsoft.com/office/drawing/2014/main" val="4119857621"/>
+                  </a:ext>
+                </a:extLst>
+              </a:tr>
+              <a:tr h="295366">
+                <a:tc>
+                  <a:txBody>
+                    <a:bodyPr/>
+                    <a:lstStyle/>
+                    <a:p>
+                      <a:pPr>
+                        <a:buNone/>
+                      </a:pPr>
+                      <a:endParaRPr sz="900" dirty="0"/>
+                    </a:p>
+                  </a:txBody>
+                  <a:tcPr anchor="ctr">
+                    <a:lnL w="12700" cap="flat" cmpd="sng" algn="ctr">
+                      <a:solidFill>
+                        <a:schemeClr val="bg1"/>
+                      </a:solidFill>
+                      <a:prstDash val="solid"/>
+                      <a:round/>
+                      <a:headEnd type="none" w="med" len="med"/>
+                      <a:tailEnd type="none" w="med" len="med"/>
+                    </a:lnL>
+                    <a:lnR>
+                      <a:noFill/>
+                    </a:lnR>
+                    <a:lnT w="12700" cap="flat" cmpd="sng" algn="ctr">
+                      <a:solidFill>
+                        <a:schemeClr val="bg1"/>
+                      </a:solidFill>
+                      <a:prstDash val="solid"/>
+                      <a:round/>
+                      <a:headEnd type="none" w="med" len="med"/>
+                      <a:tailEnd type="none" w="med" len="med"/>
+                    </a:lnT>
+                    <a:lnB w="12700" cap="flat" cmpd="sng" algn="ctr">
+                      <a:solidFill>
+                        <a:schemeClr val="bg1"/>
+                      </a:solidFill>
+                      <a:prstDash val="solid"/>
+                      <a:round/>
+                      <a:headEnd type="none" w="med" len="med"/>
+                      <a:tailEnd type="none" w="med" len="med"/>
+                    </a:lnB>
+                    <a:lnTlToBr w="12700" cmpd="sng">
+                      <a:noFill/>
+                      <a:prstDash val="solid"/>
+                    </a:lnTlToBr>
+                    <a:lnBlToTr w="12700" cmpd="sng">
+                      <a:noFill/>
+                      <a:prstDash val="solid"/>
+                    </a:lnBlToTr>
+                  </a:tcPr>
+                </a:tc>
+                <a:tc>
+                  <a:txBody>
+                    <a:bodyPr/>
+                    <a:lstStyle/>
+                    <a:p>
+                      <a:pPr>
+                        <a:buNone/>
+                      </a:pPr>
+                      <a:r>
+                        <a:rPr lang="en-NZ" sz="900" dirty="0"/>
+                        <a:t>Head of Channel Operations and Planning (Sales and Service)</a:t>
+                      </a:r>
+                    </a:p>
+                  </a:txBody>
+                  <a:tcPr anchor="ctr">
+                    <a:lnL>
+                      <a:noFill/>
+                    </a:lnL>
+                    <a:lnR>
+                      <a:noFill/>
+                    </a:lnR>
+                    <a:lnT w="12700" cap="flat" cmpd="sng" algn="ctr">
+                      <a:solidFill>
+                        <a:schemeClr val="bg1"/>
+                      </a:solidFill>
+                      <a:prstDash val="solid"/>
+                      <a:round/>
+                      <a:headEnd type="none" w="med" len="med"/>
+                      <a:tailEnd type="none" w="med" len="med"/>
+                    </a:lnT>
+                    <a:lnB w="12700" cap="flat" cmpd="sng" algn="ctr">
+                      <a:solidFill>
+                        <a:schemeClr val="bg1"/>
+                      </a:solidFill>
+                      <a:prstDash val="solid"/>
+                      <a:round/>
+                      <a:headEnd type="none" w="med" len="med"/>
+                      <a:tailEnd type="none" w="med" len="med"/>
+                    </a:lnB>
+                    <a:lnTlToBr w="12700" cmpd="sng">
+                      <a:noFill/>
+                      <a:prstDash val="solid"/>
+                    </a:lnTlToBr>
+                    <a:lnBlToTr w="12700" cmpd="sng">
+                      <a:noFill/>
+                      <a:prstDash val="solid"/>
+                    </a:lnBlToTr>
+                  </a:tcPr>
+                </a:tc>
+                <a:tc>
+                  <a:txBody>
+                    <a:bodyPr/>
+                    <a:lstStyle/>
+                    <a:p>
+                      <a:pPr>
+                        <a:buNone/>
+                      </a:pPr>
+                      <a:r>
+                        <a:rPr lang="en-NZ" sz="900"/>
+                        <a:t>Jul 2017</a:t>
+                      </a:r>
+                    </a:p>
+                  </a:txBody>
+                  <a:tcPr anchor="ctr">
+                    <a:lnL>
+                      <a:noFill/>
+                    </a:lnL>
+                    <a:lnR>
+                      <a:noFill/>
+                    </a:lnR>
+                    <a:lnT w="12700" cap="flat" cmpd="sng" algn="ctr">
+                      <a:solidFill>
+                        <a:schemeClr val="bg1"/>
+                      </a:solidFill>
+                      <a:prstDash val="solid"/>
+                      <a:round/>
+                      <a:headEnd type="none" w="med" len="med"/>
+                      <a:tailEnd type="none" w="med" len="med"/>
+                    </a:lnT>
+                    <a:lnB w="12700" cap="flat" cmpd="sng" algn="ctr">
+                      <a:solidFill>
+                        <a:schemeClr val="bg1"/>
+                      </a:solidFill>
+                      <a:prstDash val="solid"/>
+                      <a:round/>
+                      <a:headEnd type="none" w="med" len="med"/>
+                      <a:tailEnd type="none" w="med" len="med"/>
+                    </a:lnB>
+                    <a:lnTlToBr w="12700" cmpd="sng">
+                      <a:noFill/>
+                      <a:prstDash val="solid"/>
+                    </a:lnTlToBr>
+                    <a:lnBlToTr w="12700" cmpd="sng">
+                      <a:noFill/>
+                      <a:prstDash val="solid"/>
+                    </a:lnBlToTr>
+                  </a:tcPr>
+                </a:tc>
+                <a:tc>
+                  <a:txBody>
+                    <a:bodyPr/>
+                    <a:lstStyle/>
+                    <a:p>
+                      <a:pPr>
+                        <a:buNone/>
+                      </a:pPr>
+                      <a:r>
+                        <a:rPr lang="en-NZ" sz="900"/>
+                        <a:t>Jul 2018</a:t>
+                      </a:r>
+                    </a:p>
+                  </a:txBody>
+                  <a:tcPr anchor="ctr">
+                    <a:lnL>
+                      <a:noFill/>
+                    </a:lnL>
+                    <a:lnR>
+                      <a:noFill/>
+                    </a:lnR>
+                    <a:lnT w="12700" cap="flat" cmpd="sng" algn="ctr">
+                      <a:solidFill>
+                        <a:schemeClr val="bg1"/>
+                      </a:solidFill>
+                      <a:prstDash val="solid"/>
+                      <a:round/>
+                      <a:headEnd type="none" w="med" len="med"/>
+                      <a:tailEnd type="none" w="med" len="med"/>
+                    </a:lnT>
+                    <a:lnB w="12700" cap="flat" cmpd="sng" algn="ctr">
+                      <a:solidFill>
+                        <a:schemeClr val="bg1"/>
+                      </a:solidFill>
+                      <a:prstDash val="solid"/>
+                      <a:round/>
+                      <a:headEnd type="none" w="med" len="med"/>
+                      <a:tailEnd type="none" w="med" len="med"/>
+                    </a:lnB>
+                    <a:lnTlToBr w="12700" cmpd="sng">
+                      <a:noFill/>
+                      <a:prstDash val="solid"/>
+                    </a:lnTlToBr>
+                    <a:lnBlToTr w="12700" cmpd="sng">
+                      <a:noFill/>
+                      <a:prstDash val="solid"/>
+                    </a:lnBlToTr>
+                  </a:tcPr>
+                </a:tc>
+                <a:tc>
+                  <a:txBody>
+                    <a:bodyPr/>
+                    <a:lstStyle/>
+                    <a:p>
+                      <a:pPr>
+                        <a:buNone/>
+                      </a:pPr>
+                      <a:r>
+                        <a:rPr lang="en-NZ" sz="900"/>
+                        <a:t>1 year</a:t>
+                      </a:r>
+                    </a:p>
+                  </a:txBody>
+                  <a:tcPr anchor="ctr">
+                    <a:lnL>
+                      <a:noFill/>
+                    </a:lnL>
+                    <a:lnR w="12700" cap="flat" cmpd="sng" algn="ctr">
+                      <a:solidFill>
+                        <a:schemeClr val="bg1"/>
+                      </a:solidFill>
+                      <a:prstDash val="solid"/>
+                      <a:round/>
+                      <a:headEnd type="none" w="med" len="med"/>
+                      <a:tailEnd type="none" w="med" len="med"/>
+                    </a:lnR>
+                    <a:lnT w="12700" cap="flat" cmpd="sng" algn="ctr">
+                      <a:solidFill>
+                        <a:schemeClr val="bg1"/>
+                      </a:solidFill>
+                      <a:prstDash val="solid"/>
+                      <a:round/>
+                      <a:headEnd type="none" w="med" len="med"/>
+                      <a:tailEnd type="none" w="med" len="med"/>
+                    </a:lnT>
+                    <a:lnB w="12700" cap="flat" cmpd="sng" algn="ctr">
+                      <a:solidFill>
+                        <a:schemeClr val="bg1"/>
+                      </a:solidFill>
+                      <a:prstDash val="solid"/>
+                      <a:round/>
+                      <a:headEnd type="none" w="med" len="med"/>
+                      <a:tailEnd type="none" w="med" len="med"/>
+                    </a:lnB>
+                    <a:lnTlToBr w="12700" cmpd="sng">
+                      <a:noFill/>
+                      <a:prstDash val="solid"/>
+                    </a:lnTlToBr>
+                    <a:lnBlToTr w="12700" cmpd="sng">
+                      <a:noFill/>
+                      <a:prstDash val="solid"/>
+                    </a:lnBlToTr>
+                  </a:tcPr>
+                </a:tc>
+                <a:extLst>
+                  <a:ext uri="{0D108BD9-81ED-4DB2-BD59-A6C34878D82A}">
+                    <a16:rowId xmlns:a16="http://schemas.microsoft.com/office/drawing/2014/main" val="1097637566"/>
+                  </a:ext>
+                </a:extLst>
+              </a:tr>
+              <a:tr h="295366">
+                <a:tc>
+                  <a:txBody>
+                    <a:bodyPr/>
+                    <a:lstStyle/>
+                    <a:p>
+                      <a:pPr>
+                        <a:buNone/>
+                      </a:pPr>
+                      <a:endParaRPr sz="900"/>
+                    </a:p>
+                  </a:txBody>
+                  <a:tcPr anchor="ctr">
+                    <a:lnL w="12700" cap="flat" cmpd="sng" algn="ctr">
+                      <a:solidFill>
+                        <a:schemeClr val="bg1"/>
+                      </a:solidFill>
+                      <a:prstDash val="solid"/>
+                      <a:round/>
+                      <a:headEnd type="none" w="med" len="med"/>
+                      <a:tailEnd type="none" w="med" len="med"/>
+                    </a:lnL>
+                    <a:lnR>
+                      <a:noFill/>
+                    </a:lnR>
+                    <a:lnT w="12700" cap="flat" cmpd="sng" algn="ctr">
+                      <a:solidFill>
+                        <a:schemeClr val="bg1"/>
+                      </a:solidFill>
+                      <a:prstDash val="solid"/>
+                      <a:round/>
+                      <a:headEnd type="none" w="med" len="med"/>
+                      <a:tailEnd type="none" w="med" len="med"/>
+                    </a:lnT>
+                    <a:lnB w="12700" cap="flat" cmpd="sng" algn="ctr">
+                      <a:solidFill>
+                        <a:schemeClr val="bg1"/>
+                      </a:solidFill>
+                      <a:prstDash val="solid"/>
+                      <a:round/>
+                      <a:headEnd type="none" w="med" len="med"/>
+                      <a:tailEnd type="none" w="med" len="med"/>
+                    </a:lnB>
+                    <a:lnTlToBr w="12700" cmpd="sng">
+                      <a:noFill/>
+                      <a:prstDash val="solid"/>
+                    </a:lnTlToBr>
+                    <a:lnBlToTr w="12700" cmpd="sng">
+                      <a:noFill/>
+                      <a:prstDash val="solid"/>
+                    </a:lnBlToTr>
+                  </a:tcPr>
+                </a:tc>
+                <a:tc>
+                  <a:txBody>
+                    <a:bodyPr/>
+                    <a:lstStyle/>
+                    <a:p>
+                      <a:pPr>
+                        <a:buNone/>
+                      </a:pPr>
+                      <a:r>
+                        <a:rPr lang="en-NZ" sz="900"/>
+                        <a:t>Head of Sales Operations and Planning</a:t>
+                      </a:r>
+                    </a:p>
+                  </a:txBody>
+                  <a:tcPr anchor="ctr">
+                    <a:lnL>
+                      <a:noFill/>
+                    </a:lnL>
+                    <a:lnR>
+                      <a:noFill/>
+                    </a:lnR>
+                    <a:lnT w="12700" cap="flat" cmpd="sng" algn="ctr">
+                      <a:solidFill>
+                        <a:schemeClr val="bg1"/>
+                      </a:solidFill>
+                      <a:prstDash val="solid"/>
+                      <a:round/>
+                      <a:headEnd type="none" w="med" len="med"/>
+                      <a:tailEnd type="none" w="med" len="med"/>
+                    </a:lnT>
+                    <a:lnB w="12700" cap="flat" cmpd="sng" algn="ctr">
+                      <a:solidFill>
+                        <a:schemeClr val="bg1"/>
+                      </a:solidFill>
+                      <a:prstDash val="solid"/>
+                      <a:round/>
+                      <a:headEnd type="none" w="med" len="med"/>
+                      <a:tailEnd type="none" w="med" len="med"/>
+                    </a:lnB>
+                    <a:lnTlToBr w="12700" cmpd="sng">
+                      <a:noFill/>
+                      <a:prstDash val="solid"/>
+                    </a:lnTlToBr>
+                    <a:lnBlToTr w="12700" cmpd="sng">
+                      <a:noFill/>
+                      <a:prstDash val="solid"/>
+                    </a:lnBlToTr>
+                  </a:tcPr>
+                </a:tc>
+                <a:tc>
+                  <a:txBody>
+                    <a:bodyPr/>
+                    <a:lstStyle/>
+                    <a:p>
+                      <a:pPr>
+                        <a:buNone/>
+                      </a:pPr>
+                      <a:r>
+                        <a:rPr lang="en-NZ" sz="900"/>
+                        <a:t>Oct 2012</a:t>
+                      </a:r>
+                    </a:p>
+                  </a:txBody>
+                  <a:tcPr anchor="ctr">
+                    <a:lnL>
+                      <a:noFill/>
+                    </a:lnL>
+                    <a:lnR>
+                      <a:noFill/>
+                    </a:lnR>
+                    <a:lnT w="12700" cap="flat" cmpd="sng" algn="ctr">
+                      <a:solidFill>
+                        <a:schemeClr val="bg1"/>
+                      </a:solidFill>
+                      <a:prstDash val="solid"/>
+                      <a:round/>
+                      <a:headEnd type="none" w="med" len="med"/>
+                      <a:tailEnd type="none" w="med" len="med"/>
+                    </a:lnT>
+                    <a:lnB w="12700" cap="flat" cmpd="sng" algn="ctr">
+                      <a:solidFill>
+                        <a:schemeClr val="bg1"/>
+                      </a:solidFill>
+                      <a:prstDash val="solid"/>
+                      <a:round/>
+                      <a:headEnd type="none" w="med" len="med"/>
+                      <a:tailEnd type="none" w="med" len="med"/>
+                    </a:lnB>
+                    <a:lnTlToBr w="12700" cmpd="sng">
+                      <a:noFill/>
+                      <a:prstDash val="solid"/>
+                    </a:lnTlToBr>
+                    <a:lnBlToTr w="12700" cmpd="sng">
+                      <a:noFill/>
+                      <a:prstDash val="solid"/>
+                    </a:lnBlToTr>
+                  </a:tcPr>
+                </a:tc>
+                <a:tc>
+                  <a:txBody>
+                    <a:bodyPr/>
+                    <a:lstStyle/>
+                    <a:p>
+                      <a:pPr>
+                        <a:buNone/>
+                      </a:pPr>
+                      <a:r>
+                        <a:rPr lang="en-NZ" sz="900"/>
+                        <a:t>Jun 2017</a:t>
+                      </a:r>
+                    </a:p>
+                  </a:txBody>
+                  <a:tcPr anchor="ctr">
+                    <a:lnL>
+                      <a:noFill/>
+                    </a:lnL>
+                    <a:lnR>
+                      <a:noFill/>
+                    </a:lnR>
+                    <a:lnT w="12700" cap="flat" cmpd="sng" algn="ctr">
+                      <a:solidFill>
+                        <a:schemeClr val="bg1"/>
+                      </a:solidFill>
+                      <a:prstDash val="solid"/>
+                      <a:round/>
+                      <a:headEnd type="none" w="med" len="med"/>
+                      <a:tailEnd type="none" w="med" len="med"/>
+                    </a:lnT>
+                    <a:lnB w="12700" cap="flat" cmpd="sng" algn="ctr">
+                      <a:solidFill>
+                        <a:schemeClr val="bg1"/>
+                      </a:solidFill>
+                      <a:prstDash val="solid"/>
+                      <a:round/>
+                      <a:headEnd type="none" w="med" len="med"/>
+                      <a:tailEnd type="none" w="med" len="med"/>
+                    </a:lnB>
+                    <a:lnTlToBr w="12700" cmpd="sng">
+                      <a:noFill/>
+                      <a:prstDash val="solid"/>
+                    </a:lnTlToBr>
+                    <a:lnBlToTr w="12700" cmpd="sng">
+                      <a:noFill/>
+                      <a:prstDash val="solid"/>
+                    </a:lnBlToTr>
+                  </a:tcPr>
+                </a:tc>
+                <a:tc>
+                  <a:txBody>
+                    <a:bodyPr/>
+                    <a:lstStyle/>
+                    <a:p>
+                      <a:pPr>
+                        <a:buNone/>
+                      </a:pPr>
+                      <a:r>
+                        <a:rPr lang="en-NZ" sz="900"/>
+                        <a:t>4 years, 8 months</a:t>
+                      </a:r>
+                    </a:p>
+                  </a:txBody>
+                  <a:tcPr anchor="ctr">
+                    <a:lnL>
+                      <a:noFill/>
+                    </a:lnL>
+                    <a:lnR w="12700" cap="flat" cmpd="sng" algn="ctr">
+                      <a:solidFill>
+                        <a:schemeClr val="bg1"/>
+                      </a:solidFill>
+                      <a:prstDash val="solid"/>
+                      <a:round/>
+                      <a:headEnd type="none" w="med" len="med"/>
+                      <a:tailEnd type="none" w="med" len="med"/>
+                    </a:lnR>
+                    <a:lnT w="12700" cap="flat" cmpd="sng" algn="ctr">
+                      <a:solidFill>
+                        <a:schemeClr val="bg1"/>
+                      </a:solidFill>
+                      <a:prstDash val="solid"/>
+                      <a:round/>
+                      <a:headEnd type="none" w="med" len="med"/>
+                      <a:tailEnd type="none" w="med" len="med"/>
+                    </a:lnT>
+                    <a:lnB w="12700" cap="flat" cmpd="sng" algn="ctr">
+                      <a:solidFill>
+                        <a:schemeClr val="bg1"/>
+                      </a:solidFill>
+                      <a:prstDash val="solid"/>
+                      <a:round/>
+                      <a:headEnd type="none" w="med" len="med"/>
+                      <a:tailEnd type="none" w="med" len="med"/>
+                    </a:lnB>
+                    <a:lnTlToBr w="12700" cmpd="sng">
+                      <a:noFill/>
+                      <a:prstDash val="solid"/>
+                    </a:lnTlToBr>
+                    <a:lnBlToTr w="12700" cmpd="sng">
+                      <a:noFill/>
+                      <a:prstDash val="solid"/>
+                    </a:lnBlToTr>
+                  </a:tcPr>
+                </a:tc>
+                <a:extLst>
+                  <a:ext uri="{0D108BD9-81ED-4DB2-BD59-A6C34878D82A}">
+                    <a16:rowId xmlns:a16="http://schemas.microsoft.com/office/drawing/2014/main" val="3944235647"/>
                   </a:ext>
                 </a:extLst>
               </a:tr>
@@ -7169,8 +7761,8 @@
                         <a:buNone/>
                       </a:pPr>
                       <a:r>
-                        <a:rPr lang="en-NZ" sz="700" b="1"/>
-                        <a:t>ANZ Bank New Zealand</a:t>
+                        <a:rPr lang="en-GB" sz="900" b="1"/>
+                        <a:t>Vodafone Qatar</a:t>
                       </a:r>
                     </a:p>
                   </a:txBody>
@@ -7187,11 +7779,23 @@
                     <a:lnR>
                       <a:noFill/>
                     </a:lnR>
-                    <a:lnT>
-                      <a:noFill/>
+                    <a:lnT w="12700" cap="flat" cmpd="sng" algn="ctr">
+                      <a:solidFill>
+                        <a:schemeClr val="bg1"/>
+                      </a:solidFill>
+                      <a:prstDash val="solid"/>
+                      <a:round/>
+                      <a:headEnd type="none" w="med" len="med"/>
+                      <a:tailEnd type="none" w="med" len="med"/>
                     </a:lnT>
-                    <a:lnB>
-                      <a:noFill/>
+                    <a:lnB w="12700" cap="flat" cmpd="sng" algn="ctr">
+                      <a:solidFill>
+                        <a:schemeClr val="bg1"/>
+                      </a:solidFill>
+                      <a:prstDash val="solid"/>
+                      <a:round/>
+                      <a:headEnd type="none" w="med" len="med"/>
+                      <a:tailEnd type="none" w="med" len="med"/>
                     </a:lnB>
                     <a:lnTlToBr w="12700" cmpd="sng">
                       <a:noFill/>
@@ -7212,8 +7816,8 @@
                         <a:buNone/>
                       </a:pPr>
                       <a:r>
-                        <a:rPr lang="en-GB" sz="700"/>
-                        <a:t>Head of Corporate Relationships Auckland</a:t>
+                        <a:rPr lang="en-NZ" sz="900"/>
+                        <a:t>Head of Commercial Operations</a:t>
                       </a:r>
                     </a:p>
                   </a:txBody>
@@ -7224,11 +7828,23 @@
                     <a:lnR>
                       <a:noFill/>
                     </a:lnR>
-                    <a:lnT>
-                      <a:noFill/>
+                    <a:lnT w="12700" cap="flat" cmpd="sng" algn="ctr">
+                      <a:solidFill>
+                        <a:schemeClr val="bg1"/>
+                      </a:solidFill>
+                      <a:prstDash val="solid"/>
+                      <a:round/>
+                      <a:headEnd type="none" w="med" len="med"/>
+                      <a:tailEnd type="none" w="med" len="med"/>
                     </a:lnT>
-                    <a:lnB>
-                      <a:noFill/>
+                    <a:lnB w="12700" cap="flat" cmpd="sng" algn="ctr">
+                      <a:solidFill>
+                        <a:schemeClr val="bg1"/>
+                      </a:solidFill>
+                      <a:prstDash val="solid"/>
+                      <a:round/>
+                      <a:headEnd type="none" w="med" len="med"/>
+                      <a:tailEnd type="none" w="med" len="med"/>
                     </a:lnB>
                     <a:lnTlToBr w="12700" cmpd="sng">
                       <a:noFill/>
@@ -7249,8 +7865,8 @@
                         <a:buNone/>
                       </a:pPr>
                       <a:r>
-                        <a:rPr lang="en-NZ" sz="700"/>
-                        <a:t>Nov 2018</a:t>
+                        <a:rPr lang="en-NZ" sz="900"/>
+                        <a:t>Aug 2008</a:t>
                       </a:r>
                     </a:p>
                   </a:txBody>
@@ -7261,11 +7877,23 @@
                     <a:lnR>
                       <a:noFill/>
                     </a:lnR>
-                    <a:lnT>
-                      <a:noFill/>
+                    <a:lnT w="12700" cap="flat" cmpd="sng" algn="ctr">
+                      <a:solidFill>
+                        <a:schemeClr val="bg1"/>
+                      </a:solidFill>
+                      <a:prstDash val="solid"/>
+                      <a:round/>
+                      <a:headEnd type="none" w="med" len="med"/>
+                      <a:tailEnd type="none" w="med" len="med"/>
                     </a:lnT>
-                    <a:lnB>
-                      <a:noFill/>
+                    <a:lnB w="12700" cap="flat" cmpd="sng" algn="ctr">
+                      <a:solidFill>
+                        <a:schemeClr val="bg1"/>
+                      </a:solidFill>
+                      <a:prstDash val="solid"/>
+                      <a:round/>
+                      <a:headEnd type="none" w="med" len="med"/>
+                      <a:tailEnd type="none" w="med" len="med"/>
                     </a:lnB>
                     <a:lnTlToBr w="12700" cmpd="sng">
                       <a:noFill/>
@@ -7286,8 +7914,8 @@
                         <a:buNone/>
                       </a:pPr>
                       <a:r>
-                        <a:rPr lang="en-NZ" sz="700"/>
-                        <a:t>Dec 2020</a:t>
+                        <a:rPr lang="en-NZ" sz="900"/>
+                        <a:t>Aug 2012</a:t>
                       </a:r>
                     </a:p>
                   </a:txBody>
@@ -7298,11 +7926,23 @@
                     <a:lnR>
                       <a:noFill/>
                     </a:lnR>
-                    <a:lnT>
-                      <a:noFill/>
+                    <a:lnT w="12700" cap="flat" cmpd="sng" algn="ctr">
+                      <a:solidFill>
+                        <a:schemeClr val="bg1"/>
+                      </a:solidFill>
+                      <a:prstDash val="solid"/>
+                      <a:round/>
+                      <a:headEnd type="none" w="med" len="med"/>
+                      <a:tailEnd type="none" w="med" len="med"/>
                     </a:lnT>
-                    <a:lnB>
-                      <a:noFill/>
+                    <a:lnB w="12700" cap="flat" cmpd="sng" algn="ctr">
+                      <a:solidFill>
+                        <a:schemeClr val="bg1"/>
+                      </a:solidFill>
+                      <a:prstDash val="solid"/>
+                      <a:round/>
+                      <a:headEnd type="none" w="med" len="med"/>
+                      <a:tailEnd type="none" w="med" len="med"/>
                     </a:lnB>
                     <a:lnTlToBr w="12700" cmpd="sng">
                       <a:noFill/>
@@ -7323,8 +7963,8 @@
                         <a:buNone/>
                       </a:pPr>
                       <a:r>
-                        <a:rPr lang="en-NZ" sz="700"/>
-                        <a:t>2 years, 2 months</a:t>
+                        <a:rPr lang="en-NZ" sz="900"/>
+                        <a:t>4 years</a:t>
                       </a:r>
                     </a:p>
                   </a:txBody>
@@ -7341,11 +7981,23 @@
                       <a:headEnd type="none" w="med" len="med"/>
                       <a:tailEnd type="none" w="med" len="med"/>
                     </a:lnR>
-                    <a:lnT>
-                      <a:noFill/>
+                    <a:lnT w="12700" cap="flat" cmpd="sng" algn="ctr">
+                      <a:solidFill>
+                        <a:schemeClr val="bg1"/>
+                      </a:solidFill>
+                      <a:prstDash val="solid"/>
+                      <a:round/>
+                      <a:headEnd type="none" w="med" len="med"/>
+                      <a:tailEnd type="none" w="med" len="med"/>
                     </a:lnT>
-                    <a:lnB>
-                      <a:noFill/>
+                    <a:lnB w="12700" cap="flat" cmpd="sng" algn="ctr">
+                      <a:solidFill>
+                        <a:schemeClr val="bg1"/>
+                      </a:solidFill>
+                      <a:prstDash val="solid"/>
+                      <a:round/>
+                      <a:headEnd type="none" w="med" len="med"/>
+                      <a:tailEnd type="none" w="med" len="med"/>
                     </a:lnB>
                     <a:lnTlToBr w="12700" cmpd="sng">
                       <a:noFill/>
@@ -7359,409 +8011,7 @@
                 </a:tc>
                 <a:extLst>
                   <a:ext uri="{0D108BD9-81ED-4DB2-BD59-A6C34878D82A}">
-                    <a16:rowId xmlns:a16="http://schemas.microsoft.com/office/drawing/2014/main" val="837386597"/>
-                  </a:ext>
-                </a:extLst>
-              </a:tr>
-              <a:tr h="295366">
-                <a:tc>
-                  <a:txBody>
-                    <a:bodyPr/>
-                    <a:lstStyle/>
-                    <a:p>
-                      <a:pPr>
-                        <a:buNone/>
-                      </a:pPr>
-                      <a:endParaRPr lang="en-NZ" sz="700" b="1"/>
-                    </a:p>
-                  </a:txBody>
-                  <a:tcPr anchor="ctr">
-                    <a:lnL w="12700" cap="flat" cmpd="sng" algn="ctr">
-                      <a:solidFill>
-                        <a:schemeClr val="bg1"/>
-                      </a:solidFill>
-                      <a:prstDash val="solid"/>
-                      <a:round/>
-                      <a:headEnd type="none" w="med" len="med"/>
-                      <a:tailEnd type="none" w="med" len="med"/>
-                    </a:lnL>
-                    <a:lnR>
-                      <a:noFill/>
-                    </a:lnR>
-                    <a:lnT>
-                      <a:noFill/>
-                    </a:lnT>
-                    <a:lnB>
-                      <a:noFill/>
-                    </a:lnB>
-                    <a:lnTlToBr w="12700" cmpd="sng">
-                      <a:noFill/>
-                      <a:prstDash val="solid"/>
-                    </a:lnTlToBr>
-                    <a:lnBlToTr w="12700" cmpd="sng">
-                      <a:noFill/>
-                      <a:prstDash val="solid"/>
-                    </a:lnBlToTr>
-                  </a:tcPr>
-                </a:tc>
-                <a:tc>
-                  <a:txBody>
-                    <a:bodyPr/>
-                    <a:lstStyle/>
-                    <a:p>
-                      <a:pPr>
-                        <a:buNone/>
-                      </a:pPr>
-                      <a:r>
-                        <a:rPr lang="en-GB" sz="700"/>
-                        <a:t>Senior Relationship Manager Mid Markets</a:t>
-                      </a:r>
-                    </a:p>
-                  </a:txBody>
-                  <a:tcPr anchor="ctr">
-                    <a:lnL>
-                      <a:noFill/>
-                    </a:lnL>
-                    <a:lnR>
-                      <a:noFill/>
-                    </a:lnR>
-                    <a:lnT>
-                      <a:noFill/>
-                    </a:lnT>
-                    <a:lnB>
-                      <a:noFill/>
-                    </a:lnB>
-                    <a:lnTlToBr w="12700" cmpd="sng">
-                      <a:noFill/>
-                      <a:prstDash val="solid"/>
-                    </a:lnTlToBr>
-                    <a:lnBlToTr w="12700" cmpd="sng">
-                      <a:noFill/>
-                      <a:prstDash val="solid"/>
-                    </a:lnBlToTr>
-                  </a:tcPr>
-                </a:tc>
-                <a:tc>
-                  <a:txBody>
-                    <a:bodyPr/>
-                    <a:lstStyle/>
-                    <a:p>
-                      <a:pPr>
-                        <a:buNone/>
-                      </a:pPr>
-                      <a:r>
-                        <a:rPr lang="en-NZ" sz="700"/>
-                        <a:t>Jun 2016</a:t>
-                      </a:r>
-                    </a:p>
-                  </a:txBody>
-                  <a:tcPr anchor="ctr">
-                    <a:lnL>
-                      <a:noFill/>
-                    </a:lnL>
-                    <a:lnR>
-                      <a:noFill/>
-                    </a:lnR>
-                    <a:lnT>
-                      <a:noFill/>
-                    </a:lnT>
-                    <a:lnB>
-                      <a:noFill/>
-                    </a:lnB>
-                    <a:lnTlToBr w="12700" cmpd="sng">
-                      <a:noFill/>
-                      <a:prstDash val="solid"/>
-                    </a:lnTlToBr>
-                    <a:lnBlToTr w="12700" cmpd="sng">
-                      <a:noFill/>
-                      <a:prstDash val="solid"/>
-                    </a:lnBlToTr>
-                  </a:tcPr>
-                </a:tc>
-                <a:tc>
-                  <a:txBody>
-                    <a:bodyPr/>
-                    <a:lstStyle/>
-                    <a:p>
-                      <a:pPr>
-                        <a:buNone/>
-                      </a:pPr>
-                      <a:r>
-                        <a:rPr lang="en-NZ" sz="700"/>
-                        <a:t>Oct 2018</a:t>
-                      </a:r>
-                    </a:p>
-                  </a:txBody>
-                  <a:tcPr anchor="ctr">
-                    <a:lnL>
-                      <a:noFill/>
-                    </a:lnL>
-                    <a:lnR>
-                      <a:noFill/>
-                    </a:lnR>
-                    <a:lnT>
-                      <a:noFill/>
-                    </a:lnT>
-                    <a:lnB>
-                      <a:noFill/>
-                    </a:lnB>
-                    <a:lnTlToBr w="12700" cmpd="sng">
-                      <a:noFill/>
-                      <a:prstDash val="solid"/>
-                    </a:lnTlToBr>
-                    <a:lnBlToTr w="12700" cmpd="sng">
-                      <a:noFill/>
-                      <a:prstDash val="solid"/>
-                    </a:lnBlToTr>
-                  </a:tcPr>
-                </a:tc>
-                <a:tc>
-                  <a:txBody>
-                    <a:bodyPr/>
-                    <a:lstStyle/>
-                    <a:p>
-                      <a:pPr>
-                        <a:buNone/>
-                      </a:pPr>
-                      <a:r>
-                        <a:rPr lang="en-NZ" sz="700"/>
-                        <a:t>2 years, 5 months</a:t>
-                      </a:r>
-                    </a:p>
-                  </a:txBody>
-                  <a:tcPr anchor="ctr">
-                    <a:lnL>
-                      <a:noFill/>
-                    </a:lnL>
-                    <a:lnR w="12700" cap="flat" cmpd="sng" algn="ctr">
-                      <a:solidFill>
-                        <a:schemeClr val="bg1"/>
-                      </a:solidFill>
-                      <a:prstDash val="solid"/>
-                      <a:round/>
-                      <a:headEnd type="none" w="med" len="med"/>
-                      <a:tailEnd type="none" w="med" len="med"/>
-                    </a:lnR>
-                    <a:lnT>
-                      <a:noFill/>
-                    </a:lnT>
-                    <a:lnB>
-                      <a:noFill/>
-                    </a:lnB>
-                    <a:lnTlToBr w="12700" cmpd="sng">
-                      <a:noFill/>
-                      <a:prstDash val="solid"/>
-                    </a:lnTlToBr>
-                    <a:lnBlToTr w="12700" cmpd="sng">
-                      <a:noFill/>
-                      <a:prstDash val="solid"/>
-                    </a:lnBlToTr>
-                  </a:tcPr>
-                </a:tc>
-                <a:extLst>
-                  <a:ext uri="{0D108BD9-81ED-4DB2-BD59-A6C34878D82A}">
-                    <a16:rowId xmlns:a16="http://schemas.microsoft.com/office/drawing/2014/main" val="2649441180"/>
-                  </a:ext>
-                </a:extLst>
-              </a:tr>
-              <a:tr h="295366">
-                <a:tc>
-                  <a:txBody>
-                    <a:bodyPr/>
-                    <a:lstStyle/>
-                    <a:p>
-                      <a:pPr>
-                        <a:buNone/>
-                      </a:pPr>
-                      <a:endParaRPr lang="en-NZ" sz="700" b="1"/>
-                    </a:p>
-                  </a:txBody>
-                  <a:tcPr anchor="ctr">
-                    <a:lnL w="12700" cap="flat" cmpd="sng" algn="ctr">
-                      <a:solidFill>
-                        <a:schemeClr val="bg1"/>
-                      </a:solidFill>
-                      <a:prstDash val="solid"/>
-                      <a:round/>
-                      <a:headEnd type="none" w="med" len="med"/>
-                      <a:tailEnd type="none" w="med" len="med"/>
-                    </a:lnL>
-                    <a:lnR>
-                      <a:noFill/>
-                    </a:lnR>
-                    <a:lnT>
-                      <a:noFill/>
-                    </a:lnT>
-                    <a:lnB>
-                      <a:noFill/>
-                    </a:lnB>
-                    <a:lnTlToBr w="12700" cmpd="sng">
-                      <a:noFill/>
-                      <a:prstDash val="solid"/>
-                    </a:lnTlToBr>
-                    <a:lnBlToTr w="12700" cmpd="sng">
-                      <a:noFill/>
-                      <a:prstDash val="solid"/>
-                    </a:lnBlToTr>
-                  </a:tcPr>
-                </a:tc>
-                <a:tc>
-                  <a:txBody>
-                    <a:bodyPr/>
-                    <a:lstStyle/>
-                    <a:p>
-                      <a:pPr>
-                        <a:buNone/>
-                      </a:pPr>
-                      <a:r>
-                        <a:rPr lang="en-NZ" sz="700"/>
-                        <a:t>Director Specialised Finance</a:t>
-                      </a:r>
-                    </a:p>
-                  </a:txBody>
-                  <a:tcPr anchor="ctr">
-                    <a:lnL>
-                      <a:noFill/>
-                    </a:lnL>
-                    <a:lnR>
-                      <a:noFill/>
-                    </a:lnR>
-                    <a:lnT>
-                      <a:noFill/>
-                    </a:lnT>
-                    <a:lnB>
-                      <a:noFill/>
-                    </a:lnB>
-                    <a:lnTlToBr w="12700" cmpd="sng">
-                      <a:noFill/>
-                      <a:prstDash val="solid"/>
-                    </a:lnTlToBr>
-                    <a:lnBlToTr w="12700" cmpd="sng">
-                      <a:noFill/>
-                      <a:prstDash val="solid"/>
-                    </a:lnBlToTr>
-                  </a:tcPr>
-                </a:tc>
-                <a:tc>
-                  <a:txBody>
-                    <a:bodyPr/>
-                    <a:lstStyle/>
-                    <a:p>
-                      <a:pPr>
-                        <a:buNone/>
-                      </a:pPr>
-                      <a:r>
-                        <a:rPr lang="en-NZ" sz="700"/>
-                        <a:t>Nov 2003</a:t>
-                      </a:r>
-                    </a:p>
-                  </a:txBody>
-                  <a:tcPr anchor="ctr">
-                    <a:lnL>
-                      <a:noFill/>
-                    </a:lnL>
-                    <a:lnR>
-                      <a:noFill/>
-                    </a:lnR>
-                    <a:lnT>
-                      <a:noFill/>
-                    </a:lnT>
-                    <a:lnB>
-                      <a:noFill/>
-                    </a:lnB>
-                    <a:lnTlToBr w="12700" cmpd="sng">
-                      <a:noFill/>
-                      <a:prstDash val="solid"/>
-                    </a:lnTlToBr>
-                    <a:lnBlToTr w="12700" cmpd="sng">
-                      <a:noFill/>
-                      <a:prstDash val="solid"/>
-                    </a:lnBlToTr>
-                  </a:tcPr>
-                </a:tc>
-                <a:tc>
-                  <a:txBody>
-                    <a:bodyPr/>
-                    <a:lstStyle/>
-                    <a:p>
-                      <a:pPr>
-                        <a:buNone/>
-                      </a:pPr>
-                      <a:r>
-                        <a:rPr lang="en-NZ" sz="700"/>
-                        <a:t>May 2016</a:t>
-                      </a:r>
-                    </a:p>
-                  </a:txBody>
-                  <a:tcPr anchor="ctr">
-                    <a:lnL>
-                      <a:noFill/>
-                    </a:lnL>
-                    <a:lnR>
-                      <a:noFill/>
-                    </a:lnR>
-                    <a:lnT>
-                      <a:noFill/>
-                    </a:lnT>
-                    <a:lnB>
-                      <a:noFill/>
-                    </a:lnB>
-                    <a:lnTlToBr w="12700" cmpd="sng">
-                      <a:noFill/>
-                      <a:prstDash val="solid"/>
-                    </a:lnTlToBr>
-                    <a:lnBlToTr w="12700" cmpd="sng">
-                      <a:noFill/>
-                      <a:prstDash val="solid"/>
-                    </a:lnBlToTr>
-                  </a:tcPr>
-                </a:tc>
-                <a:tc>
-                  <a:txBody>
-                    <a:bodyPr/>
-                    <a:lstStyle/>
-                    <a:p>
-                      <a:pPr>
-                        <a:buNone/>
-                      </a:pPr>
-                      <a:r>
-                        <a:rPr lang="en-NZ" sz="700"/>
-                        <a:t>12 years, 7 months</a:t>
-                      </a:r>
-                    </a:p>
-                  </a:txBody>
-                  <a:tcPr anchor="ctr">
-                    <a:lnL>
-                      <a:noFill/>
-                    </a:lnL>
-                    <a:lnR w="12700" cap="flat" cmpd="sng" algn="ctr">
-                      <a:solidFill>
-                        <a:schemeClr val="bg1"/>
-                      </a:solidFill>
-                      <a:prstDash val="solid"/>
-                      <a:round/>
-                      <a:headEnd type="none" w="med" len="med"/>
-                      <a:tailEnd type="none" w="med" len="med"/>
-                    </a:lnR>
-                    <a:lnT>
-                      <a:noFill/>
-                    </a:lnT>
-                    <a:lnB>
-                      <a:noFill/>
-                    </a:lnB>
-                    <a:lnTlToBr w="12700" cmpd="sng">
-                      <a:noFill/>
-                      <a:prstDash val="solid"/>
-                    </a:lnTlToBr>
-                    <a:lnBlToTr w="12700" cmpd="sng">
-                      <a:noFill/>
-                      <a:prstDash val="solid"/>
-                    </a:lnBlToTr>
-                  </a:tcPr>
-                </a:tc>
-                <a:extLst>
-                  <a:ext uri="{0D108BD9-81ED-4DB2-BD59-A6C34878D82A}">
-                    <a16:rowId xmlns:a16="http://schemas.microsoft.com/office/drawing/2014/main" val="2980113677"/>
+                    <a16:rowId xmlns:a16="http://schemas.microsoft.com/office/drawing/2014/main" val="1448223456"/>
                   </a:ext>
                 </a:extLst>
               </a:tr>
@@ -7775,8 +8025,8 @@
                         <a:buNone/>
                       </a:pPr>
                       <a:r>
-                        <a:rPr lang="en-NZ" sz="700" b="1"/>
-                        <a:t>Ernst and Young London</a:t>
+                        <a:rPr lang="en-GB" sz="900" b="1"/>
+                        <a:t>Vodafone NZ</a:t>
                       </a:r>
                     </a:p>
                   </a:txBody>
@@ -7793,11 +8043,23 @@
                     <a:lnR>
                       <a:noFill/>
                     </a:lnR>
-                    <a:lnT>
-                      <a:noFill/>
+                    <a:lnT w="12700" cap="flat" cmpd="sng" algn="ctr">
+                      <a:solidFill>
+                        <a:schemeClr val="bg1"/>
+                      </a:solidFill>
+                      <a:prstDash val="solid"/>
+                      <a:round/>
+                      <a:headEnd type="none" w="med" len="med"/>
+                      <a:tailEnd type="none" w="med" len="med"/>
                     </a:lnT>
-                    <a:lnB>
-                      <a:noFill/>
+                    <a:lnB w="12700" cap="flat" cmpd="sng" algn="ctr">
+                      <a:solidFill>
+                        <a:schemeClr val="bg1"/>
+                      </a:solidFill>
+                      <a:prstDash val="solid"/>
+                      <a:round/>
+                      <a:headEnd type="none" w="med" len="med"/>
+                      <a:tailEnd type="none" w="med" len="med"/>
                     </a:lnB>
                     <a:lnTlToBr w="12700" cmpd="sng">
                       <a:noFill/>
@@ -7818,8 +8080,8 @@
                         <a:buNone/>
                       </a:pPr>
                       <a:r>
-                        <a:rPr lang="en-NZ" sz="700"/>
-                        <a:t>Manager Mergers and Acquisitions</a:t>
+                        <a:rPr lang="en-NZ" sz="900" dirty="0"/>
+                        <a:t>General Manager Fixed Assets, Commissions and Finance Systems</a:t>
                       </a:r>
                     </a:p>
                   </a:txBody>
@@ -7830,11 +8092,23 @@
                     <a:lnR>
                       <a:noFill/>
                     </a:lnR>
-                    <a:lnT>
-                      <a:noFill/>
+                    <a:lnT w="12700" cap="flat" cmpd="sng" algn="ctr">
+                      <a:solidFill>
+                        <a:schemeClr val="bg1"/>
+                      </a:solidFill>
+                      <a:prstDash val="solid"/>
+                      <a:round/>
+                      <a:headEnd type="none" w="med" len="med"/>
+                      <a:tailEnd type="none" w="med" len="med"/>
                     </a:lnT>
-                    <a:lnB>
-                      <a:noFill/>
+                    <a:lnB w="12700" cap="flat" cmpd="sng" algn="ctr">
+                      <a:solidFill>
+                        <a:schemeClr val="bg1"/>
+                      </a:solidFill>
+                      <a:prstDash val="solid"/>
+                      <a:round/>
+                      <a:headEnd type="none" w="med" len="med"/>
+                      <a:tailEnd type="none" w="med" len="med"/>
                     </a:lnB>
                     <a:lnTlToBr w="12700" cmpd="sng">
                       <a:noFill/>
@@ -7855,8 +8129,8 @@
                         <a:buNone/>
                       </a:pPr>
                       <a:r>
-                        <a:rPr lang="en-NZ" sz="700"/>
-                        <a:t>Jul 2000</a:t>
+                        <a:rPr lang="en-NZ" sz="900"/>
+                        <a:t>Jun 2003</a:t>
                       </a:r>
                     </a:p>
                   </a:txBody>
@@ -7867,11 +8141,23 @@
                     <a:lnR>
                       <a:noFill/>
                     </a:lnR>
-                    <a:lnT>
-                      <a:noFill/>
+                    <a:lnT w="12700" cap="flat" cmpd="sng" algn="ctr">
+                      <a:solidFill>
+                        <a:schemeClr val="bg1"/>
+                      </a:solidFill>
+                      <a:prstDash val="solid"/>
+                      <a:round/>
+                      <a:headEnd type="none" w="med" len="med"/>
+                      <a:tailEnd type="none" w="med" len="med"/>
                     </a:lnT>
-                    <a:lnB>
-                      <a:noFill/>
+                    <a:lnB w="12700" cap="flat" cmpd="sng" algn="ctr">
+                      <a:solidFill>
+                        <a:schemeClr val="bg1"/>
+                      </a:solidFill>
+                      <a:prstDash val="solid"/>
+                      <a:round/>
+                      <a:headEnd type="none" w="med" len="med"/>
+                      <a:tailEnd type="none" w="med" len="med"/>
                     </a:lnB>
                     <a:lnTlToBr w="12700" cmpd="sng">
                       <a:noFill/>
@@ -7892,8 +8178,8 @@
                         <a:buNone/>
                       </a:pPr>
                       <a:r>
-                        <a:rPr lang="en-NZ" sz="700"/>
-                        <a:t>May 2003</a:t>
+                        <a:rPr lang="en-NZ" sz="900"/>
+                        <a:t>Jul 2008</a:t>
                       </a:r>
                     </a:p>
                   </a:txBody>
@@ -7904,11 +8190,23 @@
                     <a:lnR>
                       <a:noFill/>
                     </a:lnR>
-                    <a:lnT>
-                      <a:noFill/>
+                    <a:lnT w="12700" cap="flat" cmpd="sng" algn="ctr">
+                      <a:solidFill>
+                        <a:schemeClr val="bg1"/>
+                      </a:solidFill>
+                      <a:prstDash val="solid"/>
+                      <a:round/>
+                      <a:headEnd type="none" w="med" len="med"/>
+                      <a:tailEnd type="none" w="med" len="med"/>
                     </a:lnT>
-                    <a:lnB>
-                      <a:noFill/>
+                    <a:lnB w="12700" cap="flat" cmpd="sng" algn="ctr">
+                      <a:solidFill>
+                        <a:schemeClr val="bg1"/>
+                      </a:solidFill>
+                      <a:prstDash val="solid"/>
+                      <a:round/>
+                      <a:headEnd type="none" w="med" len="med"/>
+                      <a:tailEnd type="none" w="med" len="med"/>
                     </a:lnB>
                     <a:lnTlToBr w="12700" cmpd="sng">
                       <a:noFill/>
@@ -7929,8 +8227,8 @@
                         <a:buNone/>
                       </a:pPr>
                       <a:r>
-                        <a:rPr lang="en-NZ" sz="700"/>
-                        <a:t>2 years, 11 months</a:t>
+                        <a:rPr lang="en-NZ" sz="900"/>
+                        <a:t>5 years, 1 month</a:t>
                       </a:r>
                     </a:p>
                   </a:txBody>
@@ -7947,11 +8245,23 @@
                       <a:headEnd type="none" w="med" len="med"/>
                       <a:tailEnd type="none" w="med" len="med"/>
                     </a:lnR>
-                    <a:lnT>
-                      <a:noFill/>
+                    <a:lnT w="12700" cap="flat" cmpd="sng" algn="ctr">
+                      <a:solidFill>
+                        <a:schemeClr val="bg1"/>
+                      </a:solidFill>
+                      <a:prstDash val="solid"/>
+                      <a:round/>
+                      <a:headEnd type="none" w="med" len="med"/>
+                      <a:tailEnd type="none" w="med" len="med"/>
                     </a:lnT>
-                    <a:lnB>
-                      <a:noFill/>
+                    <a:lnB w="12700" cap="flat" cmpd="sng" algn="ctr">
+                      <a:solidFill>
+                        <a:schemeClr val="bg1"/>
+                      </a:solidFill>
+                      <a:prstDash val="solid"/>
+                      <a:round/>
+                      <a:headEnd type="none" w="med" len="med"/>
+                      <a:tailEnd type="none" w="med" len="med"/>
                     </a:lnB>
                     <a:lnTlToBr w="12700" cmpd="sng">
                       <a:noFill/>
@@ -7965,7 +8275,7 @@
                 </a:tc>
                 <a:extLst>
                   <a:ext uri="{0D108BD9-81ED-4DB2-BD59-A6C34878D82A}">
-                    <a16:rowId xmlns:a16="http://schemas.microsoft.com/office/drawing/2014/main" val="1638687515"/>
+                    <a16:rowId xmlns:a16="http://schemas.microsoft.com/office/drawing/2014/main" val="1053714475"/>
                   </a:ext>
                 </a:extLst>
               </a:tr>
@@ -7979,8 +8289,8 @@
                         <a:buNone/>
                       </a:pPr>
                       <a:r>
-                        <a:rPr lang="en-NZ" sz="700" b="1"/>
-                        <a:t>Bank of Scotland Edinburgh</a:t>
+                        <a:rPr lang="en-GB" sz="900" b="1"/>
+                        <a:t>Cap Gemini</a:t>
                       </a:r>
                     </a:p>
                   </a:txBody>
@@ -7997,11 +8307,19 @@
                     <a:lnR>
                       <a:noFill/>
                     </a:lnR>
-                    <a:lnT>
-                      <a:noFill/>
+                    <a:lnT w="12700" cap="flat" cmpd="sng" algn="ctr">
+                      <a:solidFill>
+                        <a:schemeClr val="bg1"/>
+                      </a:solidFill>
+                      <a:prstDash val="solid"/>
+                      <a:round/>
+                      <a:headEnd type="none" w="med" len="med"/>
+                      <a:tailEnd type="none" w="med" len="med"/>
                     </a:lnT>
                     <a:lnB w="12700" cap="flat" cmpd="sng" algn="ctr">
-                      <a:noFill/>
+                      <a:solidFill>
+                        <a:schemeClr val="bg1"/>
+                      </a:solidFill>
                       <a:prstDash val="solid"/>
                       <a:round/>
                       <a:headEnd type="none" w="med" len="med"/>
@@ -8026,8 +8344,8 @@
                         <a:buNone/>
                       </a:pPr>
                       <a:r>
-                        <a:rPr lang="en-NZ" sz="700"/>
-                        <a:t>Structured Finance Senior Analyst</a:t>
+                        <a:rPr lang="en-NZ" sz="900"/>
+                        <a:t>Executive Consultant</a:t>
                       </a:r>
                     </a:p>
                   </a:txBody>
@@ -8038,11 +8356,19 @@
                     <a:lnR>
                       <a:noFill/>
                     </a:lnR>
-                    <a:lnT>
-                      <a:noFill/>
+                    <a:lnT w="12700" cap="flat" cmpd="sng" algn="ctr">
+                      <a:solidFill>
+                        <a:schemeClr val="bg1"/>
+                      </a:solidFill>
+                      <a:prstDash val="solid"/>
+                      <a:round/>
+                      <a:headEnd type="none" w="med" len="med"/>
+                      <a:tailEnd type="none" w="med" len="med"/>
                     </a:lnT>
                     <a:lnB w="12700" cap="flat" cmpd="sng" algn="ctr">
-                      <a:noFill/>
+                      <a:solidFill>
+                        <a:schemeClr val="bg1"/>
+                      </a:solidFill>
                       <a:prstDash val="solid"/>
                       <a:round/>
                       <a:headEnd type="none" w="med" len="med"/>
@@ -8067,8 +8393,8 @@
                         <a:buNone/>
                       </a:pPr>
                       <a:r>
-                        <a:rPr lang="en-NZ" sz="700"/>
-                        <a:t>Sep 1998</a:t>
+                        <a:rPr lang="en-NZ" sz="900"/>
+                        <a:t>Jan 1997</a:t>
                       </a:r>
                     </a:p>
                   </a:txBody>
@@ -8079,11 +8405,19 @@
                     <a:lnR>
                       <a:noFill/>
                     </a:lnR>
-                    <a:lnT>
-                      <a:noFill/>
+                    <a:lnT w="12700" cap="flat" cmpd="sng" algn="ctr">
+                      <a:solidFill>
+                        <a:schemeClr val="bg1"/>
+                      </a:solidFill>
+                      <a:prstDash val="solid"/>
+                      <a:round/>
+                      <a:headEnd type="none" w="med" len="med"/>
+                      <a:tailEnd type="none" w="med" len="med"/>
                     </a:lnT>
                     <a:lnB w="12700" cap="flat" cmpd="sng" algn="ctr">
-                      <a:noFill/>
+                      <a:solidFill>
+                        <a:schemeClr val="bg1"/>
+                      </a:solidFill>
                       <a:prstDash val="solid"/>
                       <a:round/>
                       <a:headEnd type="none" w="med" len="med"/>
@@ -8108,8 +8442,8 @@
                         <a:buNone/>
                       </a:pPr>
                       <a:r>
-                        <a:rPr lang="en-NZ" sz="700"/>
-                        <a:t>Jun 2000</a:t>
+                        <a:rPr lang="en-NZ" sz="900"/>
+                        <a:t>Jan 2003</a:t>
                       </a:r>
                     </a:p>
                   </a:txBody>
@@ -8120,11 +8454,19 @@
                     <a:lnR>
                       <a:noFill/>
                     </a:lnR>
-                    <a:lnT>
-                      <a:noFill/>
+                    <a:lnT w="12700" cap="flat" cmpd="sng" algn="ctr">
+                      <a:solidFill>
+                        <a:schemeClr val="bg1"/>
+                      </a:solidFill>
+                      <a:prstDash val="solid"/>
+                      <a:round/>
+                      <a:headEnd type="none" w="med" len="med"/>
+                      <a:tailEnd type="none" w="med" len="med"/>
                     </a:lnT>
                     <a:lnB w="12700" cap="flat" cmpd="sng" algn="ctr">
-                      <a:noFill/>
+                      <a:solidFill>
+                        <a:schemeClr val="bg1"/>
+                      </a:solidFill>
                       <a:prstDash val="solid"/>
                       <a:round/>
                       <a:headEnd type="none" w="med" len="med"/>
@@ -8149,8 +8491,8 @@
                         <a:buNone/>
                       </a:pPr>
                       <a:r>
-                        <a:rPr lang="en-NZ" sz="700"/>
-                        <a:t>1 year, 10 months</a:t>
+                        <a:rPr lang="en-NZ" sz="900" dirty="0"/>
+                        <a:t>6 years</a:t>
                       </a:r>
                     </a:p>
                   </a:txBody>
@@ -8167,11 +8509,19 @@
                       <a:headEnd type="none" w="med" len="med"/>
                       <a:tailEnd type="none" w="med" len="med"/>
                     </a:lnR>
-                    <a:lnT>
-                      <a:noFill/>
+                    <a:lnT w="12700" cap="flat" cmpd="sng" algn="ctr">
+                      <a:solidFill>
+                        <a:schemeClr val="bg1"/>
+                      </a:solidFill>
+                      <a:prstDash val="solid"/>
+                      <a:round/>
+                      <a:headEnd type="none" w="med" len="med"/>
+                      <a:tailEnd type="none" w="med" len="med"/>
                     </a:lnT>
                     <a:lnB w="12700" cap="flat" cmpd="sng" algn="ctr">
-                      <a:noFill/>
+                      <a:solidFill>
+                        <a:schemeClr val="bg1"/>
+                      </a:solidFill>
                       <a:prstDash val="solid"/>
                       <a:round/>
                       <a:headEnd type="none" w="med" len="med"/>
@@ -8189,11 +8539,61 @@
                 </a:tc>
                 <a:extLst>
                   <a:ext uri="{0D108BD9-81ED-4DB2-BD59-A6C34878D82A}">
-                    <a16:rowId xmlns:a16="http://schemas.microsoft.com/office/drawing/2014/main" val="4208584389"/>
+                    <a16:rowId xmlns:a16="http://schemas.microsoft.com/office/drawing/2014/main" val="2561870309"/>
                   </a:ext>
                 </a:extLst>
               </a:tr>
-              <a:tr h="295366">
+            </a:tbl>
+          </a:graphicData>
+        </a:graphic>
+      </p:graphicFrame>
+      <p:graphicFrame>
+        <p:nvGraphicFramePr>
+          <p:cNvPr id="3" name="Table 2">
+            <a:extLst>
+              <a:ext uri="{FF2B5EF4-FFF2-40B4-BE49-F238E27FC236}">
+                <a16:creationId xmlns:a16="http://schemas.microsoft.com/office/drawing/2014/main" id="{33915800-A36C-9EBB-5E49-28CB0EAD2FC6}"/>
+              </a:ext>
+            </a:extLst>
+          </p:cNvPr>
+          <p:cNvGraphicFramePr>
+            <a:graphicFrameLocks/>
+          </p:cNvGraphicFramePr>
+          <p:nvPr>
+            <p:extLst>
+              <p:ext uri="{D42A27DB-BD31-4B8C-83A1-F6EECF244321}">
+                <p14:modId xmlns:p14="http://schemas.microsoft.com/office/powerpoint/2010/main" val="4068670625"/>
+              </p:ext>
+            </p:extLst>
+          </p:nvPr>
+        </p:nvGraphicFramePr>
+        <p:xfrm>
+          <a:off x="2256639" y="562308"/>
+          <a:ext cx="4455395" cy="1291944"/>
+        </p:xfrm>
+        <a:graphic>
+          <a:graphicData uri="http://schemas.openxmlformats.org/drawingml/2006/table">
+            <a:tbl>
+              <a:tblPr bandRow="1">
+                <a:tableStyleId>{2D5ABB26-0587-4C30-8999-92F81FD0307C}</a:tableStyleId>
+              </a:tblPr>
+              <a:tblGrid>
+                <a:gridCol w="1932175">
+                  <a:extLst>
+                    <a:ext uri="{9D8B030D-6E8A-4147-A177-3AD203B41FA5}">
+                      <a16:colId xmlns:a16="http://schemas.microsoft.com/office/drawing/2014/main" val="2252499205"/>
+                    </a:ext>
+                  </a:extLst>
+                </a:gridCol>
+                <a:gridCol w="2523220">
+                  <a:extLst>
+                    <a:ext uri="{9D8B030D-6E8A-4147-A177-3AD203B41FA5}">
+                      <a16:colId xmlns:a16="http://schemas.microsoft.com/office/drawing/2014/main" val="3268057789"/>
+                    </a:ext>
+                  </a:extLst>
+                </a:gridCol>
+              </a:tblGrid>
+              <a:tr h="260908">
                 <a:tc>
                   <a:txBody>
                     <a:bodyPr/>
@@ -8203,20 +8603,23 @@
                         <a:buNone/>
                       </a:pPr>
                       <a:r>
-                        <a:rPr lang="en-NZ" sz="700" b="1"/>
-                        <a:t>Ernst and Young Edinburgh</a:t>
+                        <a:rPr lang="en-NZ" sz="900" b="1">
+                          <a:solidFill>
+                            <a:schemeClr val="bg1"/>
+                          </a:solidFill>
+                        </a:rPr>
+                        <a:t>Notice Period</a:t>
                       </a:r>
+                      <a:endParaRPr lang="en-NZ" sz="900">
+                        <a:solidFill>
+                          <a:schemeClr val="bg1"/>
+                        </a:solidFill>
+                      </a:endParaRPr>
                     </a:p>
                   </a:txBody>
                   <a:tcPr anchor="ctr">
-                    <a:lnL w="12700" cap="flat" cmpd="sng" algn="ctr">
-                      <a:solidFill>
-                        <a:schemeClr val="bg1"/>
-                      </a:solidFill>
-                      <a:prstDash val="solid"/>
-                      <a:round/>
-                      <a:headEnd type="none" w="med" len="med"/>
-                      <a:tailEnd type="none" w="med" len="med"/>
+                    <a:lnL>
+                      <a:noFill/>
                     </a:lnL>
                     <a:lnR>
                       <a:noFill/>
@@ -8224,14 +8627,8 @@
                     <a:lnT>
                       <a:noFill/>
                     </a:lnT>
-                    <a:lnB w="12700" cap="flat" cmpd="sng" algn="ctr">
-                      <a:solidFill>
-                        <a:schemeClr val="bg1"/>
-                      </a:solidFill>
-                      <a:prstDash val="solid"/>
-                      <a:round/>
-                      <a:headEnd type="none" w="med" len="med"/>
-                      <a:tailEnd type="none" w="med" len="med"/>
+                    <a:lnB>
+                      <a:noFill/>
                     </a:lnB>
                     <a:lnTlToBr w="12700" cmpd="sng">
                       <a:noFill/>
@@ -8241,6 +8638,7 @@
                       <a:noFill/>
                       <a:prstDash val="solid"/>
                     </a:lnBlToTr>
+                    <a:noFill/>
                   </a:tcPr>
                 </a:tc>
                 <a:tc>
@@ -8252,9 +8650,18 @@
                         <a:buNone/>
                       </a:pPr>
                       <a:r>
-                        <a:rPr lang="en-NZ" sz="700"/>
-                        <a:t>Audit Trainee CA Contract</a:t>
+                        <a:rPr lang="en-GB" sz="900" i="1">
+                          <a:solidFill>
+                            <a:schemeClr val="bg1"/>
+                          </a:solidFill>
+                        </a:rPr>
+                        <a:t>Immediately</a:t>
                       </a:r>
+                      <a:endParaRPr lang="en-NZ" sz="900" i="1">
+                        <a:solidFill>
+                          <a:schemeClr val="bg1"/>
+                        </a:solidFill>
+                      </a:endParaRPr>
                     </a:p>
                   </a:txBody>
                   <a:tcPr anchor="ctr">
@@ -8267,14 +8674,8 @@
                     <a:lnT>
                       <a:noFill/>
                     </a:lnT>
-                    <a:lnB w="12700" cap="flat" cmpd="sng" algn="ctr">
-                      <a:solidFill>
-                        <a:schemeClr val="bg1"/>
-                      </a:solidFill>
-                      <a:prstDash val="solid"/>
-                      <a:round/>
-                      <a:headEnd type="none" w="med" len="med"/>
-                      <a:tailEnd type="none" w="med" len="med"/>
+                    <a:lnB>
+                      <a:noFill/>
                     </a:lnB>
                     <a:lnTlToBr w="12700" cmpd="sng">
                       <a:noFill/>
@@ -8284,6 +8685,61 @@
                       <a:noFill/>
                       <a:prstDash val="solid"/>
                     </a:lnBlToTr>
+                    <a:noFill/>
+                  </a:tcPr>
+                </a:tc>
+                <a:extLst>
+                  <a:ext uri="{0D108BD9-81ED-4DB2-BD59-A6C34878D82A}">
+                    <a16:rowId xmlns:a16="http://schemas.microsoft.com/office/drawing/2014/main" val="358037502"/>
+                  </a:ext>
+                </a:extLst>
+              </a:tr>
+              <a:tr h="250052">
+                <a:tc>
+                  <a:txBody>
+                    <a:bodyPr/>
+                    <a:lstStyle/>
+                    <a:p>
+                      <a:pPr>
+                        <a:buNone/>
+                      </a:pPr>
+                      <a:r>
+                        <a:rPr lang="en-NZ" sz="900" b="1" dirty="0">
+                          <a:solidFill>
+                            <a:schemeClr val="bg1"/>
+                          </a:solidFill>
+                        </a:rPr>
+                        <a:t>Base Salary Expectation</a:t>
+                      </a:r>
+                      <a:endParaRPr lang="en-NZ" sz="900" dirty="0">
+                        <a:solidFill>
+                          <a:schemeClr val="bg1"/>
+                        </a:solidFill>
+                      </a:endParaRPr>
+                    </a:p>
+                  </a:txBody>
+                  <a:tcPr anchor="ctr">
+                    <a:lnL>
+                      <a:noFill/>
+                    </a:lnL>
+                    <a:lnR>
+                      <a:noFill/>
+                    </a:lnR>
+                    <a:lnT>
+                      <a:noFill/>
+                    </a:lnT>
+                    <a:lnB>
+                      <a:noFill/>
+                    </a:lnB>
+                    <a:lnTlToBr w="12700" cmpd="sng">
+                      <a:noFill/>
+                      <a:prstDash val="solid"/>
+                    </a:lnTlToBr>
+                    <a:lnBlToTr w="12700" cmpd="sng">
+                      <a:noFill/>
+                      <a:prstDash val="solid"/>
+                    </a:lnBlToTr>
+                    <a:noFill/>
                   </a:tcPr>
                 </a:tc>
                 <a:tc>
@@ -8295,8 +8751,12 @@
                         <a:buNone/>
                       </a:pPr>
                       <a:r>
-                        <a:rPr lang="en-NZ" sz="700"/>
-                        <a:t>Sep 1995</a:t>
+                        <a:rPr lang="en-NZ" sz="900">
+                          <a:solidFill>
+                            <a:schemeClr val="bg1"/>
+                          </a:solidFill>
+                        </a:rPr>
+                        <a:t>$300,000</a:t>
                       </a:r>
                     </a:p>
                   </a:txBody>
@@ -8310,14 +8770,8 @@
                     <a:lnT>
                       <a:noFill/>
                     </a:lnT>
-                    <a:lnB w="12700" cap="flat" cmpd="sng" algn="ctr">
-                      <a:solidFill>
-                        <a:schemeClr val="bg1"/>
-                      </a:solidFill>
-                      <a:prstDash val="solid"/>
-                      <a:round/>
-                      <a:headEnd type="none" w="med" len="med"/>
-                      <a:tailEnd type="none" w="med" len="med"/>
+                    <a:lnB>
+                      <a:noFill/>
                     </a:lnB>
                     <a:lnTlToBr w="12700" cmpd="sng">
                       <a:noFill/>
@@ -8327,8 +8781,16 @@
                       <a:noFill/>
                       <a:prstDash val="solid"/>
                     </a:lnBlToTr>
+                    <a:noFill/>
                   </a:tcPr>
                 </a:tc>
+                <a:extLst>
+                  <a:ext uri="{0D108BD9-81ED-4DB2-BD59-A6C34878D82A}">
+                    <a16:rowId xmlns:a16="http://schemas.microsoft.com/office/drawing/2014/main" val="49863457"/>
+                  </a:ext>
+                </a:extLst>
+              </a:tr>
+              <a:tr h="390492">
                 <a:tc>
                   <a:txBody>
                     <a:bodyPr/>
@@ -8338,9 +8800,18 @@
                         <a:buNone/>
                       </a:pPr>
                       <a:r>
-                        <a:rPr lang="en-NZ" sz="700"/>
-                        <a:t>Sep 1998</a:t>
+                        <a:rPr lang="en-NZ" sz="900" b="1" dirty="0">
+                          <a:solidFill>
+                            <a:schemeClr val="bg1"/>
+                          </a:solidFill>
+                        </a:rPr>
+                        <a:t>Education</a:t>
                       </a:r>
+                      <a:endParaRPr lang="en-NZ" sz="900" dirty="0">
+                        <a:solidFill>
+                          <a:schemeClr val="bg1"/>
+                        </a:solidFill>
+                      </a:endParaRPr>
                     </a:p>
                   </a:txBody>
                   <a:tcPr anchor="ctr">
@@ -8353,14 +8824,8 @@
                     <a:lnT>
                       <a:noFill/>
                     </a:lnT>
-                    <a:lnB w="12700" cap="flat" cmpd="sng" algn="ctr">
-                      <a:solidFill>
-                        <a:schemeClr val="bg1"/>
-                      </a:solidFill>
-                      <a:prstDash val="solid"/>
-                      <a:round/>
-                      <a:headEnd type="none" w="med" len="med"/>
-                      <a:tailEnd type="none" w="med" len="med"/>
+                    <a:lnB>
+                      <a:noFill/>
                     </a:lnB>
                     <a:lnTlToBr w="12700" cmpd="sng">
                       <a:noFill/>
@@ -8370,8 +8835,62 @@
                       <a:noFill/>
                       <a:prstDash val="solid"/>
                     </a:lnBlToTr>
+                    <a:noFill/>
                   </a:tcPr>
                 </a:tc>
+                <a:tc>
+                  <a:txBody>
+                    <a:bodyPr/>
+                    <a:lstStyle/>
+                    <a:p>
+                      <a:r>
+                        <a:rPr lang="en-GB" sz="900" dirty="0">
+                          <a:solidFill>
+                            <a:schemeClr val="bg1"/>
+                          </a:solidFill>
+                        </a:rPr>
+                        <a:t>Bachelor of Commerce</a:t>
+                      </a:r>
+                      <a:endParaRPr lang="en-NZ" sz="900" dirty="0">
+                        <a:solidFill>
+                          <a:schemeClr val="bg1"/>
+                        </a:solidFill>
+                        <a:ea typeface="Roboto" panose="02000000000000000000" pitchFamily="2" charset="0"/>
+                        <a:cs typeface="Roboto" panose="02000000000000000000" pitchFamily="2" charset="0"/>
+                      </a:endParaRPr>
+                    </a:p>
+                  </a:txBody>
+                  <a:tcPr anchor="ctr">
+                    <a:lnL>
+                      <a:noFill/>
+                    </a:lnL>
+                    <a:lnR>
+                      <a:noFill/>
+                    </a:lnR>
+                    <a:lnT>
+                      <a:noFill/>
+                    </a:lnT>
+                    <a:lnB>
+                      <a:noFill/>
+                    </a:lnB>
+                    <a:lnTlToBr w="12700" cmpd="sng">
+                      <a:noFill/>
+                      <a:prstDash val="solid"/>
+                    </a:lnTlToBr>
+                    <a:lnBlToTr w="12700" cmpd="sng">
+                      <a:noFill/>
+                      <a:prstDash val="solid"/>
+                    </a:lnBlToTr>
+                    <a:noFill/>
+                  </a:tcPr>
+                </a:tc>
+                <a:extLst>
+                  <a:ext uri="{0D108BD9-81ED-4DB2-BD59-A6C34878D82A}">
+                    <a16:rowId xmlns:a16="http://schemas.microsoft.com/office/drawing/2014/main" val="912871463"/>
+                  </a:ext>
+                </a:extLst>
+              </a:tr>
+              <a:tr h="390492">
                 <a:tc>
                   <a:txBody>
                     <a:bodyPr/>
@@ -8381,8 +8900,12 @@
                         <a:buNone/>
                       </a:pPr>
                       <a:r>
-                        <a:rPr lang="en-NZ" sz="700"/>
-                        <a:t>3 years</a:t>
+                        <a:rPr lang="en-NZ" sz="900" b="1" dirty="0">
+                          <a:solidFill>
+                            <a:schemeClr val="bg1"/>
+                          </a:solidFill>
+                        </a:rPr>
+                        <a:t>Professional Qualifications</a:t>
                       </a:r>
                     </a:p>
                   </a:txBody>
@@ -8390,26 +8913,14 @@
                     <a:lnL>
                       <a:noFill/>
                     </a:lnL>
-                    <a:lnR w="12700" cap="flat" cmpd="sng" algn="ctr">
-                      <a:solidFill>
-                        <a:schemeClr val="bg1"/>
-                      </a:solidFill>
-                      <a:prstDash val="solid"/>
-                      <a:round/>
-                      <a:headEnd type="none" w="med" len="med"/>
-                      <a:tailEnd type="none" w="med" len="med"/>
+                    <a:lnR>
+                      <a:noFill/>
                     </a:lnR>
                     <a:lnT>
                       <a:noFill/>
                     </a:lnT>
-                    <a:lnB w="12700" cap="flat" cmpd="sng" algn="ctr">
-                      <a:solidFill>
-                        <a:schemeClr val="bg1"/>
-                      </a:solidFill>
-                      <a:prstDash val="solid"/>
-                      <a:round/>
-                      <a:headEnd type="none" w="med" len="med"/>
-                      <a:tailEnd type="none" w="med" len="med"/>
+                    <a:lnB>
+                      <a:noFill/>
                     </a:lnB>
                     <a:lnTlToBr w="12700" cmpd="sng">
                       <a:noFill/>
@@ -8419,11 +8930,69 @@
                       <a:noFill/>
                       <a:prstDash val="solid"/>
                     </a:lnBlToTr>
+                    <a:noFill/>
+                  </a:tcPr>
+                </a:tc>
+                <a:tc>
+                  <a:txBody>
+                    <a:bodyPr/>
+                    <a:lstStyle/>
+                    <a:p>
+                      <a:r>
+                        <a:rPr lang="en-GB" sz="900" dirty="0">
+                          <a:solidFill>
+                            <a:schemeClr val="bg1"/>
+                          </a:solidFill>
+                        </a:rPr>
+                        <a:t>ACMA (UK), CIMA</a:t>
+                      </a:r>
+                      <a:br>
+                        <a:rPr lang="en-GB" sz="900" dirty="0"/>
+                      </a:br>
+                      <a:r>
+                        <a:rPr lang="en-GB" sz="900" dirty="0">
+                          <a:solidFill>
+                            <a:schemeClr val="bg1"/>
+                          </a:solidFill>
+                        </a:rPr>
+                        <a:t>Chartered Accountant (NZ)</a:t>
+                      </a:r>
+                      <a:endParaRPr lang="en-NZ" sz="900" dirty="0">
+                        <a:solidFill>
+                          <a:schemeClr val="bg1"/>
+                        </a:solidFill>
+                        <a:ea typeface="Roboto" panose="02000000000000000000" pitchFamily="2" charset="0"/>
+                        <a:cs typeface="Roboto" panose="02000000000000000000" pitchFamily="2" charset="0"/>
+                      </a:endParaRPr>
+                    </a:p>
+                  </a:txBody>
+                  <a:tcPr anchor="ctr">
+                    <a:lnL>
+                      <a:noFill/>
+                    </a:lnL>
+                    <a:lnR>
+                      <a:noFill/>
+                    </a:lnR>
+                    <a:lnT>
+                      <a:noFill/>
+                    </a:lnT>
+                    <a:lnB>
+                      <a:noFill/>
+                    </a:lnB>
+                    <a:lnTlToBr w="12700" cmpd="sng">
+                      <a:noFill/>
+                      <a:prstDash val="solid"/>
+                    </a:lnTlToBr>
+                    <a:lnBlToTr w="12700" cmpd="sng">
+                      <a:noFill/>
+                      <a:prstDash val="solid"/>
+                    </a:lnBlToTr>
+                    <a:noFill/>
                   </a:tcPr>
                 </a:tc>
                 <a:extLst>
                   <a:ext uri="{0D108BD9-81ED-4DB2-BD59-A6C34878D82A}">
-                    <a16:rowId xmlns:a16="http://schemas.microsoft.com/office/drawing/2014/main" val="1206542046"/>
+                    <a16:rowId xmlns:a16="http://schemas.microsoft.com/office/drawing/2014/main" val="835026894"/>
                   </a:ext>
                 </a:extLst>
               </a:tr>
@@ -8433,10 +9002,131 @@
       </p:graphicFrame>
       <p:sp>
         <p:nvSpPr>
-          <p:cNvPr id="9" name="Rectangle: Rounded Corners 8">
+          <p:cNvPr id="5" name="TextBox 4">
             <a:extLst>
               <a:ext uri="{FF2B5EF4-FFF2-40B4-BE49-F238E27FC236}">
-                <a16:creationId xmlns:a16="http://schemas.microsoft.com/office/drawing/2014/main" id="{230B1353-15CB-5DF4-086A-B899B6985C05}"/>
+                <a16:creationId xmlns:a16="http://schemas.microsoft.com/office/drawing/2014/main" id="{F078B85A-34F0-BCB9-BF83-E9D5D4C3EB4E}"/>
+              </a:ext>
+            </a:extLst>
+          </p:cNvPr>
+          <p:cNvSpPr txBox="1">
+            <a:spLocks/>
+          </p:cNvSpPr>
+          <p:nvPr/>
+        </p:nvSpPr>
+        <p:spPr>
+          <a:xfrm>
+            <a:off x="94746" y="9578283"/>
+            <a:ext cx="6617288" cy="274434"/>
+          </a:xfrm>
+          <a:prstGeom prst="rect">
+            <a:avLst/>
+          </a:prstGeom>
+          <a:noFill/>
+        </p:spPr>
+        <p:txBody>
+          <a:bodyPr wrap="square" rtlCol="0">
+            <a:spAutoFit/>
+          </a:bodyPr>
+          <a:lstStyle/>
+          <a:p>
+            <a:pPr algn="ctr">
+              <a:spcAft>
+                <a:spcPts val="100"/>
+              </a:spcAft>
+            </a:pPr>
+            <a:r>
+              <a:rPr lang="en-NZ" sz="600" dirty="0" err="1">
+                <a:solidFill>
+                  <a:schemeClr val="bg1"/>
+                </a:solidFill>
+                <a:latin typeface="DM Sans"/>
+              </a:rPr>
+              <a:t>Infinitas</a:t>
+            </a:r>
+            <a:r>
+              <a:rPr lang="en-NZ" sz="600" dirty="0">
+                <a:solidFill>
+                  <a:schemeClr val="bg1"/>
+                </a:solidFill>
+                <a:latin typeface="DM Sans"/>
+              </a:rPr>
+              <a:t> Talent Limited  |  2 Princes Street, Auckland 1010  |  +64 9 218 6127  |  infinitas.co.nz</a:t>
+            </a:r>
+          </a:p>
+          <a:p>
+            <a:pPr algn="ctr"/>
+            <a:r>
+              <a:rPr lang="en-NZ" sz="500" dirty="0">
+                <a:solidFill>
+                  <a:schemeClr val="bg1"/>
+                </a:solidFill>
+                <a:latin typeface="DM Sans"/>
+              </a:rPr>
+              <a:t>This document is private and confidential. These candidates are being represented by </a:t>
+            </a:r>
+            <a:r>
+              <a:rPr lang="en-NZ" sz="500" dirty="0" err="1">
+                <a:solidFill>
+                  <a:schemeClr val="bg1"/>
+                </a:solidFill>
+                <a:latin typeface="DM Sans"/>
+              </a:rPr>
+              <a:t>Infinitas</a:t>
+            </a:r>
+            <a:r>
+              <a:rPr lang="en-NZ" sz="500" dirty="0">
+                <a:solidFill>
+                  <a:schemeClr val="bg1"/>
+                </a:solidFill>
+                <a:latin typeface="DM Sans"/>
+              </a:rPr>
+              <a:t> Talent Limited</a:t>
+            </a:r>
+            <a:endParaRPr lang="en-NZ" altLang="en-US" sz="400" dirty="0">
+              <a:solidFill>
+                <a:schemeClr val="bg1"/>
+              </a:solidFill>
+            </a:endParaRPr>
+          </a:p>
+        </p:txBody>
+      </p:sp>
+      <p:pic>
+        <p:nvPicPr>
+          <p:cNvPr id="10" name="Picture 9" descr="image.jpg">
+            <a:extLst>
+              <a:ext uri="{FF2B5EF4-FFF2-40B4-BE49-F238E27FC236}">
+                <a16:creationId xmlns:a16="http://schemas.microsoft.com/office/drawing/2014/main" id="{62E44896-BF96-72AF-F3C1-996CED97070B}"/>
+              </a:ext>
+            </a:extLst>
+          </p:cNvPr>
+          <p:cNvPicPr>
+            <a:picLocks noChangeAspect="1"/>
+          </p:cNvPicPr>
+          <p:nvPr/>
+        </p:nvPicPr>
+        <p:blipFill>
+          <a:blip r:embed="rId2"/>
+          <a:stretch>
+            <a:fillRect/>
+          </a:stretch>
+        </p:blipFill>
+        <p:spPr>
+          <a:xfrm>
+            <a:off x="609694" y="562308"/>
+            <a:ext cx="1388495" cy="1395359"/>
+          </a:xfrm>
+          <a:prstGeom prst="rect">
+            <a:avLst/>
+          </a:prstGeom>
+        </p:spPr>
+      </p:pic>
+      <p:sp>
+        <p:nvSpPr>
+          <p:cNvPr id="11" name="Rectangle: Rounded Corners 10">
+            <a:extLst>
+              <a:ext uri="{FF2B5EF4-FFF2-40B4-BE49-F238E27FC236}">
+                <a16:creationId xmlns:a16="http://schemas.microsoft.com/office/drawing/2014/main" id="{61446741-8BD6-7BA0-9FA2-53EECEB8C760}"/>
               </a:ext>
             </a:extLst>
           </p:cNvPr>
@@ -8447,8 +9137,8 @@
         </p:nvSpPr>
         <p:spPr>
           <a:xfrm>
-            <a:off x="143587" y="5198368"/>
-            <a:ext cx="6580645" cy="4297478"/>
+            <a:off x="143587" y="4888976"/>
+            <a:ext cx="6568447" cy="4527289"/>
           </a:xfrm>
           <a:prstGeom prst="roundRect">
             <a:avLst>
@@ -8487,7 +9177,7 @@
           <a:bodyPr tIns="0" rtlCol="0" anchor="t" anchorCtr="0"/>
           <a:lstStyle/>
           <a:p>
-            <a:endParaRPr lang="en-NZ" sz="900">
+            <a:endParaRPr lang="en-NZ" sz="900" dirty="0">
               <a:solidFill>
                 <a:schemeClr val="tx1"/>
               </a:solidFill>
@@ -8496,17 +9186,497 @@
           <a:p>
             <a:pPr algn="just"/>
             <a:r>
-              <a:rPr lang="en-NZ" sz="900">
+              <a:rPr lang="en-NZ" sz="900" dirty="0">
                 <a:solidFill>
                   <a:schemeClr val="tx1"/>
                 </a:solidFill>
               </a:rPr>
-              <a:t>Emma has recently finished up at New Zealand Green Investment Finance (NZGIF) as the government opted to close the fund last year. Starting her career in banking and the big four (M&amp;A) in the UK she married a New Zealander and moved here over 20 years ago. Her career in New Zealand has been in banking and debt financing before moving to NZGIF where she has led some of their equity investments and acquisitions. </a:t>
+              <a:t>Lorem ipsum </a:t>
+            </a:r>
+            <a:r>
+              <a:rPr lang="en-NZ" sz="900" dirty="0" err="1">
+                <a:solidFill>
+                  <a:schemeClr val="tx1"/>
+                </a:solidFill>
+              </a:rPr>
+              <a:t>dolor</a:t>
+            </a:r>
+            <a:r>
+              <a:rPr lang="en-NZ" sz="900" dirty="0">
+                <a:solidFill>
+                  <a:schemeClr val="tx1"/>
+                </a:solidFill>
+              </a:rPr>
+              <a:t> sit </a:t>
+            </a:r>
+            <a:r>
+              <a:rPr lang="en-NZ" sz="900" dirty="0" err="1">
+                <a:solidFill>
+                  <a:schemeClr val="tx1"/>
+                </a:solidFill>
+              </a:rPr>
+              <a:t>amet</a:t>
+            </a:r>
+            <a:r>
+              <a:rPr lang="en-NZ" sz="900" dirty="0">
+                <a:solidFill>
+                  <a:schemeClr val="tx1"/>
+                </a:solidFill>
+              </a:rPr>
+              <a:t>, </a:t>
+            </a:r>
+            <a:r>
+              <a:rPr lang="en-NZ" sz="900" dirty="0" err="1">
+                <a:solidFill>
+                  <a:schemeClr val="tx1"/>
+                </a:solidFill>
+              </a:rPr>
+              <a:t>consectetur</a:t>
+            </a:r>
+            <a:r>
+              <a:rPr lang="en-NZ" sz="900" dirty="0">
+                <a:solidFill>
+                  <a:schemeClr val="tx1"/>
+                </a:solidFill>
+              </a:rPr>
+              <a:t> </a:t>
+            </a:r>
+            <a:r>
+              <a:rPr lang="en-NZ" sz="900" dirty="0" err="1">
+                <a:solidFill>
+                  <a:schemeClr val="tx1"/>
+                </a:solidFill>
+              </a:rPr>
+              <a:t>adipiscing</a:t>
+            </a:r>
+            <a:r>
+              <a:rPr lang="en-NZ" sz="900" dirty="0">
+                <a:solidFill>
+                  <a:schemeClr val="tx1"/>
+                </a:solidFill>
+              </a:rPr>
+              <a:t> </a:t>
+            </a:r>
+            <a:r>
+              <a:rPr lang="en-NZ" sz="900" dirty="0" err="1">
+                <a:solidFill>
+                  <a:schemeClr val="tx1"/>
+                </a:solidFill>
+              </a:rPr>
+              <a:t>elit</a:t>
+            </a:r>
+            <a:r>
+              <a:rPr lang="en-NZ" sz="900" dirty="0">
+                <a:solidFill>
+                  <a:schemeClr val="tx1"/>
+                </a:solidFill>
+              </a:rPr>
+              <a:t>. Sed do </a:t>
+            </a:r>
+            <a:r>
+              <a:rPr lang="en-NZ" sz="900" dirty="0" err="1">
+                <a:solidFill>
+                  <a:schemeClr val="tx1"/>
+                </a:solidFill>
+              </a:rPr>
+              <a:t>eiusmod</a:t>
+            </a:r>
+            <a:r>
+              <a:rPr lang="en-NZ" sz="900" dirty="0">
+                <a:solidFill>
+                  <a:schemeClr val="tx1"/>
+                </a:solidFill>
+              </a:rPr>
+              <a:t> </a:t>
+            </a:r>
+            <a:r>
+              <a:rPr lang="en-NZ" sz="900" dirty="0" err="1">
+                <a:solidFill>
+                  <a:schemeClr val="tx1"/>
+                </a:solidFill>
+              </a:rPr>
+              <a:t>tempor</a:t>
+            </a:r>
+            <a:r>
+              <a:rPr lang="en-NZ" sz="900" dirty="0">
+                <a:solidFill>
+                  <a:schemeClr val="tx1"/>
+                </a:solidFill>
+              </a:rPr>
+              <a:t> </a:t>
+            </a:r>
+            <a:r>
+              <a:rPr lang="en-NZ" sz="900" dirty="0" err="1">
+                <a:solidFill>
+                  <a:schemeClr val="tx1"/>
+                </a:solidFill>
+              </a:rPr>
+              <a:t>incididunt</a:t>
+            </a:r>
+            <a:r>
+              <a:rPr lang="en-NZ" sz="900" dirty="0">
+                <a:solidFill>
+                  <a:schemeClr val="tx1"/>
+                </a:solidFill>
+              </a:rPr>
+              <a:t> </a:t>
+            </a:r>
+            <a:r>
+              <a:rPr lang="en-NZ" sz="900" dirty="0" err="1">
+                <a:solidFill>
+                  <a:schemeClr val="tx1"/>
+                </a:solidFill>
+              </a:rPr>
+              <a:t>ut</a:t>
+            </a:r>
+            <a:r>
+              <a:rPr lang="en-NZ" sz="900" dirty="0">
+                <a:solidFill>
+                  <a:schemeClr val="tx1"/>
+                </a:solidFill>
+              </a:rPr>
+              <a:t> labore et dolore magna aliqua._x000B__x000B_Ut </a:t>
+            </a:r>
+            <a:r>
+              <a:rPr lang="en-NZ" sz="900" dirty="0" err="1">
+                <a:solidFill>
+                  <a:schemeClr val="tx1"/>
+                </a:solidFill>
+              </a:rPr>
+              <a:t>enim</a:t>
+            </a:r>
+            <a:r>
+              <a:rPr lang="en-NZ" sz="900" dirty="0">
+                <a:solidFill>
+                  <a:schemeClr val="tx1"/>
+                </a:solidFill>
+              </a:rPr>
+              <a:t> ad minim </a:t>
+            </a:r>
+            <a:r>
+              <a:rPr lang="en-NZ" sz="900" dirty="0" err="1">
+                <a:solidFill>
+                  <a:schemeClr val="tx1"/>
+                </a:solidFill>
+              </a:rPr>
+              <a:t>veniam</a:t>
+            </a:r>
+            <a:r>
+              <a:rPr lang="en-NZ" sz="900" dirty="0">
+                <a:solidFill>
+                  <a:schemeClr val="tx1"/>
+                </a:solidFill>
+              </a:rPr>
+              <a:t>, </a:t>
+            </a:r>
+            <a:r>
+              <a:rPr lang="en-NZ" sz="900" dirty="0" err="1">
+                <a:solidFill>
+                  <a:schemeClr val="tx1"/>
+                </a:solidFill>
+              </a:rPr>
+              <a:t>quis</a:t>
+            </a:r>
+            <a:r>
+              <a:rPr lang="en-NZ" sz="900" dirty="0">
+                <a:solidFill>
+                  <a:schemeClr val="tx1"/>
+                </a:solidFill>
+              </a:rPr>
+              <a:t> </a:t>
+            </a:r>
+            <a:r>
+              <a:rPr lang="en-NZ" sz="900" dirty="0" err="1">
+                <a:solidFill>
+                  <a:schemeClr val="tx1"/>
+                </a:solidFill>
+              </a:rPr>
+              <a:t>nostrud</a:t>
+            </a:r>
+            <a:r>
+              <a:rPr lang="en-NZ" sz="900" dirty="0">
+                <a:solidFill>
+                  <a:schemeClr val="tx1"/>
+                </a:solidFill>
+              </a:rPr>
+              <a:t> exercitation </a:t>
+            </a:r>
+            <a:r>
+              <a:rPr lang="en-NZ" sz="900" dirty="0" err="1">
+                <a:solidFill>
+                  <a:schemeClr val="tx1"/>
+                </a:solidFill>
+              </a:rPr>
+              <a:t>ullamco</a:t>
+            </a:r>
+            <a:r>
+              <a:rPr lang="en-NZ" sz="900" dirty="0">
+                <a:solidFill>
+                  <a:schemeClr val="tx1"/>
+                </a:solidFill>
+              </a:rPr>
+              <a:t> </a:t>
+            </a:r>
+            <a:r>
+              <a:rPr lang="en-NZ" sz="900" dirty="0" err="1">
+                <a:solidFill>
+                  <a:schemeClr val="tx1"/>
+                </a:solidFill>
+              </a:rPr>
+              <a:t>laboris</a:t>
+            </a:r>
+            <a:r>
+              <a:rPr lang="en-NZ" sz="900" dirty="0">
+                <a:solidFill>
+                  <a:schemeClr val="tx1"/>
+                </a:solidFill>
+              </a:rPr>
+              <a:t> nisi </a:t>
+            </a:r>
+            <a:r>
+              <a:rPr lang="en-NZ" sz="900" dirty="0" err="1">
+                <a:solidFill>
+                  <a:schemeClr val="tx1"/>
+                </a:solidFill>
+              </a:rPr>
+              <a:t>ut</a:t>
+            </a:r>
+            <a:r>
+              <a:rPr lang="en-NZ" sz="900" dirty="0">
+                <a:solidFill>
+                  <a:schemeClr val="tx1"/>
+                </a:solidFill>
+              </a:rPr>
+              <a:t> </a:t>
+            </a:r>
+            <a:r>
+              <a:rPr lang="en-NZ" sz="900" dirty="0" err="1">
+                <a:solidFill>
+                  <a:schemeClr val="tx1"/>
+                </a:solidFill>
+              </a:rPr>
+              <a:t>aliquip</a:t>
+            </a:r>
+            <a:r>
+              <a:rPr lang="en-NZ" sz="900" dirty="0">
+                <a:solidFill>
+                  <a:schemeClr val="tx1"/>
+                </a:solidFill>
+              </a:rPr>
+              <a:t> ex </a:t>
+            </a:r>
+            <a:r>
+              <a:rPr lang="en-NZ" sz="900" dirty="0" err="1">
+                <a:solidFill>
+                  <a:schemeClr val="tx1"/>
+                </a:solidFill>
+              </a:rPr>
+              <a:t>ea</a:t>
+            </a:r>
+            <a:r>
+              <a:rPr lang="en-NZ" sz="900" dirty="0">
+                <a:solidFill>
+                  <a:schemeClr val="tx1"/>
+                </a:solidFill>
+              </a:rPr>
+              <a:t> </a:t>
+            </a:r>
+            <a:r>
+              <a:rPr lang="en-NZ" sz="900" dirty="0" err="1">
+                <a:solidFill>
+                  <a:schemeClr val="tx1"/>
+                </a:solidFill>
+              </a:rPr>
+              <a:t>commodo</a:t>
+            </a:r>
+            <a:r>
+              <a:rPr lang="en-NZ" sz="900" dirty="0">
+                <a:solidFill>
+                  <a:schemeClr val="tx1"/>
+                </a:solidFill>
+              </a:rPr>
+              <a:t> consequat._x000B__x000B_Duis </a:t>
+            </a:r>
+            <a:r>
+              <a:rPr lang="en-NZ" sz="900" dirty="0" err="1">
+                <a:solidFill>
+                  <a:schemeClr val="tx1"/>
+                </a:solidFill>
+              </a:rPr>
+              <a:t>aute</a:t>
+            </a:r>
+            <a:r>
+              <a:rPr lang="en-NZ" sz="900" dirty="0">
+                <a:solidFill>
+                  <a:schemeClr val="tx1"/>
+                </a:solidFill>
+              </a:rPr>
+              <a:t> </a:t>
+            </a:r>
+            <a:r>
+              <a:rPr lang="en-NZ" sz="900" dirty="0" err="1">
+                <a:solidFill>
+                  <a:schemeClr val="tx1"/>
+                </a:solidFill>
+              </a:rPr>
+              <a:t>irure</a:t>
+            </a:r>
+            <a:r>
+              <a:rPr lang="en-NZ" sz="900" dirty="0">
+                <a:solidFill>
+                  <a:schemeClr val="tx1"/>
+                </a:solidFill>
+              </a:rPr>
+              <a:t> </a:t>
+            </a:r>
+            <a:r>
+              <a:rPr lang="en-NZ" sz="900" dirty="0" err="1">
+                <a:solidFill>
+                  <a:schemeClr val="tx1"/>
+                </a:solidFill>
+              </a:rPr>
+              <a:t>dolor</a:t>
+            </a:r>
+            <a:r>
+              <a:rPr lang="en-NZ" sz="900" dirty="0">
+                <a:solidFill>
+                  <a:schemeClr val="tx1"/>
+                </a:solidFill>
+              </a:rPr>
+              <a:t> in </a:t>
+            </a:r>
+            <a:r>
+              <a:rPr lang="en-NZ" sz="900" dirty="0" err="1">
+                <a:solidFill>
+                  <a:schemeClr val="tx1"/>
+                </a:solidFill>
+              </a:rPr>
+              <a:t>reprehenderit</a:t>
+            </a:r>
+            <a:r>
+              <a:rPr lang="en-NZ" sz="900" dirty="0">
+                <a:solidFill>
+                  <a:schemeClr val="tx1"/>
+                </a:solidFill>
+              </a:rPr>
+              <a:t> in </a:t>
+            </a:r>
+            <a:r>
+              <a:rPr lang="en-NZ" sz="900" dirty="0" err="1">
+                <a:solidFill>
+                  <a:schemeClr val="tx1"/>
+                </a:solidFill>
+              </a:rPr>
+              <a:t>voluptate</a:t>
+            </a:r>
+            <a:r>
+              <a:rPr lang="en-NZ" sz="900" dirty="0">
+                <a:solidFill>
+                  <a:schemeClr val="tx1"/>
+                </a:solidFill>
+              </a:rPr>
+              <a:t> </a:t>
+            </a:r>
+            <a:r>
+              <a:rPr lang="en-NZ" sz="900" dirty="0" err="1">
+                <a:solidFill>
+                  <a:schemeClr val="tx1"/>
+                </a:solidFill>
+              </a:rPr>
+              <a:t>velit</a:t>
+            </a:r>
+            <a:r>
+              <a:rPr lang="en-NZ" sz="900" dirty="0">
+                <a:solidFill>
+                  <a:schemeClr val="tx1"/>
+                </a:solidFill>
+              </a:rPr>
+              <a:t> esse </a:t>
+            </a:r>
+            <a:r>
+              <a:rPr lang="en-NZ" sz="900" dirty="0" err="1">
+                <a:solidFill>
+                  <a:schemeClr val="tx1"/>
+                </a:solidFill>
+              </a:rPr>
+              <a:t>cillum</a:t>
+            </a:r>
+            <a:r>
+              <a:rPr lang="en-NZ" sz="900" dirty="0">
+                <a:solidFill>
+                  <a:schemeClr val="tx1"/>
+                </a:solidFill>
+              </a:rPr>
+              <a:t> dolore </a:t>
+            </a:r>
+            <a:r>
+              <a:rPr lang="en-NZ" sz="900" dirty="0" err="1">
+                <a:solidFill>
+                  <a:schemeClr val="tx1"/>
+                </a:solidFill>
+              </a:rPr>
+              <a:t>eu</a:t>
+            </a:r>
+            <a:r>
+              <a:rPr lang="en-NZ" sz="900" dirty="0">
+                <a:solidFill>
+                  <a:schemeClr val="tx1"/>
+                </a:solidFill>
+              </a:rPr>
+              <a:t> </a:t>
+            </a:r>
+            <a:r>
+              <a:rPr lang="en-NZ" sz="900" dirty="0" err="1">
+                <a:solidFill>
+                  <a:schemeClr val="tx1"/>
+                </a:solidFill>
+              </a:rPr>
+              <a:t>fugiat</a:t>
+            </a:r>
+            <a:r>
+              <a:rPr lang="en-NZ" sz="900" dirty="0">
+                <a:solidFill>
+                  <a:schemeClr val="tx1"/>
+                </a:solidFill>
+              </a:rPr>
+              <a:t> </a:t>
+            </a:r>
+            <a:r>
+              <a:rPr lang="en-NZ" sz="900" dirty="0" err="1">
+                <a:solidFill>
+                  <a:schemeClr val="tx1"/>
+                </a:solidFill>
+              </a:rPr>
+              <a:t>nulla</a:t>
+            </a:r>
+            <a:r>
+              <a:rPr lang="en-NZ" sz="900" dirty="0">
+                <a:solidFill>
+                  <a:schemeClr val="tx1"/>
+                </a:solidFill>
+              </a:rPr>
+              <a:t> </a:t>
+            </a:r>
+            <a:r>
+              <a:rPr lang="en-NZ" sz="900" dirty="0" err="1">
+                <a:solidFill>
+                  <a:schemeClr val="tx1"/>
+                </a:solidFill>
+              </a:rPr>
+              <a:t>pariatur</a:t>
+            </a:r>
+            <a:r>
+              <a:rPr lang="en-NZ" sz="900" dirty="0">
+                <a:solidFill>
+                  <a:schemeClr val="tx1"/>
+                </a:solidFill>
+              </a:rPr>
+              <a:t>.</a:t>
             </a:r>
           </a:p>
           <a:p>
             <a:pPr algn="just"/>
-            <a:endParaRPr lang="en-NZ" sz="900">
+            <a:endParaRPr lang="en-NZ" sz="900" dirty="0">
               <a:solidFill>
                 <a:schemeClr val="tx1"/>
               </a:solidFill>
@@ -8514,18 +9684,7 @@
           </a:p>
           <a:p>
             <a:pPr algn="just"/>
-            <a:r>
-              <a:rPr lang="en-NZ" sz="900">
-                <a:solidFill>
-                  <a:schemeClr val="tx1"/>
-                </a:solidFill>
-              </a:rPr>
-              <a:t>Emma is looking for her next role to ideally be an ownership, role where she can drive commercial value in a meaningful industry and have ownership of the entire commercial function for a business. </a:t>
-            </a:r>
-          </a:p>
-          <a:p>
-            <a:pPr algn="just"/>
-            <a:endParaRPr lang="en-NZ" sz="900">
+            <a:endParaRPr lang="en-NZ" sz="900" dirty="0">
               <a:solidFill>
                 <a:schemeClr val="tx1"/>
               </a:solidFill>
@@ -8533,18 +9692,7 @@
           </a:p>
           <a:p>
             <a:pPr algn="just"/>
-            <a:r>
-              <a:rPr lang="en-NZ" sz="900">
-                <a:solidFill>
-                  <a:schemeClr val="tx1"/>
-                </a:solidFill>
-              </a:rPr>
-              <a:t>Emma has real strengths in owning the entire end to end due diligence process including analysing a business’s financials, commercials and pay back etc. The kind of due diligence required at NZGIF was deeper than most as it had to take a deep dive in to ESG and modern slavery checks, amongst other checks to ensure everything from the supply chain and other input factors were in fact clean and green and free from political and other interference. </a:t>
-            </a:r>
-          </a:p>
-          <a:p>
-            <a:pPr algn="just"/>
-            <a:endParaRPr lang="en-NZ" sz="900">
+            <a:endParaRPr lang="en-NZ" sz="900" dirty="0">
               <a:solidFill>
                 <a:schemeClr val="tx1"/>
               </a:solidFill>
@@ -8552,18 +9700,7 @@
           </a:p>
           <a:p>
             <a:pPr algn="just"/>
-            <a:r>
-              <a:rPr lang="en-NZ" sz="900">
-                <a:solidFill>
-                  <a:schemeClr val="tx1"/>
-                </a:solidFill>
-              </a:rPr>
-              <a:t>She also has strengths in the entire transaction leadership: origination through completion, coordinating legal, procurement and external advisors and the negotiation of long term contracts.</a:t>
-            </a:r>
-          </a:p>
-          <a:p>
-            <a:pPr algn="just"/>
-            <a:endParaRPr lang="en-NZ" sz="900">
+            <a:endParaRPr lang="en-NZ" sz="900" dirty="0">
               <a:solidFill>
                 <a:schemeClr val="tx1"/>
               </a:solidFill>
@@ -8571,18 +9708,7 @@
           </a:p>
           <a:p>
             <a:pPr algn="just"/>
-            <a:r>
-              <a:rPr lang="en-NZ" sz="900">
-                <a:solidFill>
-                  <a:schemeClr val="tx1"/>
-                </a:solidFill>
-              </a:rPr>
-              <a:t>She has extensive experience at valuations and investment cases writing, and has presented to boards and exec teams from her time at ANZ as well as NZGIF.  </a:t>
-            </a:r>
-          </a:p>
-          <a:p>
-            <a:pPr algn="just"/>
-            <a:endParaRPr lang="en-NZ" sz="900">
+            <a:endParaRPr lang="en-NZ" sz="900" dirty="0">
               <a:solidFill>
                 <a:schemeClr val="tx1"/>
               </a:solidFill>
@@ -8590,18 +9716,7 @@
           </a:p>
           <a:p>
             <a:pPr algn="just"/>
-            <a:r>
-              <a:rPr lang="en-NZ" sz="900">
-                <a:solidFill>
-                  <a:schemeClr val="tx1"/>
-                </a:solidFill>
-              </a:rPr>
-              <a:t>Although she has not formally worked in house in a commercial management type role she is strong  at  modelling (all aspects that this role requires) and has had to have the ownership (particularly at NZGIF) of all commercial operational numbers as well as the analysis of monthly variance analysis, revenue leakage, pricing and other factors that affect the business she investment in or acquired. </a:t>
-            </a:r>
-          </a:p>
-          <a:p>
-            <a:pPr algn="just"/>
-            <a:endParaRPr lang="en-NZ" sz="900">
+            <a:endParaRPr lang="en-NZ" sz="900" dirty="0">
               <a:solidFill>
                 <a:schemeClr val="tx1"/>
               </a:solidFill>
@@ -8609,18 +9724,7 @@
           </a:p>
           <a:p>
             <a:pPr algn="just"/>
-            <a:r>
-              <a:rPr lang="en-NZ" sz="900">
-                <a:solidFill>
-                  <a:schemeClr val="tx1"/>
-                </a:solidFill>
-              </a:rPr>
-              <a:t>Her CA foundation from earlier in her career (she was originally in the audit team at EY in the UK) means she will bring strong rigor and a controls orientation to how she manages her teams and the businesses she works for. </a:t>
-            </a:r>
-          </a:p>
-          <a:p>
-            <a:pPr algn="just"/>
-            <a:endParaRPr lang="en-NZ" sz="900">
+            <a:endParaRPr lang="en-NZ" sz="900" dirty="0">
               <a:solidFill>
                 <a:schemeClr val="tx1"/>
               </a:solidFill>
@@ -8628,14 +9732,27 @@
           </a:p>
           <a:p>
             <a:pPr algn="just"/>
-            <a:r>
-              <a:rPr lang="en-NZ" sz="900">
-                <a:solidFill>
-                  <a:schemeClr val="tx1"/>
-                </a:solidFill>
-              </a:rPr>
-              <a:t>Emma is a values based person and has a calm and open communication style. She has a collaborative and consensus oriented leadership style, with an adaptive approach to individuals and is comfortable taking a firm lead when needed and adjusting style to the situation. She has led large teams and is comfortable at a strategic level but is operationally strong.  </a:t>
-            </a:r>
+            <a:endParaRPr lang="en-NZ" sz="900" dirty="0">
+              <a:solidFill>
+                <a:schemeClr val="tx1"/>
+              </a:solidFill>
+            </a:endParaRPr>
+          </a:p>
+          <a:p>
+            <a:pPr algn="just"/>
+            <a:endParaRPr lang="en-NZ" sz="900" dirty="0">
+              <a:solidFill>
+                <a:schemeClr val="tx1"/>
+              </a:solidFill>
+            </a:endParaRPr>
+          </a:p>
+          <a:p>
+            <a:pPr algn="just"/>
+            <a:endParaRPr lang="en-NZ" sz="900" dirty="0">
+              <a:solidFill>
+                <a:schemeClr val="tx1"/>
+              </a:solidFill>
+            </a:endParaRPr>
           </a:p>
           <a:p>
             <a:pPr algn="just">
@@ -8647,7 +9764,7 @@
               </a:spcAft>
               <a:buNone/>
             </a:pPr>
-            <a:endParaRPr lang="en-NZ" sz="400" kern="100">
+            <a:endParaRPr lang="en-NZ" sz="900" kern="100" dirty="0">
               <a:solidFill>
                 <a:schemeClr val="tx1"/>
               </a:solidFill>
@@ -8659,6412 +9776,10 @@
           </a:p>
         </p:txBody>
       </p:sp>
-      <p:graphicFrame>
-        <p:nvGraphicFramePr>
-          <p:cNvPr id="3" name="Table 2">
-            <a:extLst>
-              <a:ext uri="{FF2B5EF4-FFF2-40B4-BE49-F238E27FC236}">
-                <a16:creationId xmlns:a16="http://schemas.microsoft.com/office/drawing/2014/main" id="{3CD12CEE-4C83-B887-8EC9-663E8DE4EA2B}"/>
-              </a:ext>
-            </a:extLst>
-          </p:cNvPr>
-          <p:cNvGraphicFramePr>
-            <a:graphicFrameLocks/>
-          </p:cNvGraphicFramePr>
-          <p:nvPr>
-            <p:extLst>
-              <p:ext uri="{D42A27DB-BD31-4B8C-83A1-F6EECF244321}">
-                <p14:modId xmlns:p14="http://schemas.microsoft.com/office/powerpoint/2010/main" val="3197296890"/>
-              </p:ext>
-            </p:extLst>
-          </p:nvPr>
-        </p:nvGraphicFramePr>
-        <p:xfrm>
-          <a:off x="2429934" y="547615"/>
-          <a:ext cx="4191846" cy="1897798"/>
-        </p:xfrm>
-        <a:graphic>
-          <a:graphicData uri="http://schemas.openxmlformats.org/drawingml/2006/table">
-            <a:tbl>
-              <a:tblPr bandRow="1">
-                <a:tableStyleId>{2D5ABB26-0587-4C30-8999-92F81FD0307C}</a:tableStyleId>
-              </a:tblPr>
-              <a:tblGrid>
-                <a:gridCol w="1817882">
-                  <a:extLst>
-                    <a:ext uri="{9D8B030D-6E8A-4147-A177-3AD203B41FA5}">
-                      <a16:colId xmlns:a16="http://schemas.microsoft.com/office/drawing/2014/main" val="2252499205"/>
-                    </a:ext>
-                  </a:extLst>
-                </a:gridCol>
-                <a:gridCol w="2373964">
-                  <a:extLst>
-                    <a:ext uri="{9D8B030D-6E8A-4147-A177-3AD203B41FA5}">
-                      <a16:colId xmlns:a16="http://schemas.microsoft.com/office/drawing/2014/main" val="3268057789"/>
-                    </a:ext>
-                  </a:extLst>
-                </a:gridCol>
-              </a:tblGrid>
-              <a:tr h="363314">
-                <a:tc>
-                  <a:txBody>
-                    <a:bodyPr/>
-                    <a:lstStyle/>
-                    <a:p>
-                      <a:pPr>
-                        <a:buNone/>
-                      </a:pPr>
-                      <a:r>
-                        <a:rPr lang="en-NZ" sz="900" b="1">
-                          <a:solidFill>
-                            <a:schemeClr val="bg1"/>
-                          </a:solidFill>
-                        </a:rPr>
-                        <a:t>Notice Period</a:t>
-                      </a:r>
-                      <a:endParaRPr lang="en-NZ" sz="900">
-                        <a:solidFill>
-                          <a:schemeClr val="bg1"/>
-                        </a:solidFill>
-                      </a:endParaRPr>
-                    </a:p>
-                  </a:txBody>
-                  <a:tcPr anchor="ctr">
-                    <a:lnL>
-                      <a:noFill/>
-                    </a:lnL>
-                    <a:lnR>
-                      <a:noFill/>
-                    </a:lnR>
-                    <a:lnT>
-                      <a:noFill/>
-                    </a:lnT>
-                    <a:lnB>
-                      <a:noFill/>
-                    </a:lnB>
-                    <a:lnTlToBr w="12700" cmpd="sng">
-                      <a:noFill/>
-                      <a:prstDash val="solid"/>
-                    </a:lnTlToBr>
-                    <a:lnBlToTr w="12700" cmpd="sng">
-                      <a:noFill/>
-                      <a:prstDash val="solid"/>
-                    </a:lnBlToTr>
-                    <a:noFill/>
-                  </a:tcPr>
-                </a:tc>
-                <a:tc>
-                  <a:txBody>
-                    <a:bodyPr/>
-                    <a:lstStyle/>
-                    <a:p>
-                      <a:pPr>
-                        <a:buNone/>
-                      </a:pPr>
-                      <a:r>
-                        <a:rPr lang="en-GB" sz="900" i="1">
-                          <a:solidFill>
-                            <a:schemeClr val="bg1"/>
-                          </a:solidFill>
-                        </a:rPr>
-                        <a:t>Available immediately with a preference for a January start</a:t>
-                      </a:r>
-                      <a:endParaRPr lang="en-NZ" sz="900" i="1">
-                        <a:solidFill>
-                          <a:schemeClr val="bg1"/>
-                        </a:solidFill>
-                      </a:endParaRPr>
-                    </a:p>
-                  </a:txBody>
-                  <a:tcPr anchor="ctr">
-                    <a:lnL>
-                      <a:noFill/>
-                    </a:lnL>
-                    <a:lnR>
-                      <a:noFill/>
-                    </a:lnR>
-                    <a:lnT>
-                      <a:noFill/>
-                    </a:lnT>
-                    <a:lnB>
-                      <a:noFill/>
-                    </a:lnB>
-                    <a:lnTlToBr w="12700" cmpd="sng">
-                      <a:noFill/>
-                      <a:prstDash val="solid"/>
-                    </a:lnTlToBr>
-                    <a:lnBlToTr w="12700" cmpd="sng">
-                      <a:noFill/>
-                      <a:prstDash val="solid"/>
-                    </a:lnBlToTr>
-                    <a:noFill/>
-                  </a:tcPr>
-                </a:tc>
-                <a:extLst>
-                  <a:ext uri="{0D108BD9-81ED-4DB2-BD59-A6C34878D82A}">
-                    <a16:rowId xmlns:a16="http://schemas.microsoft.com/office/drawing/2014/main" val="358037502"/>
-                  </a:ext>
-                </a:extLst>
-              </a:tr>
-              <a:tr h="348198">
-                <a:tc>
-                  <a:txBody>
-                    <a:bodyPr/>
-                    <a:lstStyle/>
-                    <a:p>
-                      <a:pPr>
-                        <a:buNone/>
-                      </a:pPr>
-                      <a:r>
-                        <a:rPr lang="en-NZ" sz="900" b="1">
-                          <a:solidFill>
-                            <a:schemeClr val="bg1"/>
-                          </a:solidFill>
-                        </a:rPr>
-                        <a:t>Base Salary Expectation</a:t>
-                      </a:r>
-                      <a:endParaRPr lang="en-NZ" sz="900">
-                        <a:solidFill>
-                          <a:schemeClr val="bg1"/>
-                        </a:solidFill>
-                      </a:endParaRPr>
-                    </a:p>
-                  </a:txBody>
-                  <a:tcPr anchor="ctr">
-                    <a:lnL>
-                      <a:noFill/>
-                    </a:lnL>
-                    <a:lnR>
-                      <a:noFill/>
-                    </a:lnR>
-                    <a:lnT>
-                      <a:noFill/>
-                    </a:lnT>
-                    <a:lnB>
-                      <a:noFill/>
-                    </a:lnB>
-                    <a:lnTlToBr w="12700" cmpd="sng">
-                      <a:noFill/>
-                      <a:prstDash val="solid"/>
-                    </a:lnTlToBr>
-                    <a:lnBlToTr w="12700" cmpd="sng">
-                      <a:noFill/>
-                      <a:prstDash val="solid"/>
-                    </a:lnBlToTr>
-                    <a:noFill/>
-                  </a:tcPr>
-                </a:tc>
-                <a:tc>
-                  <a:txBody>
-                    <a:bodyPr/>
-                    <a:lstStyle/>
-                    <a:p>
-                      <a:pPr>
-                        <a:buNone/>
-                      </a:pPr>
-                      <a:r>
-                        <a:rPr lang="en-NZ" sz="900">
-                          <a:solidFill>
-                            <a:schemeClr val="bg1"/>
-                          </a:solidFill>
-                        </a:rPr>
-                        <a:t>$265,000</a:t>
-                      </a:r>
-                    </a:p>
-                  </a:txBody>
-                  <a:tcPr anchor="ctr">
-                    <a:lnL>
-                      <a:noFill/>
-                    </a:lnL>
-                    <a:lnR>
-                      <a:noFill/>
-                    </a:lnR>
-                    <a:lnT>
-                      <a:noFill/>
-                    </a:lnT>
-                    <a:lnB>
-                      <a:noFill/>
-                    </a:lnB>
-                    <a:lnTlToBr w="12700" cmpd="sng">
-                      <a:noFill/>
-                      <a:prstDash val="solid"/>
-                    </a:lnTlToBr>
-                    <a:lnBlToTr w="12700" cmpd="sng">
-                      <a:noFill/>
-                      <a:prstDash val="solid"/>
-                    </a:lnBlToTr>
-                    <a:noFill/>
-                  </a:tcPr>
-                </a:tc>
-                <a:extLst>
-                  <a:ext uri="{0D108BD9-81ED-4DB2-BD59-A6C34878D82A}">
-                    <a16:rowId xmlns:a16="http://schemas.microsoft.com/office/drawing/2014/main" val="49863457"/>
-                  </a:ext>
-                </a:extLst>
-              </a:tr>
-              <a:tr h="543760">
-                <a:tc>
-                  <a:txBody>
-                    <a:bodyPr/>
-                    <a:lstStyle/>
-                    <a:p>
-                      <a:pPr>
-                        <a:buNone/>
-                      </a:pPr>
-                      <a:r>
-                        <a:rPr lang="en-NZ" sz="900" b="1">
-                          <a:solidFill>
-                            <a:schemeClr val="bg1"/>
-                          </a:solidFill>
-                        </a:rPr>
-                        <a:t>Education</a:t>
-                      </a:r>
-                      <a:endParaRPr lang="en-NZ" sz="900">
-                        <a:solidFill>
-                          <a:schemeClr val="bg1"/>
-                        </a:solidFill>
-                      </a:endParaRPr>
-                    </a:p>
-                  </a:txBody>
-                  <a:tcPr anchor="ctr">
-                    <a:lnL>
-                      <a:noFill/>
-                    </a:lnL>
-                    <a:lnR>
-                      <a:noFill/>
-                    </a:lnR>
-                    <a:lnT>
-                      <a:noFill/>
-                    </a:lnT>
-                    <a:lnB>
-                      <a:noFill/>
-                    </a:lnB>
-                    <a:lnTlToBr w="12700" cmpd="sng">
-                      <a:noFill/>
-                      <a:prstDash val="solid"/>
-                    </a:lnTlToBr>
-                    <a:lnBlToTr w="12700" cmpd="sng">
-                      <a:noFill/>
-                      <a:prstDash val="solid"/>
-                    </a:lnBlToTr>
-                    <a:noFill/>
-                  </a:tcPr>
-                </a:tc>
-                <a:tc>
-                  <a:txBody>
-                    <a:bodyPr/>
-                    <a:lstStyle/>
-                    <a:p>
-                      <a:r>
-                        <a:rPr lang="en-GB" sz="900">
-                          <a:solidFill>
-                            <a:schemeClr val="bg1"/>
-                          </a:solidFill>
-                        </a:rPr>
-                        <a:t>Bachelor of Business Analysis Financial</a:t>
-                      </a:r>
-                      <a:br>
-                        <a:rPr lang="en-GB" sz="900">
-                          <a:solidFill>
-                            <a:schemeClr val="bg1"/>
-                          </a:solidFill>
-                        </a:rPr>
-                      </a:br>
-                      <a:r>
-                        <a:rPr lang="en-GB" sz="900">
-                          <a:solidFill>
-                            <a:schemeClr val="bg1"/>
-                          </a:solidFill>
-                        </a:rPr>
-                        <a:t>Graduate Diploma of Science in Organisational Psychology (ongoing)</a:t>
-                      </a:r>
-                      <a:endParaRPr lang="en-NZ" sz="900">
-                        <a:solidFill>
-                          <a:schemeClr val="bg1"/>
-                        </a:solidFill>
-                        <a:ea typeface="Roboto" panose="02000000000000000000" pitchFamily="2" charset="0"/>
-                        <a:cs typeface="Roboto" panose="02000000000000000000" pitchFamily="2" charset="0"/>
-                      </a:endParaRPr>
-                    </a:p>
-                  </a:txBody>
-                  <a:tcPr anchor="ctr">
-                    <a:lnL>
-                      <a:noFill/>
-                    </a:lnL>
-                    <a:lnR>
-                      <a:noFill/>
-                    </a:lnR>
-                    <a:lnT>
-                      <a:noFill/>
-                    </a:lnT>
-                    <a:lnB>
-                      <a:noFill/>
-                    </a:lnB>
-                    <a:lnTlToBr w="12700" cmpd="sng">
-                      <a:noFill/>
-                      <a:prstDash val="solid"/>
-                    </a:lnTlToBr>
-                    <a:lnBlToTr w="12700" cmpd="sng">
-                      <a:noFill/>
-                      <a:prstDash val="solid"/>
-                    </a:lnBlToTr>
-                    <a:noFill/>
-                  </a:tcPr>
-                </a:tc>
-                <a:extLst>
-                  <a:ext uri="{0D108BD9-81ED-4DB2-BD59-A6C34878D82A}">
-                    <a16:rowId xmlns:a16="http://schemas.microsoft.com/office/drawing/2014/main" val="912871463"/>
-                  </a:ext>
-                </a:extLst>
-              </a:tr>
-              <a:tr h="543760">
-                <a:tc>
-                  <a:txBody>
-                    <a:bodyPr/>
-                    <a:lstStyle/>
-                    <a:p>
-                      <a:pPr>
-                        <a:buNone/>
-                      </a:pPr>
-                      <a:r>
-                        <a:rPr lang="en-NZ" sz="900" b="1">
-                          <a:solidFill>
-                            <a:schemeClr val="bg1"/>
-                          </a:solidFill>
-                        </a:rPr>
-                        <a:t>Professional Qualifications</a:t>
-                      </a:r>
-                      <a:endParaRPr lang="en-NZ" sz="900">
-                        <a:solidFill>
-                          <a:schemeClr val="bg1"/>
-                        </a:solidFill>
-                      </a:endParaRPr>
-                    </a:p>
-                  </a:txBody>
-                  <a:tcPr anchor="ctr">
-                    <a:lnL>
-                      <a:noFill/>
-                    </a:lnL>
-                    <a:lnR>
-                      <a:noFill/>
-                    </a:lnR>
-                    <a:lnT>
-                      <a:noFill/>
-                    </a:lnT>
-                    <a:lnB>
-                      <a:noFill/>
-                    </a:lnB>
-                    <a:lnTlToBr w="12700" cmpd="sng">
-                      <a:noFill/>
-                      <a:prstDash val="solid"/>
-                    </a:lnTlToBr>
-                    <a:lnBlToTr w="12700" cmpd="sng">
-                      <a:noFill/>
-                      <a:prstDash val="solid"/>
-                    </a:lnBlToTr>
-                    <a:noFill/>
-                  </a:tcPr>
-                </a:tc>
-                <a:tc>
-                  <a:txBody>
-                    <a:bodyPr/>
-                    <a:lstStyle/>
-                    <a:p>
-                      <a:r>
-                        <a:rPr lang="en-NZ" sz="900">
-                          <a:solidFill>
-                            <a:schemeClr val="bg1"/>
-                          </a:solidFill>
-                        </a:rPr>
-                        <a:t>Certified Public Accountant CPA</a:t>
-                      </a:r>
-                      <a:br>
-                        <a:rPr lang="en-NZ" sz="900">
-                          <a:solidFill>
-                            <a:schemeClr val="bg1"/>
-                          </a:solidFill>
-                        </a:rPr>
-                      </a:br>
-                      <a:r>
-                        <a:rPr lang="en-NZ" sz="900">
-                          <a:solidFill>
-                            <a:schemeClr val="bg1"/>
-                          </a:solidFill>
-                        </a:rPr>
-                        <a:t>Impact Finance Innovation Program Oxford</a:t>
-                      </a:r>
-                      <a:br>
-                        <a:rPr lang="en-NZ" sz="900">
-                          <a:solidFill>
-                            <a:schemeClr val="bg1"/>
-                          </a:solidFill>
-                        </a:rPr>
-                      </a:br>
-                      <a:r>
-                        <a:rPr lang="en-NZ" sz="900">
-                          <a:solidFill>
-                            <a:schemeClr val="bg1"/>
-                          </a:solidFill>
-                        </a:rPr>
-                        <a:t>Project Management PMBOK</a:t>
-                      </a:r>
-                      <a:br>
-                        <a:rPr lang="en-NZ" sz="900">
-                          <a:solidFill>
-                            <a:schemeClr val="bg1"/>
-                          </a:solidFill>
-                        </a:rPr>
-                      </a:br>
-                      <a:r>
-                        <a:rPr lang="en-NZ" sz="900">
-                          <a:solidFill>
-                            <a:schemeClr val="bg1"/>
-                          </a:solidFill>
-                        </a:rPr>
-                        <a:t>Process Improvement Six Sigma</a:t>
-                      </a:r>
-                    </a:p>
-                  </a:txBody>
-                  <a:tcPr anchor="ctr">
-                    <a:lnL>
-                      <a:noFill/>
-                    </a:lnL>
-                    <a:lnR>
-                      <a:noFill/>
-                    </a:lnR>
-                    <a:lnT>
-                      <a:noFill/>
-                    </a:lnT>
-                    <a:lnB>
-                      <a:noFill/>
-                    </a:lnB>
-                    <a:lnTlToBr w="12700" cmpd="sng">
-                      <a:noFill/>
-                      <a:prstDash val="solid"/>
-                    </a:lnTlToBr>
-                    <a:lnBlToTr w="12700" cmpd="sng">
-                      <a:noFill/>
-                      <a:prstDash val="solid"/>
-                    </a:lnBlToTr>
-                    <a:noFill/>
-                  </a:tcPr>
-                </a:tc>
-                <a:extLst>
-                  <a:ext uri="{0D108BD9-81ED-4DB2-BD59-A6C34878D82A}">
-                    <a16:rowId xmlns:a16="http://schemas.microsoft.com/office/drawing/2014/main" val="932259989"/>
-                  </a:ext>
-                </a:extLst>
-              </a:tr>
-            </a:tbl>
-          </a:graphicData>
-        </a:graphic>
-      </p:graphicFrame>
-      <p:sp>
-        <p:nvSpPr>
-          <p:cNvPr id="5" name="TextBox 4">
-            <a:extLst>
-              <a:ext uri="{FF2B5EF4-FFF2-40B4-BE49-F238E27FC236}">
-                <a16:creationId xmlns:a16="http://schemas.microsoft.com/office/drawing/2014/main" id="{1F592B25-F02C-D0EA-3355-7D125F6E17CA}"/>
-              </a:ext>
-            </a:extLst>
-          </p:cNvPr>
-          <p:cNvSpPr txBox="1">
-            <a:spLocks noGrp="1" noRot="1" noMove="1" noResize="1" noEditPoints="1" noAdjustHandles="1" noChangeArrowheads="1" noChangeShapeType="1"/>
-          </p:cNvSpPr>
-          <p:nvPr/>
-        </p:nvSpPr>
-        <p:spPr>
-          <a:xfrm>
-            <a:off x="2429934" y="9495846"/>
-            <a:ext cx="2078914" cy="400110"/>
-          </a:xfrm>
-          <a:prstGeom prst="rect">
-            <a:avLst/>
-          </a:prstGeom>
-          <a:noFill/>
-        </p:spPr>
-        <p:txBody>
-          <a:bodyPr wrap="square" rtlCol="0">
-            <a:spAutoFit/>
-          </a:bodyPr>
-          <a:lstStyle/>
-          <a:p>
-            <a:endParaRPr lang="en-NZ" sz="400"/>
-          </a:p>
-          <a:p>
-            <a:pPr lvl="0" algn="ctr" defTabSz="514344">
-              <a:tabLst>
-                <a:tab pos="1611791" algn="ctr"/>
-                <a:tab pos="3223581" algn="r"/>
-              </a:tabLst>
-              <a:defRPr/>
-            </a:pPr>
-            <a:r>
-              <a:rPr lang="en-NZ" altLang="en-US" sz="400">
-                <a:solidFill>
-                  <a:srgbClr val="6F6F6F"/>
-                </a:solidFill>
-                <a:ea typeface="Calibri" panose="020F0502020204030204" pitchFamily="34" charset="0"/>
-                <a:cs typeface="Arial" panose="020B0604020202020204" pitchFamily="34" charset="0"/>
-              </a:rPr>
-              <a:t>Infinitas Talent Limited, PO BOX 357, 2 Princes Street, Auckland, 1140</a:t>
-            </a:r>
-            <a:endParaRPr lang="en-NZ" altLang="en-US" sz="400">
-              <a:solidFill>
-                <a:prstClr val="black"/>
-              </a:solidFill>
-            </a:endParaRPr>
-          </a:p>
-          <a:p>
-            <a:pPr lvl="0" algn="ctr" defTabSz="514344">
-              <a:tabLst>
-                <a:tab pos="1611791" algn="ctr"/>
-                <a:tab pos="3223581" algn="r"/>
-              </a:tabLst>
-              <a:defRPr/>
-            </a:pPr>
-            <a:r>
-              <a:rPr lang="en-NZ" altLang="en-US" sz="400">
-                <a:solidFill>
-                  <a:srgbClr val="6F6F6F"/>
-                </a:solidFill>
-                <a:ea typeface="Calibri" panose="020F0502020204030204" pitchFamily="34" charset="0"/>
-                <a:cs typeface="Arial" panose="020B0604020202020204" pitchFamily="34" charset="0"/>
-              </a:rPr>
-              <a:t>https://infinitas.co.nz   Tel: +64 (0) 9218 6127 </a:t>
-            </a:r>
-            <a:endParaRPr lang="en-NZ" altLang="en-US" sz="400">
-              <a:solidFill>
-                <a:prstClr val="black"/>
-              </a:solidFill>
-            </a:endParaRPr>
-          </a:p>
-          <a:p>
-            <a:pPr lvl="0" algn="ctr" defTabSz="514344">
-              <a:tabLst>
-                <a:tab pos="1611791" algn="ctr"/>
-                <a:tab pos="3223581" algn="r"/>
-              </a:tabLst>
-              <a:defRPr/>
-            </a:pPr>
-            <a:r>
-              <a:rPr lang="en-NZ" altLang="en-US" sz="400">
-                <a:solidFill>
-                  <a:srgbClr val="6F6F6F"/>
-                </a:solidFill>
-                <a:ea typeface="Calibri" panose="020F0502020204030204" pitchFamily="34" charset="0"/>
-                <a:cs typeface="Arial" panose="020B0604020202020204" pitchFamily="34" charset="0"/>
-              </a:rPr>
-              <a:t>These candidates are being represented by Infinitas Talent Limited.</a:t>
-            </a:r>
-            <a:endParaRPr lang="en-NZ" altLang="en-US" sz="400">
-              <a:solidFill>
-                <a:prstClr val="black"/>
-              </a:solidFill>
-            </a:endParaRPr>
-          </a:p>
-          <a:p>
-            <a:pPr lvl="0" algn="ctr" defTabSz="514344">
-              <a:tabLst>
-                <a:tab pos="1611791" algn="ctr"/>
-                <a:tab pos="3223581" algn="r"/>
-              </a:tabLst>
-              <a:defRPr/>
-            </a:pPr>
-            <a:r>
-              <a:rPr lang="en-NZ" altLang="en-US" sz="400">
-                <a:solidFill>
-                  <a:srgbClr val="6F6F6F"/>
-                </a:solidFill>
-                <a:ea typeface="Calibri" panose="020F0502020204030204" pitchFamily="34" charset="0"/>
-                <a:cs typeface="Arial" panose="020B0604020202020204" pitchFamily="34" charset="0"/>
-              </a:rPr>
-              <a:t>Our standard terms of business will apply. This document is private and confidential.</a:t>
-            </a:r>
-            <a:endParaRPr lang="en-NZ" altLang="en-US" sz="400">
-              <a:solidFill>
-                <a:prstClr val="black"/>
-              </a:solidFill>
-            </a:endParaRPr>
-          </a:p>
-        </p:txBody>
-      </p:sp>
-      <p:pic>
-        <p:nvPicPr>
-          <p:cNvPr id="13" name="Picture 12">
-            <a:extLst>
-              <a:ext uri="{FF2B5EF4-FFF2-40B4-BE49-F238E27FC236}">
-                <a16:creationId xmlns:a16="http://schemas.microsoft.com/office/drawing/2014/main" id="{3E0157FB-941A-D424-810B-D28DF698B786}"/>
-              </a:ext>
-            </a:extLst>
-          </p:cNvPr>
-          <p:cNvPicPr>
-            <a:picLocks noGrp="1" noRot="1" noChangeAspect="1" noMove="1" noResize="1" noEditPoints="1" noAdjustHandles="1" noChangeArrowheads="1" noChangeShapeType="1" noCrop="1"/>
-          </p:cNvPicPr>
-          <p:nvPr/>
-        </p:nvPicPr>
-        <p:blipFill>
-          <a:blip r:embed="rId2"/>
-          <a:srcRect l="9396" r="15974"/>
-          <a:stretch>
-            <a:fillRect/>
-          </a:stretch>
-        </p:blipFill>
-        <p:spPr>
-          <a:xfrm>
-            <a:off x="503915" y="566496"/>
-            <a:ext cx="1799033" cy="1807927"/>
-          </a:xfrm>
-          <a:prstGeom prst="roundRect">
-            <a:avLst>
-              <a:gd name="adj" fmla="val 8619"/>
-            </a:avLst>
-          </a:prstGeom>
-          <a:ln>
-            <a:solidFill>
-              <a:schemeClr val="bg1"/>
-            </a:solidFill>
-          </a:ln>
-        </p:spPr>
-      </p:pic>
     </p:spTree>
     <p:extLst>
       <p:ext uri="{BB962C8B-B14F-4D97-AF65-F5344CB8AC3E}">
-        <p14:creationId xmlns:p14="http://schemas.microsoft.com/office/powerpoint/2010/main" val="3415302531"/>
-      </p:ext>
-    </p:extLst>
-  </p:cSld>
-  <p:clrMapOvr>
-    <a:masterClrMapping/>
-  </p:clrMapOvr>
-</p:sld>
-</file>
-
-<file path=ppt/slides/slide3.xml><?xml version="1.0" encoding="utf-8"?>
-<p:sld xmlns:a="http://schemas.openxmlformats.org/drawingml/2006/main" xmlns:r="http://schemas.openxmlformats.org/officeDocument/2006/relationships" xmlns:p="http://schemas.openxmlformats.org/presentationml/2006/main">
-  <p:cSld>
-    <p:spTree>
-      <p:nvGrpSpPr>
-        <p:cNvPr id="1" name="">
-          <a:extLst>
-            <a:ext uri="{FF2B5EF4-FFF2-40B4-BE49-F238E27FC236}">
-              <a16:creationId xmlns:a16="http://schemas.microsoft.com/office/drawing/2014/main" id="{BD907709-0496-95AA-F78F-AA1863BBA3CA}"/>
-            </a:ext>
-          </a:extLst>
-        </p:cNvPr>
-        <p:cNvGrpSpPr/>
-        <p:nvPr/>
-      </p:nvGrpSpPr>
-      <p:grpSpPr>
-        <a:xfrm>
-          <a:off x="0" y="0"/>
-          <a:ext cx="0" cy="0"/>
-          <a:chOff x="0" y="0"/>
-          <a:chExt cx="0" cy="0"/>
-        </a:xfrm>
-      </p:grpSpPr>
-      <p:sp>
-        <p:nvSpPr>
-          <p:cNvPr id="4" name="Rectangle: Rounded Corners 3">
-            <a:extLst>
-              <a:ext uri="{FF2B5EF4-FFF2-40B4-BE49-F238E27FC236}">
-                <a16:creationId xmlns:a16="http://schemas.microsoft.com/office/drawing/2014/main" id="{47B42E29-C1BE-6CE8-78C5-176104241214}"/>
-              </a:ext>
-            </a:extLst>
-          </p:cNvPr>
-          <p:cNvSpPr>
-            <a:spLocks/>
-          </p:cNvSpPr>
-          <p:nvPr/>
-        </p:nvSpPr>
-        <p:spPr>
-          <a:xfrm>
-            <a:off x="138677" y="85725"/>
-            <a:ext cx="6580646" cy="5061686"/>
-          </a:xfrm>
-          <a:prstGeom prst="roundRect">
-            <a:avLst>
-              <a:gd name="adj" fmla="val 0"/>
-            </a:avLst>
-          </a:prstGeom>
-          <a:solidFill>
-            <a:srgbClr val="004899"/>
-          </a:solidFill>
-          <a:ln>
-            <a:noFill/>
-          </a:ln>
-          <a:effectLst>
-            <a:softEdge rad="0"/>
-          </a:effectLst>
-        </p:spPr>
-        <p:style>
-          <a:lnRef idx="2">
-            <a:schemeClr val="accent1">
-              <a:shade val="15000"/>
-            </a:schemeClr>
-          </a:lnRef>
-          <a:fillRef idx="1">
-            <a:schemeClr val="accent1"/>
-          </a:fillRef>
-          <a:effectRef idx="0">
-            <a:schemeClr val="accent1"/>
-          </a:effectRef>
-          <a:fontRef idx="minor">
-            <a:schemeClr val="lt1"/>
-          </a:fontRef>
-        </p:style>
-        <p:txBody>
-          <a:bodyPr tIns="14019" numCol="2" rtlCol="0" anchor="t" anchorCtr="0"/>
-          <a:lstStyle/>
-          <a:p>
-            <a:endParaRPr lang="en-NZ" sz="701">
-              <a:latin typeface="Roboto" panose="02000000000000000000" pitchFamily="2" charset="0"/>
-              <a:ea typeface="Roboto" panose="02000000000000000000" pitchFamily="2" charset="0"/>
-              <a:cs typeface="Roboto" panose="02000000000000000000" pitchFamily="2" charset="0"/>
-            </a:endParaRPr>
-          </a:p>
-        </p:txBody>
-      </p:sp>
-      <p:sp>
-        <p:nvSpPr>
-          <p:cNvPr id="7" name="TextBox 6">
-            <a:extLst>
-              <a:ext uri="{FF2B5EF4-FFF2-40B4-BE49-F238E27FC236}">
-                <a16:creationId xmlns:a16="http://schemas.microsoft.com/office/drawing/2014/main" id="{89ADC07B-AC4B-7112-65C9-4AB568C4CDC7}"/>
-              </a:ext>
-            </a:extLst>
-          </p:cNvPr>
-          <p:cNvSpPr txBox="1">
-            <a:spLocks noGrp="1" noRot="1" noMove="1" noResize="1" noEditPoints="1" noAdjustHandles="1" noChangeArrowheads="1" noChangeShapeType="1"/>
-          </p:cNvSpPr>
-          <p:nvPr/>
-        </p:nvSpPr>
-        <p:spPr>
-          <a:xfrm>
-            <a:off x="376929" y="136682"/>
-            <a:ext cx="2053005" cy="369332"/>
-          </a:xfrm>
-          <a:prstGeom prst="rect">
-            <a:avLst/>
-          </a:prstGeom>
-          <a:noFill/>
-        </p:spPr>
-        <p:txBody>
-          <a:bodyPr wrap="square" rtlCol="0">
-            <a:spAutoFit/>
-          </a:bodyPr>
-          <a:lstStyle/>
-          <a:p>
-            <a:pPr algn="ctr"/>
-            <a:r>
-              <a:rPr lang="en-NZ" b="1">
-                <a:solidFill>
-                  <a:schemeClr val="bg1"/>
-                </a:solidFill>
-                <a:ea typeface="Roboto" panose="02000000000000000000" pitchFamily="2" charset="0"/>
-                <a:cs typeface="Roboto" panose="02000000000000000000" pitchFamily="2" charset="0"/>
-              </a:rPr>
-              <a:t>Alex Dallas</a:t>
-            </a:r>
-          </a:p>
-        </p:txBody>
-      </p:sp>
-      <p:graphicFrame>
-        <p:nvGraphicFramePr>
-          <p:cNvPr id="8" name="Table 7">
-            <a:extLst>
-              <a:ext uri="{FF2B5EF4-FFF2-40B4-BE49-F238E27FC236}">
-                <a16:creationId xmlns:a16="http://schemas.microsoft.com/office/drawing/2014/main" id="{CC452A50-238D-F903-2849-A7CC0BB2DBCC}"/>
-              </a:ext>
-            </a:extLst>
-          </p:cNvPr>
-          <p:cNvGraphicFramePr>
-            <a:graphicFrameLocks/>
-          </p:cNvGraphicFramePr>
-          <p:nvPr>
-            <p:extLst>
-              <p:ext uri="{D42A27DB-BD31-4B8C-83A1-F6EECF244321}">
-                <p14:modId xmlns:p14="http://schemas.microsoft.com/office/powerpoint/2010/main" val="2282168386"/>
-              </p:ext>
-            </p:extLst>
-          </p:nvPr>
-        </p:nvGraphicFramePr>
-        <p:xfrm>
-          <a:off x="256830" y="2763240"/>
-          <a:ext cx="6344340" cy="2265682"/>
-        </p:xfrm>
-        <a:graphic>
-          <a:graphicData uri="http://schemas.openxmlformats.org/drawingml/2006/table">
-            <a:tbl>
-              <a:tblPr firstRow="1" bandRow="1">
-                <a:tableStyleId>{8EC20E35-A176-4012-BC5E-935CFFF8708E}</a:tableStyleId>
-              </a:tblPr>
-              <a:tblGrid>
-                <a:gridCol w="1788776">
-                  <a:extLst>
-                    <a:ext uri="{9D8B030D-6E8A-4147-A177-3AD203B41FA5}">
-                      <a16:colId xmlns:a16="http://schemas.microsoft.com/office/drawing/2014/main" val="2119135538"/>
-                    </a:ext>
-                  </a:extLst>
-                </a:gridCol>
-                <a:gridCol w="2044709">
-                  <a:extLst>
-                    <a:ext uri="{9D8B030D-6E8A-4147-A177-3AD203B41FA5}">
-                      <a16:colId xmlns:a16="http://schemas.microsoft.com/office/drawing/2014/main" val="819543413"/>
-                    </a:ext>
-                  </a:extLst>
-                </a:gridCol>
-                <a:gridCol w="836952">
-                  <a:extLst>
-                    <a:ext uri="{9D8B030D-6E8A-4147-A177-3AD203B41FA5}">
-                      <a16:colId xmlns:a16="http://schemas.microsoft.com/office/drawing/2014/main" val="2699358850"/>
-                    </a:ext>
-                  </a:extLst>
-                </a:gridCol>
-                <a:gridCol w="676825">
-                  <a:extLst>
-                    <a:ext uri="{9D8B030D-6E8A-4147-A177-3AD203B41FA5}">
-                      <a16:colId xmlns:a16="http://schemas.microsoft.com/office/drawing/2014/main" val="3271143972"/>
-                    </a:ext>
-                  </a:extLst>
-                </a:gridCol>
-                <a:gridCol w="997078">
-                  <a:extLst>
-                    <a:ext uri="{9D8B030D-6E8A-4147-A177-3AD203B41FA5}">
-                      <a16:colId xmlns:a16="http://schemas.microsoft.com/office/drawing/2014/main" val="3189428181"/>
-                    </a:ext>
-                  </a:extLst>
-                </a:gridCol>
-              </a:tblGrid>
-              <a:tr h="194499">
-                <a:tc>
-                  <a:txBody>
-                    <a:bodyPr/>
-                    <a:lstStyle/>
-                    <a:p>
-                      <a:pPr>
-                        <a:buNone/>
-                      </a:pPr>
-                      <a:r>
-                        <a:rPr lang="en-NZ" sz="700" b="1"/>
-                        <a:t>Company</a:t>
-                      </a:r>
-                    </a:p>
-                  </a:txBody>
-                  <a:tcPr anchor="ctr">
-                    <a:lnL w="12700" cap="flat" cmpd="sng" algn="ctr">
-                      <a:solidFill>
-                        <a:schemeClr val="bg1"/>
-                      </a:solidFill>
-                      <a:prstDash val="solid"/>
-                      <a:round/>
-                      <a:headEnd type="none" w="med" len="med"/>
-                      <a:tailEnd type="none" w="med" len="med"/>
-                    </a:lnL>
-                    <a:lnR w="12700" cap="flat" cmpd="sng" algn="ctr">
-                      <a:solidFill>
-                        <a:schemeClr val="bg1"/>
-                      </a:solidFill>
-                      <a:prstDash val="solid"/>
-                      <a:round/>
-                      <a:headEnd type="none" w="med" len="med"/>
-                      <a:tailEnd type="none" w="med" len="med"/>
-                    </a:lnR>
-                    <a:lnT w="12700" cap="flat" cmpd="sng" algn="ctr">
-                      <a:solidFill>
-                        <a:schemeClr val="bg1"/>
-                      </a:solidFill>
-                      <a:prstDash val="solid"/>
-                      <a:round/>
-                      <a:headEnd type="none" w="med" len="med"/>
-                      <a:tailEnd type="none" w="med" len="med"/>
-                    </a:lnT>
-                    <a:lnB w="12700" cap="flat" cmpd="sng" algn="ctr">
-                      <a:solidFill>
-                        <a:schemeClr val="bg1"/>
-                      </a:solidFill>
-                      <a:prstDash val="solid"/>
-                      <a:round/>
-                      <a:headEnd type="none" w="med" len="med"/>
-                      <a:tailEnd type="none" w="med" len="med"/>
-                    </a:lnB>
-                    <a:lnTlToBr w="12700" cmpd="sng">
-                      <a:noFill/>
-                      <a:prstDash val="solid"/>
-                    </a:lnTlToBr>
-                    <a:lnBlToTr w="12700" cmpd="sng">
-                      <a:noFill/>
-                      <a:prstDash val="solid"/>
-                    </a:lnBlToTr>
-                    <a:solidFill>
-                      <a:srgbClr val="004899"/>
-                    </a:solidFill>
-                  </a:tcPr>
-                </a:tc>
-                <a:tc>
-                  <a:txBody>
-                    <a:bodyPr/>
-                    <a:lstStyle/>
-                    <a:p>
-                      <a:pPr>
-                        <a:buNone/>
-                      </a:pPr>
-                      <a:r>
-                        <a:rPr lang="en-NZ" sz="700"/>
-                        <a:t>Title</a:t>
-                      </a:r>
-                    </a:p>
-                  </a:txBody>
-                  <a:tcPr anchor="ctr">
-                    <a:lnL w="12700" cap="flat" cmpd="sng" algn="ctr">
-                      <a:solidFill>
-                        <a:schemeClr val="bg1"/>
-                      </a:solidFill>
-                      <a:prstDash val="solid"/>
-                      <a:round/>
-                      <a:headEnd type="none" w="med" len="med"/>
-                      <a:tailEnd type="none" w="med" len="med"/>
-                    </a:lnL>
-                    <a:lnR>
-                      <a:noFill/>
-                    </a:lnR>
-                    <a:lnT w="12700" cap="flat" cmpd="sng" algn="ctr">
-                      <a:solidFill>
-                        <a:schemeClr val="bg1"/>
-                      </a:solidFill>
-                      <a:prstDash val="solid"/>
-                      <a:round/>
-                      <a:headEnd type="none" w="med" len="med"/>
-                      <a:tailEnd type="none" w="med" len="med"/>
-                    </a:lnT>
-                    <a:lnB w="12700" cap="flat" cmpd="sng" algn="ctr">
-                      <a:solidFill>
-                        <a:schemeClr val="bg1"/>
-                      </a:solidFill>
-                      <a:prstDash val="solid"/>
-                      <a:round/>
-                      <a:headEnd type="none" w="med" len="med"/>
-                      <a:tailEnd type="none" w="med" len="med"/>
-                    </a:lnB>
-                    <a:lnTlToBr w="12700" cmpd="sng">
-                      <a:noFill/>
-                      <a:prstDash val="solid"/>
-                    </a:lnTlToBr>
-                    <a:lnBlToTr w="12700" cmpd="sng">
-                      <a:noFill/>
-                      <a:prstDash val="solid"/>
-                    </a:lnBlToTr>
-                    <a:solidFill>
-                      <a:srgbClr val="004899"/>
-                    </a:solidFill>
-                  </a:tcPr>
-                </a:tc>
-                <a:tc>
-                  <a:txBody>
-                    <a:bodyPr/>
-                    <a:lstStyle/>
-                    <a:p>
-                      <a:pPr>
-                        <a:buNone/>
-                      </a:pPr>
-                      <a:r>
-                        <a:rPr lang="en-NZ" sz="700"/>
-                        <a:t>Start Date</a:t>
-                      </a:r>
-                    </a:p>
-                  </a:txBody>
-                  <a:tcPr anchor="ctr">
-                    <a:lnL>
-                      <a:noFill/>
-                    </a:lnL>
-                    <a:lnR>
-                      <a:noFill/>
-                    </a:lnR>
-                    <a:lnT w="12700" cap="flat" cmpd="sng" algn="ctr">
-                      <a:solidFill>
-                        <a:schemeClr val="bg1"/>
-                      </a:solidFill>
-                      <a:prstDash val="solid"/>
-                      <a:round/>
-                      <a:headEnd type="none" w="med" len="med"/>
-                      <a:tailEnd type="none" w="med" len="med"/>
-                    </a:lnT>
-                    <a:lnB w="12700" cap="flat" cmpd="sng" algn="ctr">
-                      <a:solidFill>
-                        <a:schemeClr val="bg1"/>
-                      </a:solidFill>
-                      <a:prstDash val="solid"/>
-                      <a:round/>
-                      <a:headEnd type="none" w="med" len="med"/>
-                      <a:tailEnd type="none" w="med" len="med"/>
-                    </a:lnB>
-                    <a:lnTlToBr w="12700" cmpd="sng">
-                      <a:noFill/>
-                      <a:prstDash val="solid"/>
-                    </a:lnTlToBr>
-                    <a:lnBlToTr w="12700" cmpd="sng">
-                      <a:noFill/>
-                      <a:prstDash val="solid"/>
-                    </a:lnBlToTr>
-                    <a:solidFill>
-                      <a:srgbClr val="004899"/>
-                    </a:solidFill>
-                  </a:tcPr>
-                </a:tc>
-                <a:tc>
-                  <a:txBody>
-                    <a:bodyPr/>
-                    <a:lstStyle/>
-                    <a:p>
-                      <a:pPr>
-                        <a:buNone/>
-                      </a:pPr>
-                      <a:r>
-                        <a:rPr lang="en-NZ" sz="700"/>
-                        <a:t>End Date</a:t>
-                      </a:r>
-                    </a:p>
-                  </a:txBody>
-                  <a:tcPr anchor="ctr">
-                    <a:lnL>
-                      <a:noFill/>
-                    </a:lnL>
-                    <a:lnR>
-                      <a:noFill/>
-                    </a:lnR>
-                    <a:lnT w="12700" cap="flat" cmpd="sng" algn="ctr">
-                      <a:solidFill>
-                        <a:schemeClr val="bg1"/>
-                      </a:solidFill>
-                      <a:prstDash val="solid"/>
-                      <a:round/>
-                      <a:headEnd type="none" w="med" len="med"/>
-                      <a:tailEnd type="none" w="med" len="med"/>
-                    </a:lnT>
-                    <a:lnB w="12700" cap="flat" cmpd="sng" algn="ctr">
-                      <a:solidFill>
-                        <a:schemeClr val="bg1"/>
-                      </a:solidFill>
-                      <a:prstDash val="solid"/>
-                      <a:round/>
-                      <a:headEnd type="none" w="med" len="med"/>
-                      <a:tailEnd type="none" w="med" len="med"/>
-                    </a:lnB>
-                    <a:lnTlToBr w="12700" cmpd="sng">
-                      <a:noFill/>
-                      <a:prstDash val="solid"/>
-                    </a:lnTlToBr>
-                    <a:lnBlToTr w="12700" cmpd="sng">
-                      <a:noFill/>
-                      <a:prstDash val="solid"/>
-                    </a:lnBlToTr>
-                    <a:solidFill>
-                      <a:srgbClr val="004899"/>
-                    </a:solidFill>
-                  </a:tcPr>
-                </a:tc>
-                <a:tc>
-                  <a:txBody>
-                    <a:bodyPr/>
-                    <a:lstStyle/>
-                    <a:p>
-                      <a:pPr>
-                        <a:buNone/>
-                      </a:pPr>
-                      <a:r>
-                        <a:rPr lang="en-NZ" sz="700"/>
-                        <a:t>Duration</a:t>
-                      </a:r>
-                    </a:p>
-                  </a:txBody>
-                  <a:tcPr anchor="ctr">
-                    <a:lnL>
-                      <a:noFill/>
-                    </a:lnL>
-                    <a:lnR w="12700" cap="flat" cmpd="sng" algn="ctr">
-                      <a:solidFill>
-                        <a:schemeClr val="bg1"/>
-                      </a:solidFill>
-                      <a:prstDash val="solid"/>
-                      <a:round/>
-                      <a:headEnd type="none" w="med" len="med"/>
-                      <a:tailEnd type="none" w="med" len="med"/>
-                    </a:lnR>
-                    <a:lnT w="12700" cap="flat" cmpd="sng" algn="ctr">
-                      <a:solidFill>
-                        <a:schemeClr val="bg1"/>
-                      </a:solidFill>
-                      <a:prstDash val="solid"/>
-                      <a:round/>
-                      <a:headEnd type="none" w="med" len="med"/>
-                      <a:tailEnd type="none" w="med" len="med"/>
-                    </a:lnT>
-                    <a:lnB w="12700" cap="flat" cmpd="sng" algn="ctr">
-                      <a:solidFill>
-                        <a:schemeClr val="bg1"/>
-                      </a:solidFill>
-                      <a:prstDash val="solid"/>
-                      <a:round/>
-                      <a:headEnd type="none" w="med" len="med"/>
-                      <a:tailEnd type="none" w="med" len="med"/>
-                    </a:lnB>
-                    <a:lnTlToBr w="12700" cmpd="sng">
-                      <a:noFill/>
-                      <a:prstDash val="solid"/>
-                    </a:lnTlToBr>
-                    <a:lnBlToTr w="12700" cmpd="sng">
-                      <a:noFill/>
-                      <a:prstDash val="solid"/>
-                    </a:lnBlToTr>
-                    <a:solidFill>
-                      <a:srgbClr val="004899"/>
-                    </a:solidFill>
-                  </a:tcPr>
-                </a:tc>
-                <a:extLst>
-                  <a:ext uri="{0D108BD9-81ED-4DB2-BD59-A6C34878D82A}">
-                    <a16:rowId xmlns:a16="http://schemas.microsoft.com/office/drawing/2014/main" val="1531709464"/>
-                  </a:ext>
-                </a:extLst>
-              </a:tr>
-              <a:tr h="295366">
-                <a:tc>
-                  <a:txBody>
-                    <a:bodyPr/>
-                    <a:lstStyle/>
-                    <a:p>
-                      <a:pPr>
-                        <a:buNone/>
-                      </a:pPr>
-                      <a:r>
-                        <a:rPr lang="en-NZ" sz="700" b="1"/>
-                        <a:t>Soul Capital</a:t>
-                      </a:r>
-                    </a:p>
-                  </a:txBody>
-                  <a:tcPr anchor="ctr">
-                    <a:lnL w="12700" cap="flat" cmpd="sng" algn="ctr">
-                      <a:solidFill>
-                        <a:schemeClr val="bg1"/>
-                      </a:solidFill>
-                      <a:prstDash val="solid"/>
-                      <a:round/>
-                      <a:headEnd type="none" w="med" len="med"/>
-                      <a:tailEnd type="none" w="med" len="med"/>
-                    </a:lnL>
-                    <a:lnR>
-                      <a:noFill/>
-                    </a:lnR>
-                    <a:lnT w="12700" cap="flat" cmpd="sng" algn="ctr">
-                      <a:solidFill>
-                        <a:schemeClr val="bg1"/>
-                      </a:solidFill>
-                      <a:prstDash val="solid"/>
-                      <a:round/>
-                      <a:headEnd type="none" w="med" len="med"/>
-                      <a:tailEnd type="none" w="med" len="med"/>
-                    </a:lnT>
-                    <a:lnB>
-                      <a:noFill/>
-                    </a:lnB>
-                    <a:lnTlToBr w="12700" cmpd="sng">
-                      <a:noFill/>
-                      <a:prstDash val="solid"/>
-                    </a:lnTlToBr>
-                    <a:lnBlToTr w="12700" cmpd="sng">
-                      <a:noFill/>
-                      <a:prstDash val="solid"/>
-                    </a:lnBlToTr>
-                  </a:tcPr>
-                </a:tc>
-                <a:tc>
-                  <a:txBody>
-                    <a:bodyPr/>
-                    <a:lstStyle/>
-                    <a:p>
-                      <a:pPr>
-                        <a:buNone/>
-                      </a:pPr>
-                      <a:r>
-                        <a:rPr lang="en-NZ" sz="700"/>
-                        <a:t>Investment Principal</a:t>
-                      </a:r>
-                    </a:p>
-                  </a:txBody>
-                  <a:tcPr anchor="ctr">
-                    <a:lnL>
-                      <a:noFill/>
-                    </a:lnL>
-                    <a:lnR>
-                      <a:noFill/>
-                    </a:lnR>
-                    <a:lnT w="12700" cap="flat" cmpd="sng" algn="ctr">
-                      <a:solidFill>
-                        <a:schemeClr val="bg1"/>
-                      </a:solidFill>
-                      <a:prstDash val="solid"/>
-                      <a:round/>
-                      <a:headEnd type="none" w="med" len="med"/>
-                      <a:tailEnd type="none" w="med" len="med"/>
-                    </a:lnT>
-                    <a:lnB>
-                      <a:noFill/>
-                    </a:lnB>
-                    <a:lnTlToBr w="12700" cmpd="sng">
-                      <a:noFill/>
-                      <a:prstDash val="solid"/>
-                    </a:lnTlToBr>
-                    <a:lnBlToTr w="12700" cmpd="sng">
-                      <a:noFill/>
-                      <a:prstDash val="solid"/>
-                    </a:lnBlToTr>
-                  </a:tcPr>
-                </a:tc>
-                <a:tc>
-                  <a:txBody>
-                    <a:bodyPr/>
-                    <a:lstStyle/>
-                    <a:p>
-                      <a:pPr>
-                        <a:buNone/>
-                      </a:pPr>
-                      <a:r>
-                        <a:rPr lang="en-NZ" sz="700"/>
-                        <a:t>Jun 2022</a:t>
-                      </a:r>
-                    </a:p>
-                  </a:txBody>
-                  <a:tcPr anchor="ctr">
-                    <a:lnL>
-                      <a:noFill/>
-                    </a:lnL>
-                    <a:lnR>
-                      <a:noFill/>
-                    </a:lnR>
-                    <a:lnT w="12700" cap="flat" cmpd="sng" algn="ctr">
-                      <a:solidFill>
-                        <a:schemeClr val="bg1"/>
-                      </a:solidFill>
-                      <a:prstDash val="solid"/>
-                      <a:round/>
-                      <a:headEnd type="none" w="med" len="med"/>
-                      <a:tailEnd type="none" w="med" len="med"/>
-                    </a:lnT>
-                    <a:lnB>
-                      <a:noFill/>
-                    </a:lnB>
-                    <a:lnTlToBr w="12700" cmpd="sng">
-                      <a:noFill/>
-                      <a:prstDash val="solid"/>
-                    </a:lnTlToBr>
-                    <a:lnBlToTr w="12700" cmpd="sng">
-                      <a:noFill/>
-                      <a:prstDash val="solid"/>
-                    </a:lnBlToTr>
-                  </a:tcPr>
-                </a:tc>
-                <a:tc>
-                  <a:txBody>
-                    <a:bodyPr/>
-                    <a:lstStyle/>
-                    <a:p>
-                      <a:pPr>
-                        <a:buNone/>
-                      </a:pPr>
-                      <a:r>
-                        <a:rPr lang="en-NZ" sz="700"/>
-                        <a:t>Present</a:t>
-                      </a:r>
-                    </a:p>
-                  </a:txBody>
-                  <a:tcPr anchor="ctr">
-                    <a:lnL>
-                      <a:noFill/>
-                    </a:lnL>
-                    <a:lnR>
-                      <a:noFill/>
-                    </a:lnR>
-                    <a:lnT w="12700" cap="flat" cmpd="sng" algn="ctr">
-                      <a:solidFill>
-                        <a:schemeClr val="bg1"/>
-                      </a:solidFill>
-                      <a:prstDash val="solid"/>
-                      <a:round/>
-                      <a:headEnd type="none" w="med" len="med"/>
-                      <a:tailEnd type="none" w="med" len="med"/>
-                    </a:lnT>
-                    <a:lnB>
-                      <a:noFill/>
-                    </a:lnB>
-                    <a:lnTlToBr w="12700" cmpd="sng">
-                      <a:noFill/>
-                      <a:prstDash val="solid"/>
-                    </a:lnTlToBr>
-                    <a:lnBlToTr w="12700" cmpd="sng">
-                      <a:noFill/>
-                      <a:prstDash val="solid"/>
-                    </a:lnBlToTr>
-                  </a:tcPr>
-                </a:tc>
-                <a:tc>
-                  <a:txBody>
-                    <a:bodyPr/>
-                    <a:lstStyle/>
-                    <a:p>
-                      <a:pPr>
-                        <a:buNone/>
-                      </a:pPr>
-                      <a:r>
-                        <a:rPr lang="en-NZ" sz="700"/>
-                        <a:t>3 years, 5 months</a:t>
-                      </a:r>
-                    </a:p>
-                  </a:txBody>
-                  <a:tcPr anchor="ctr">
-                    <a:lnL>
-                      <a:noFill/>
-                    </a:lnL>
-                    <a:lnR w="12700" cap="flat" cmpd="sng" algn="ctr">
-                      <a:solidFill>
-                        <a:schemeClr val="bg1"/>
-                      </a:solidFill>
-                      <a:prstDash val="solid"/>
-                      <a:round/>
-                      <a:headEnd type="none" w="med" len="med"/>
-                      <a:tailEnd type="none" w="med" len="med"/>
-                    </a:lnR>
-                    <a:lnT w="12700" cap="flat" cmpd="sng" algn="ctr">
-                      <a:solidFill>
-                        <a:schemeClr val="bg1"/>
-                      </a:solidFill>
-                      <a:prstDash val="solid"/>
-                      <a:round/>
-                      <a:headEnd type="none" w="med" len="med"/>
-                      <a:tailEnd type="none" w="med" len="med"/>
-                    </a:lnT>
-                    <a:lnB>
-                      <a:noFill/>
-                    </a:lnB>
-                    <a:lnTlToBr w="12700" cmpd="sng">
-                      <a:noFill/>
-                      <a:prstDash val="solid"/>
-                    </a:lnTlToBr>
-                    <a:lnBlToTr w="12700" cmpd="sng">
-                      <a:noFill/>
-                      <a:prstDash val="solid"/>
-                    </a:lnBlToTr>
-                  </a:tcPr>
-                </a:tc>
-                <a:extLst>
-                  <a:ext uri="{0D108BD9-81ED-4DB2-BD59-A6C34878D82A}">
-                    <a16:rowId xmlns:a16="http://schemas.microsoft.com/office/drawing/2014/main" val="1388529160"/>
-                  </a:ext>
-                </a:extLst>
-              </a:tr>
-              <a:tr h="295366">
-                <a:tc>
-                  <a:txBody>
-                    <a:bodyPr/>
-                    <a:lstStyle/>
-                    <a:p>
-                      <a:pPr>
-                        <a:buNone/>
-                      </a:pPr>
-                      <a:r>
-                        <a:rPr lang="en-NZ" sz="700" b="1"/>
-                        <a:t>Powerglide</a:t>
-                      </a:r>
-                    </a:p>
-                  </a:txBody>
-                  <a:tcPr anchor="ctr">
-                    <a:lnL w="12700" cap="flat" cmpd="sng" algn="ctr">
-                      <a:solidFill>
-                        <a:schemeClr val="bg1"/>
-                      </a:solidFill>
-                      <a:prstDash val="solid"/>
-                      <a:round/>
-                      <a:headEnd type="none" w="med" len="med"/>
-                      <a:tailEnd type="none" w="med" len="med"/>
-                    </a:lnL>
-                    <a:lnR>
-                      <a:noFill/>
-                    </a:lnR>
-                    <a:lnT>
-                      <a:noFill/>
-                    </a:lnT>
-                    <a:lnB>
-                      <a:noFill/>
-                    </a:lnB>
-                    <a:lnTlToBr w="12700" cmpd="sng">
-                      <a:noFill/>
-                      <a:prstDash val="solid"/>
-                    </a:lnTlToBr>
-                    <a:lnBlToTr w="12700" cmpd="sng">
-                      <a:noFill/>
-                      <a:prstDash val="solid"/>
-                    </a:lnBlToTr>
-                  </a:tcPr>
-                </a:tc>
-                <a:tc>
-                  <a:txBody>
-                    <a:bodyPr/>
-                    <a:lstStyle/>
-                    <a:p>
-                      <a:pPr>
-                        <a:buNone/>
-                      </a:pPr>
-                      <a:r>
-                        <a:rPr lang="en-NZ" sz="700"/>
-                        <a:t>Corporate Finance Advisor / Director</a:t>
-                      </a:r>
-                    </a:p>
-                  </a:txBody>
-                  <a:tcPr anchor="ctr">
-                    <a:lnL>
-                      <a:noFill/>
-                    </a:lnL>
-                    <a:lnR>
-                      <a:noFill/>
-                    </a:lnR>
-                    <a:lnT>
-                      <a:noFill/>
-                    </a:lnT>
-                    <a:lnB>
-                      <a:noFill/>
-                    </a:lnB>
-                    <a:lnTlToBr w="12700" cmpd="sng">
-                      <a:noFill/>
-                      <a:prstDash val="solid"/>
-                    </a:lnTlToBr>
-                    <a:lnBlToTr w="12700" cmpd="sng">
-                      <a:noFill/>
-                      <a:prstDash val="solid"/>
-                    </a:lnBlToTr>
-                  </a:tcPr>
-                </a:tc>
-                <a:tc>
-                  <a:txBody>
-                    <a:bodyPr/>
-                    <a:lstStyle/>
-                    <a:p>
-                      <a:pPr>
-                        <a:buNone/>
-                      </a:pPr>
-                      <a:r>
-                        <a:rPr lang="en-NZ" sz="700"/>
-                        <a:t>Mar 2021</a:t>
-                      </a:r>
-                    </a:p>
-                  </a:txBody>
-                  <a:tcPr anchor="ctr">
-                    <a:lnL>
-                      <a:noFill/>
-                    </a:lnL>
-                    <a:lnR>
-                      <a:noFill/>
-                    </a:lnR>
-                    <a:lnT>
-                      <a:noFill/>
-                    </a:lnT>
-                    <a:lnB>
-                      <a:noFill/>
-                    </a:lnB>
-                    <a:lnTlToBr w="12700" cmpd="sng">
-                      <a:noFill/>
-                      <a:prstDash val="solid"/>
-                    </a:lnTlToBr>
-                    <a:lnBlToTr w="12700" cmpd="sng">
-                      <a:noFill/>
-                      <a:prstDash val="solid"/>
-                    </a:lnBlToTr>
-                  </a:tcPr>
-                </a:tc>
-                <a:tc>
-                  <a:txBody>
-                    <a:bodyPr/>
-                    <a:lstStyle/>
-                    <a:p>
-                      <a:pPr>
-                        <a:buNone/>
-                      </a:pPr>
-                      <a:r>
-                        <a:rPr lang="en-NZ" sz="700"/>
-                        <a:t>Present</a:t>
-                      </a:r>
-                    </a:p>
-                  </a:txBody>
-                  <a:tcPr anchor="ctr">
-                    <a:lnL>
-                      <a:noFill/>
-                    </a:lnL>
-                    <a:lnR>
-                      <a:noFill/>
-                    </a:lnR>
-                    <a:lnT>
-                      <a:noFill/>
-                    </a:lnT>
-                    <a:lnB>
-                      <a:noFill/>
-                    </a:lnB>
-                    <a:lnTlToBr w="12700" cmpd="sng">
-                      <a:noFill/>
-                      <a:prstDash val="solid"/>
-                    </a:lnTlToBr>
-                    <a:lnBlToTr w="12700" cmpd="sng">
-                      <a:noFill/>
-                      <a:prstDash val="solid"/>
-                    </a:lnBlToTr>
-                  </a:tcPr>
-                </a:tc>
-                <a:tc>
-                  <a:txBody>
-                    <a:bodyPr/>
-                    <a:lstStyle/>
-                    <a:p>
-                      <a:pPr>
-                        <a:buNone/>
-                      </a:pPr>
-                      <a:r>
-                        <a:rPr lang="en-NZ" sz="700"/>
-                        <a:t>4 years, 8 months</a:t>
-                      </a:r>
-                    </a:p>
-                  </a:txBody>
-                  <a:tcPr anchor="ctr">
-                    <a:lnL>
-                      <a:noFill/>
-                    </a:lnL>
-                    <a:lnR w="12700" cap="flat" cmpd="sng" algn="ctr">
-                      <a:solidFill>
-                        <a:schemeClr val="bg1"/>
-                      </a:solidFill>
-                      <a:prstDash val="solid"/>
-                      <a:round/>
-                      <a:headEnd type="none" w="med" len="med"/>
-                      <a:tailEnd type="none" w="med" len="med"/>
-                    </a:lnR>
-                    <a:lnT>
-                      <a:noFill/>
-                    </a:lnT>
-                    <a:lnB>
-                      <a:noFill/>
-                    </a:lnB>
-                    <a:lnTlToBr w="12700" cmpd="sng">
-                      <a:noFill/>
-                      <a:prstDash val="solid"/>
-                    </a:lnTlToBr>
-                    <a:lnBlToTr w="12700" cmpd="sng">
-                      <a:noFill/>
-                      <a:prstDash val="solid"/>
-                    </a:lnBlToTr>
-                  </a:tcPr>
-                </a:tc>
-                <a:extLst>
-                  <a:ext uri="{0D108BD9-81ED-4DB2-BD59-A6C34878D82A}">
-                    <a16:rowId xmlns:a16="http://schemas.microsoft.com/office/drawing/2014/main" val="837386597"/>
-                  </a:ext>
-                </a:extLst>
-              </a:tr>
-              <a:tr h="295366">
-                <a:tc>
-                  <a:txBody>
-                    <a:bodyPr/>
-                    <a:lstStyle/>
-                    <a:p>
-                      <a:pPr>
-                        <a:buNone/>
-                      </a:pPr>
-                      <a:r>
-                        <a:rPr lang="en-NZ" sz="700" b="1"/>
-                        <a:t>Purpose Capital</a:t>
-                      </a:r>
-                    </a:p>
-                  </a:txBody>
-                  <a:tcPr anchor="ctr">
-                    <a:lnL w="12700" cap="flat" cmpd="sng" algn="ctr">
-                      <a:solidFill>
-                        <a:schemeClr val="bg1"/>
-                      </a:solidFill>
-                      <a:prstDash val="solid"/>
-                      <a:round/>
-                      <a:headEnd type="none" w="med" len="med"/>
-                      <a:tailEnd type="none" w="med" len="med"/>
-                    </a:lnL>
-                    <a:lnR>
-                      <a:noFill/>
-                    </a:lnR>
-                    <a:lnT>
-                      <a:noFill/>
-                    </a:lnT>
-                    <a:lnB>
-                      <a:noFill/>
-                    </a:lnB>
-                    <a:lnTlToBr w="12700" cmpd="sng">
-                      <a:noFill/>
-                      <a:prstDash val="solid"/>
-                    </a:lnTlToBr>
-                    <a:lnBlToTr w="12700" cmpd="sng">
-                      <a:noFill/>
-                      <a:prstDash val="solid"/>
-                    </a:lnBlToTr>
-                  </a:tcPr>
-                </a:tc>
-                <a:tc>
-                  <a:txBody>
-                    <a:bodyPr/>
-                    <a:lstStyle/>
-                    <a:p>
-                      <a:pPr>
-                        <a:buNone/>
-                      </a:pPr>
-                      <a:r>
-                        <a:rPr lang="en-NZ" sz="700"/>
-                        <a:t>Investment Manager</a:t>
-                      </a:r>
-                    </a:p>
-                  </a:txBody>
-                  <a:tcPr anchor="ctr">
-                    <a:lnL>
-                      <a:noFill/>
-                    </a:lnL>
-                    <a:lnR>
-                      <a:noFill/>
-                    </a:lnR>
-                    <a:lnT>
-                      <a:noFill/>
-                    </a:lnT>
-                    <a:lnB>
-                      <a:noFill/>
-                    </a:lnB>
-                    <a:lnTlToBr w="12700" cmpd="sng">
-                      <a:noFill/>
-                      <a:prstDash val="solid"/>
-                    </a:lnTlToBr>
-                    <a:lnBlToTr w="12700" cmpd="sng">
-                      <a:noFill/>
-                      <a:prstDash val="solid"/>
-                    </a:lnBlToTr>
-                  </a:tcPr>
-                </a:tc>
-                <a:tc>
-                  <a:txBody>
-                    <a:bodyPr/>
-                    <a:lstStyle/>
-                    <a:p>
-                      <a:pPr>
-                        <a:buNone/>
-                      </a:pPr>
-                      <a:r>
-                        <a:rPr lang="en-NZ" sz="700"/>
-                        <a:t>Mar 2020</a:t>
-                      </a:r>
-                    </a:p>
-                  </a:txBody>
-                  <a:tcPr anchor="ctr">
-                    <a:lnL>
-                      <a:noFill/>
-                    </a:lnL>
-                    <a:lnR>
-                      <a:noFill/>
-                    </a:lnR>
-                    <a:lnT>
-                      <a:noFill/>
-                    </a:lnT>
-                    <a:lnB>
-                      <a:noFill/>
-                    </a:lnB>
-                    <a:lnTlToBr w="12700" cmpd="sng">
-                      <a:noFill/>
-                      <a:prstDash val="solid"/>
-                    </a:lnTlToBr>
-                    <a:lnBlToTr w="12700" cmpd="sng">
-                      <a:noFill/>
-                      <a:prstDash val="solid"/>
-                    </a:lnBlToTr>
-                  </a:tcPr>
-                </a:tc>
-                <a:tc>
-                  <a:txBody>
-                    <a:bodyPr/>
-                    <a:lstStyle/>
-                    <a:p>
-                      <a:pPr>
-                        <a:buNone/>
-                      </a:pPr>
-                      <a:r>
-                        <a:rPr lang="en-NZ" sz="700"/>
-                        <a:t>Mar 2021</a:t>
-                      </a:r>
-                    </a:p>
-                  </a:txBody>
-                  <a:tcPr anchor="ctr">
-                    <a:lnL>
-                      <a:noFill/>
-                    </a:lnL>
-                    <a:lnR>
-                      <a:noFill/>
-                    </a:lnR>
-                    <a:lnT>
-                      <a:noFill/>
-                    </a:lnT>
-                    <a:lnB>
-                      <a:noFill/>
-                    </a:lnB>
-                    <a:lnTlToBr w="12700" cmpd="sng">
-                      <a:noFill/>
-                      <a:prstDash val="solid"/>
-                    </a:lnTlToBr>
-                    <a:lnBlToTr w="12700" cmpd="sng">
-                      <a:noFill/>
-                      <a:prstDash val="solid"/>
-                    </a:lnBlToTr>
-                  </a:tcPr>
-                </a:tc>
-                <a:tc>
-                  <a:txBody>
-                    <a:bodyPr/>
-                    <a:lstStyle/>
-                    <a:p>
-                      <a:pPr>
-                        <a:buNone/>
-                      </a:pPr>
-                      <a:r>
-                        <a:rPr lang="en-NZ" sz="700"/>
-                        <a:t>1 year</a:t>
-                      </a:r>
-                    </a:p>
-                  </a:txBody>
-                  <a:tcPr anchor="ctr">
-                    <a:lnL>
-                      <a:noFill/>
-                    </a:lnL>
-                    <a:lnR w="12700" cap="flat" cmpd="sng" algn="ctr">
-                      <a:solidFill>
-                        <a:schemeClr val="bg1"/>
-                      </a:solidFill>
-                      <a:prstDash val="solid"/>
-                      <a:round/>
-                      <a:headEnd type="none" w="med" len="med"/>
-                      <a:tailEnd type="none" w="med" len="med"/>
-                    </a:lnR>
-                    <a:lnT>
-                      <a:noFill/>
-                    </a:lnT>
-                    <a:lnB>
-                      <a:noFill/>
-                    </a:lnB>
-                    <a:lnTlToBr w="12700" cmpd="sng">
-                      <a:noFill/>
-                      <a:prstDash val="solid"/>
-                    </a:lnTlToBr>
-                    <a:lnBlToTr w="12700" cmpd="sng">
-                      <a:noFill/>
-                      <a:prstDash val="solid"/>
-                    </a:lnBlToTr>
-                  </a:tcPr>
-                </a:tc>
-                <a:extLst>
-                  <a:ext uri="{0D108BD9-81ED-4DB2-BD59-A6C34878D82A}">
-                    <a16:rowId xmlns:a16="http://schemas.microsoft.com/office/drawing/2014/main" val="2649441180"/>
-                  </a:ext>
-                </a:extLst>
-              </a:tr>
-              <a:tr h="295366">
-                <a:tc>
-                  <a:txBody>
-                    <a:bodyPr/>
-                    <a:lstStyle/>
-                    <a:p>
-                      <a:pPr>
-                        <a:buNone/>
-                      </a:pPr>
-                      <a:r>
-                        <a:rPr lang="en-NZ" sz="700" b="1"/>
-                        <a:t>Inverse</a:t>
-                      </a:r>
-                    </a:p>
-                  </a:txBody>
-                  <a:tcPr anchor="ctr">
-                    <a:lnL w="12700" cap="flat" cmpd="sng" algn="ctr">
-                      <a:solidFill>
-                        <a:schemeClr val="bg1"/>
-                      </a:solidFill>
-                      <a:prstDash val="solid"/>
-                      <a:round/>
-                      <a:headEnd type="none" w="med" len="med"/>
-                      <a:tailEnd type="none" w="med" len="med"/>
-                    </a:lnL>
-                    <a:lnR>
-                      <a:noFill/>
-                    </a:lnR>
-                    <a:lnT>
-                      <a:noFill/>
-                    </a:lnT>
-                    <a:lnB>
-                      <a:noFill/>
-                    </a:lnB>
-                    <a:lnTlToBr w="12700" cmpd="sng">
-                      <a:noFill/>
-                      <a:prstDash val="solid"/>
-                    </a:lnTlToBr>
-                    <a:lnBlToTr w="12700" cmpd="sng">
-                      <a:noFill/>
-                      <a:prstDash val="solid"/>
-                    </a:lnBlToTr>
-                  </a:tcPr>
-                </a:tc>
-                <a:tc>
-                  <a:txBody>
-                    <a:bodyPr/>
-                    <a:lstStyle/>
-                    <a:p>
-                      <a:pPr>
-                        <a:buNone/>
-                      </a:pPr>
-                      <a:r>
-                        <a:rPr lang="en-NZ" sz="700"/>
-                        <a:t>Chief Financial Officer</a:t>
-                      </a:r>
-                    </a:p>
-                  </a:txBody>
-                  <a:tcPr anchor="ctr">
-                    <a:lnL>
-                      <a:noFill/>
-                    </a:lnL>
-                    <a:lnR>
-                      <a:noFill/>
-                    </a:lnR>
-                    <a:lnT>
-                      <a:noFill/>
-                    </a:lnT>
-                    <a:lnB>
-                      <a:noFill/>
-                    </a:lnB>
-                    <a:lnTlToBr w="12700" cmpd="sng">
-                      <a:noFill/>
-                      <a:prstDash val="solid"/>
-                    </a:lnTlToBr>
-                    <a:lnBlToTr w="12700" cmpd="sng">
-                      <a:noFill/>
-                      <a:prstDash val="solid"/>
-                    </a:lnBlToTr>
-                  </a:tcPr>
-                </a:tc>
-                <a:tc>
-                  <a:txBody>
-                    <a:bodyPr/>
-                    <a:lstStyle/>
-                    <a:p>
-                      <a:pPr>
-                        <a:buNone/>
-                      </a:pPr>
-                      <a:r>
-                        <a:rPr lang="en-NZ" sz="700"/>
-                        <a:t>Mar 2017</a:t>
-                      </a:r>
-                    </a:p>
-                  </a:txBody>
-                  <a:tcPr anchor="ctr">
-                    <a:lnL>
-                      <a:noFill/>
-                    </a:lnL>
-                    <a:lnR>
-                      <a:noFill/>
-                    </a:lnR>
-                    <a:lnT>
-                      <a:noFill/>
-                    </a:lnT>
-                    <a:lnB>
-                      <a:noFill/>
-                    </a:lnB>
-                    <a:lnTlToBr w="12700" cmpd="sng">
-                      <a:noFill/>
-                      <a:prstDash val="solid"/>
-                    </a:lnTlToBr>
-                    <a:lnBlToTr w="12700" cmpd="sng">
-                      <a:noFill/>
-                      <a:prstDash val="solid"/>
-                    </a:lnBlToTr>
-                  </a:tcPr>
-                </a:tc>
-                <a:tc>
-                  <a:txBody>
-                    <a:bodyPr/>
-                    <a:lstStyle/>
-                    <a:p>
-                      <a:pPr>
-                        <a:buNone/>
-                      </a:pPr>
-                      <a:r>
-                        <a:rPr lang="en-NZ" sz="700"/>
-                        <a:t>Nov 2022</a:t>
-                      </a:r>
-                    </a:p>
-                  </a:txBody>
-                  <a:tcPr anchor="ctr">
-                    <a:lnL>
-                      <a:noFill/>
-                    </a:lnL>
-                    <a:lnR>
-                      <a:noFill/>
-                    </a:lnR>
-                    <a:lnT>
-                      <a:noFill/>
-                    </a:lnT>
-                    <a:lnB>
-                      <a:noFill/>
-                    </a:lnB>
-                    <a:lnTlToBr w="12700" cmpd="sng">
-                      <a:noFill/>
-                      <a:prstDash val="solid"/>
-                    </a:lnTlToBr>
-                    <a:lnBlToTr w="12700" cmpd="sng">
-                      <a:noFill/>
-                      <a:prstDash val="solid"/>
-                    </a:lnBlToTr>
-                  </a:tcPr>
-                </a:tc>
-                <a:tc>
-                  <a:txBody>
-                    <a:bodyPr/>
-                    <a:lstStyle/>
-                    <a:p>
-                      <a:pPr>
-                        <a:buNone/>
-                      </a:pPr>
-                      <a:r>
-                        <a:rPr lang="en-NZ" sz="700"/>
-                        <a:t>5 years, 9 months</a:t>
-                      </a:r>
-                    </a:p>
-                  </a:txBody>
-                  <a:tcPr anchor="ctr">
-                    <a:lnL>
-                      <a:noFill/>
-                    </a:lnL>
-                    <a:lnR w="12700" cap="flat" cmpd="sng" algn="ctr">
-                      <a:solidFill>
-                        <a:schemeClr val="bg1"/>
-                      </a:solidFill>
-                      <a:prstDash val="solid"/>
-                      <a:round/>
-                      <a:headEnd type="none" w="med" len="med"/>
-                      <a:tailEnd type="none" w="med" len="med"/>
-                    </a:lnR>
-                    <a:lnT>
-                      <a:noFill/>
-                    </a:lnT>
-                    <a:lnB>
-                      <a:noFill/>
-                    </a:lnB>
-                    <a:lnTlToBr w="12700" cmpd="sng">
-                      <a:noFill/>
-                      <a:prstDash val="solid"/>
-                    </a:lnTlToBr>
-                    <a:lnBlToTr w="12700" cmpd="sng">
-                      <a:noFill/>
-                      <a:prstDash val="solid"/>
-                    </a:lnBlToTr>
-                  </a:tcPr>
-                </a:tc>
-                <a:extLst>
-                  <a:ext uri="{0D108BD9-81ED-4DB2-BD59-A6C34878D82A}">
-                    <a16:rowId xmlns:a16="http://schemas.microsoft.com/office/drawing/2014/main" val="2980113677"/>
-                  </a:ext>
-                </a:extLst>
-              </a:tr>
-              <a:tr h="295366">
-                <a:tc>
-                  <a:txBody>
-                    <a:bodyPr/>
-                    <a:lstStyle/>
-                    <a:p>
-                      <a:pPr>
-                        <a:buNone/>
-                      </a:pPr>
-                      <a:r>
-                        <a:rPr lang="en-NZ" sz="700" b="1"/>
-                        <a:t>Western Power (Australia)</a:t>
-                      </a:r>
-                    </a:p>
-                  </a:txBody>
-                  <a:tcPr anchor="ctr">
-                    <a:lnL w="12700" cap="flat" cmpd="sng" algn="ctr">
-                      <a:solidFill>
-                        <a:schemeClr val="bg1"/>
-                      </a:solidFill>
-                      <a:prstDash val="solid"/>
-                      <a:round/>
-                      <a:headEnd type="none" w="med" len="med"/>
-                      <a:tailEnd type="none" w="med" len="med"/>
-                    </a:lnL>
-                    <a:lnR>
-                      <a:noFill/>
-                    </a:lnR>
-                    <a:lnT>
-                      <a:noFill/>
-                    </a:lnT>
-                    <a:lnB>
-                      <a:noFill/>
-                    </a:lnB>
-                    <a:lnTlToBr w="12700" cmpd="sng">
-                      <a:noFill/>
-                      <a:prstDash val="solid"/>
-                    </a:lnTlToBr>
-                    <a:lnBlToTr w="12700" cmpd="sng">
-                      <a:noFill/>
-                      <a:prstDash val="solid"/>
-                    </a:lnBlToTr>
-                  </a:tcPr>
-                </a:tc>
-                <a:tc>
-                  <a:txBody>
-                    <a:bodyPr/>
-                    <a:lstStyle/>
-                    <a:p>
-                      <a:pPr>
-                        <a:buNone/>
-                      </a:pPr>
-                      <a:r>
-                        <a:rPr lang="en-NZ" sz="700"/>
-                        <a:t>Corporate Risk Manager</a:t>
-                      </a:r>
-                    </a:p>
-                  </a:txBody>
-                  <a:tcPr anchor="ctr">
-                    <a:lnL>
-                      <a:noFill/>
-                    </a:lnL>
-                    <a:lnR>
-                      <a:noFill/>
-                    </a:lnR>
-                    <a:lnT>
-                      <a:noFill/>
-                    </a:lnT>
-                    <a:lnB>
-                      <a:noFill/>
-                    </a:lnB>
-                    <a:lnTlToBr w="12700" cmpd="sng">
-                      <a:noFill/>
-                      <a:prstDash val="solid"/>
-                    </a:lnTlToBr>
-                    <a:lnBlToTr w="12700" cmpd="sng">
-                      <a:noFill/>
-                      <a:prstDash val="solid"/>
-                    </a:lnBlToTr>
-                  </a:tcPr>
-                </a:tc>
-                <a:tc>
-                  <a:txBody>
-                    <a:bodyPr/>
-                    <a:lstStyle/>
-                    <a:p>
-                      <a:pPr>
-                        <a:buNone/>
-                      </a:pPr>
-                      <a:r>
-                        <a:rPr lang="en-NZ" sz="700"/>
-                        <a:t>2011</a:t>
-                      </a:r>
-                    </a:p>
-                  </a:txBody>
-                  <a:tcPr anchor="ctr">
-                    <a:lnL>
-                      <a:noFill/>
-                    </a:lnL>
-                    <a:lnR>
-                      <a:noFill/>
-                    </a:lnR>
-                    <a:lnT>
-                      <a:noFill/>
-                    </a:lnT>
-                    <a:lnB>
-                      <a:noFill/>
-                    </a:lnB>
-                    <a:lnTlToBr w="12700" cmpd="sng">
-                      <a:noFill/>
-                      <a:prstDash val="solid"/>
-                    </a:lnTlToBr>
-                    <a:lnBlToTr w="12700" cmpd="sng">
-                      <a:noFill/>
-                      <a:prstDash val="solid"/>
-                    </a:lnBlToTr>
-                  </a:tcPr>
-                </a:tc>
-                <a:tc>
-                  <a:txBody>
-                    <a:bodyPr/>
-                    <a:lstStyle/>
-                    <a:p>
-                      <a:pPr>
-                        <a:buNone/>
-                      </a:pPr>
-                      <a:r>
-                        <a:rPr lang="en-NZ" sz="700"/>
-                        <a:t>2016</a:t>
-                      </a:r>
-                    </a:p>
-                  </a:txBody>
-                  <a:tcPr anchor="ctr">
-                    <a:lnL>
-                      <a:noFill/>
-                    </a:lnL>
-                    <a:lnR>
-                      <a:noFill/>
-                    </a:lnR>
-                    <a:lnT>
-                      <a:noFill/>
-                    </a:lnT>
-                    <a:lnB>
-                      <a:noFill/>
-                    </a:lnB>
-                    <a:lnTlToBr w="12700" cmpd="sng">
-                      <a:noFill/>
-                      <a:prstDash val="solid"/>
-                    </a:lnTlToBr>
-                    <a:lnBlToTr w="12700" cmpd="sng">
-                      <a:noFill/>
-                      <a:prstDash val="solid"/>
-                    </a:lnBlToTr>
-                  </a:tcPr>
-                </a:tc>
-                <a:tc>
-                  <a:txBody>
-                    <a:bodyPr/>
-                    <a:lstStyle/>
-                    <a:p>
-                      <a:pPr>
-                        <a:buNone/>
-                      </a:pPr>
-                      <a:r>
-                        <a:rPr lang="en-NZ" sz="700"/>
-                        <a:t>5 years</a:t>
-                      </a:r>
-                    </a:p>
-                  </a:txBody>
-                  <a:tcPr anchor="ctr">
-                    <a:lnL>
-                      <a:noFill/>
-                    </a:lnL>
-                    <a:lnR w="12700" cap="flat" cmpd="sng" algn="ctr">
-                      <a:solidFill>
-                        <a:schemeClr val="bg1"/>
-                      </a:solidFill>
-                      <a:prstDash val="solid"/>
-                      <a:round/>
-                      <a:headEnd type="none" w="med" len="med"/>
-                      <a:tailEnd type="none" w="med" len="med"/>
-                    </a:lnR>
-                    <a:lnT>
-                      <a:noFill/>
-                    </a:lnT>
-                    <a:lnB>
-                      <a:noFill/>
-                    </a:lnB>
-                    <a:lnTlToBr w="12700" cmpd="sng">
-                      <a:noFill/>
-                      <a:prstDash val="solid"/>
-                    </a:lnTlToBr>
-                    <a:lnBlToTr w="12700" cmpd="sng">
-                      <a:noFill/>
-                      <a:prstDash val="solid"/>
-                    </a:lnBlToTr>
-                  </a:tcPr>
-                </a:tc>
-                <a:extLst>
-                  <a:ext uri="{0D108BD9-81ED-4DB2-BD59-A6C34878D82A}">
-                    <a16:rowId xmlns:a16="http://schemas.microsoft.com/office/drawing/2014/main" val="1638687515"/>
-                  </a:ext>
-                </a:extLst>
-              </a:tr>
-              <a:tr h="295366">
-                <a:tc>
-                  <a:txBody>
-                    <a:bodyPr/>
-                    <a:lstStyle/>
-                    <a:p>
-                      <a:pPr>
-                        <a:buNone/>
-                      </a:pPr>
-                      <a:r>
-                        <a:rPr lang="en-NZ" sz="700" b="1"/>
-                        <a:t>BHP Billiton (UK / Australia)</a:t>
-                      </a:r>
-                    </a:p>
-                  </a:txBody>
-                  <a:tcPr anchor="ctr">
-                    <a:lnL w="12700" cap="flat" cmpd="sng" algn="ctr">
-                      <a:solidFill>
-                        <a:schemeClr val="bg1"/>
-                      </a:solidFill>
-                      <a:prstDash val="solid"/>
-                      <a:round/>
-                      <a:headEnd type="none" w="med" len="med"/>
-                      <a:tailEnd type="none" w="med" len="med"/>
-                    </a:lnL>
-                    <a:lnR>
-                      <a:noFill/>
-                    </a:lnR>
-                    <a:lnT>
-                      <a:noFill/>
-                    </a:lnT>
-                    <a:lnB w="12700" cap="flat" cmpd="sng" algn="ctr">
-                      <a:noFill/>
-                      <a:prstDash val="solid"/>
-                      <a:round/>
-                      <a:headEnd type="none" w="med" len="med"/>
-                      <a:tailEnd type="none" w="med" len="med"/>
-                    </a:lnB>
-                    <a:lnTlToBr w="12700" cmpd="sng">
-                      <a:noFill/>
-                      <a:prstDash val="solid"/>
-                    </a:lnTlToBr>
-                    <a:lnBlToTr w="12700" cmpd="sng">
-                      <a:noFill/>
-                      <a:prstDash val="solid"/>
-                    </a:lnBlToTr>
-                  </a:tcPr>
-                </a:tc>
-                <a:tc>
-                  <a:txBody>
-                    <a:bodyPr/>
-                    <a:lstStyle/>
-                    <a:p>
-                      <a:pPr>
-                        <a:buNone/>
-                      </a:pPr>
-                      <a:r>
-                        <a:rPr lang="en-NZ" sz="700"/>
-                        <a:t>Management Accountant</a:t>
-                      </a:r>
-                    </a:p>
-                  </a:txBody>
-                  <a:tcPr anchor="ctr">
-                    <a:lnL>
-                      <a:noFill/>
-                    </a:lnL>
-                    <a:lnR>
-                      <a:noFill/>
-                    </a:lnR>
-                    <a:lnT>
-                      <a:noFill/>
-                    </a:lnT>
-                    <a:lnB w="12700" cap="flat" cmpd="sng" algn="ctr">
-                      <a:noFill/>
-                      <a:prstDash val="solid"/>
-                      <a:round/>
-                      <a:headEnd type="none" w="med" len="med"/>
-                      <a:tailEnd type="none" w="med" len="med"/>
-                    </a:lnB>
-                    <a:lnTlToBr w="12700" cmpd="sng">
-                      <a:noFill/>
-                      <a:prstDash val="solid"/>
-                    </a:lnTlToBr>
-                    <a:lnBlToTr w="12700" cmpd="sng">
-                      <a:noFill/>
-                      <a:prstDash val="solid"/>
-                    </a:lnBlToTr>
-                  </a:tcPr>
-                </a:tc>
-                <a:tc>
-                  <a:txBody>
-                    <a:bodyPr/>
-                    <a:lstStyle/>
-                    <a:p>
-                      <a:pPr>
-                        <a:buNone/>
-                      </a:pPr>
-                      <a:r>
-                        <a:rPr lang="en-NZ" sz="700"/>
-                        <a:t>2010</a:t>
-                      </a:r>
-                    </a:p>
-                  </a:txBody>
-                  <a:tcPr anchor="ctr">
-                    <a:lnL>
-                      <a:noFill/>
-                    </a:lnL>
-                    <a:lnR>
-                      <a:noFill/>
-                    </a:lnR>
-                    <a:lnT>
-                      <a:noFill/>
-                    </a:lnT>
-                    <a:lnB w="12700" cap="flat" cmpd="sng" algn="ctr">
-                      <a:noFill/>
-                      <a:prstDash val="solid"/>
-                      <a:round/>
-                      <a:headEnd type="none" w="med" len="med"/>
-                      <a:tailEnd type="none" w="med" len="med"/>
-                    </a:lnB>
-                    <a:lnTlToBr w="12700" cmpd="sng">
-                      <a:noFill/>
-                      <a:prstDash val="solid"/>
-                    </a:lnTlToBr>
-                    <a:lnBlToTr w="12700" cmpd="sng">
-                      <a:noFill/>
-                      <a:prstDash val="solid"/>
-                    </a:lnBlToTr>
-                  </a:tcPr>
-                </a:tc>
-                <a:tc>
-                  <a:txBody>
-                    <a:bodyPr/>
-                    <a:lstStyle/>
-                    <a:p>
-                      <a:pPr>
-                        <a:buNone/>
-                      </a:pPr>
-                      <a:r>
-                        <a:rPr lang="en-NZ" sz="700"/>
-                        <a:t>2011</a:t>
-                      </a:r>
-                    </a:p>
-                  </a:txBody>
-                  <a:tcPr anchor="ctr">
-                    <a:lnL>
-                      <a:noFill/>
-                    </a:lnL>
-                    <a:lnR>
-                      <a:noFill/>
-                    </a:lnR>
-                    <a:lnT>
-                      <a:noFill/>
-                    </a:lnT>
-                    <a:lnB w="12700" cap="flat" cmpd="sng" algn="ctr">
-                      <a:noFill/>
-                      <a:prstDash val="solid"/>
-                      <a:round/>
-                      <a:headEnd type="none" w="med" len="med"/>
-                      <a:tailEnd type="none" w="med" len="med"/>
-                    </a:lnB>
-                    <a:lnTlToBr w="12700" cmpd="sng">
-                      <a:noFill/>
-                      <a:prstDash val="solid"/>
-                    </a:lnTlToBr>
-                    <a:lnBlToTr w="12700" cmpd="sng">
-                      <a:noFill/>
-                      <a:prstDash val="solid"/>
-                    </a:lnBlToTr>
-                  </a:tcPr>
-                </a:tc>
-                <a:tc>
-                  <a:txBody>
-                    <a:bodyPr/>
-                    <a:lstStyle/>
-                    <a:p>
-                      <a:pPr>
-                        <a:buNone/>
-                      </a:pPr>
-                      <a:r>
-                        <a:rPr lang="en-NZ" sz="700"/>
-                        <a:t>1 year</a:t>
-                      </a:r>
-                    </a:p>
-                  </a:txBody>
-                  <a:tcPr anchor="ctr">
-                    <a:lnL>
-                      <a:noFill/>
-                    </a:lnL>
-                    <a:lnR w="12700" cap="flat" cmpd="sng" algn="ctr">
-                      <a:solidFill>
-                        <a:schemeClr val="bg1"/>
-                      </a:solidFill>
-                      <a:prstDash val="solid"/>
-                      <a:round/>
-                      <a:headEnd type="none" w="med" len="med"/>
-                      <a:tailEnd type="none" w="med" len="med"/>
-                    </a:lnR>
-                    <a:lnT>
-                      <a:noFill/>
-                    </a:lnT>
-                    <a:lnB w="12700" cap="flat" cmpd="sng" algn="ctr">
-                      <a:noFill/>
-                      <a:prstDash val="solid"/>
-                      <a:round/>
-                      <a:headEnd type="none" w="med" len="med"/>
-                      <a:tailEnd type="none" w="med" len="med"/>
-                    </a:lnB>
-                    <a:lnTlToBr w="12700" cmpd="sng">
-                      <a:noFill/>
-                      <a:prstDash val="solid"/>
-                    </a:lnTlToBr>
-                    <a:lnBlToTr w="12700" cmpd="sng">
-                      <a:noFill/>
-                      <a:prstDash val="solid"/>
-                    </a:lnBlToTr>
-                  </a:tcPr>
-                </a:tc>
-                <a:extLst>
-                  <a:ext uri="{0D108BD9-81ED-4DB2-BD59-A6C34878D82A}">
-                    <a16:rowId xmlns:a16="http://schemas.microsoft.com/office/drawing/2014/main" val="4208584389"/>
-                  </a:ext>
-                </a:extLst>
-              </a:tr>
-              <a:tr h="295366">
-                <a:tc>
-                  <a:txBody>
-                    <a:bodyPr/>
-                    <a:lstStyle/>
-                    <a:p>
-                      <a:pPr>
-                        <a:buNone/>
-                      </a:pPr>
-                      <a:r>
-                        <a:rPr lang="en-GB" sz="700" b="1"/>
-                        <a:t>Westpac Business Bank (Bay of Plenty)</a:t>
-                      </a:r>
-                    </a:p>
-                  </a:txBody>
-                  <a:tcPr anchor="ctr">
-                    <a:lnL w="12700" cap="flat" cmpd="sng" algn="ctr">
-                      <a:solidFill>
-                        <a:schemeClr val="bg1"/>
-                      </a:solidFill>
-                      <a:prstDash val="solid"/>
-                      <a:round/>
-                      <a:headEnd type="none" w="med" len="med"/>
-                      <a:tailEnd type="none" w="med" len="med"/>
-                    </a:lnL>
-                    <a:lnR>
-                      <a:noFill/>
-                    </a:lnR>
-                    <a:lnT>
-                      <a:noFill/>
-                    </a:lnT>
-                    <a:lnB w="12700" cap="flat" cmpd="sng" algn="ctr">
-                      <a:solidFill>
-                        <a:schemeClr val="bg1"/>
-                      </a:solidFill>
-                      <a:prstDash val="solid"/>
-                      <a:round/>
-                      <a:headEnd type="none" w="med" len="med"/>
-                      <a:tailEnd type="none" w="med" len="med"/>
-                    </a:lnB>
-                    <a:lnTlToBr w="12700" cmpd="sng">
-                      <a:noFill/>
-                      <a:prstDash val="solid"/>
-                    </a:lnTlToBr>
-                    <a:lnBlToTr w="12700" cmpd="sng">
-                      <a:noFill/>
-                      <a:prstDash val="solid"/>
-                    </a:lnBlToTr>
-                  </a:tcPr>
-                </a:tc>
-                <a:tc>
-                  <a:txBody>
-                    <a:bodyPr/>
-                    <a:lstStyle/>
-                    <a:p>
-                      <a:pPr>
-                        <a:buNone/>
-                      </a:pPr>
-                      <a:r>
-                        <a:rPr lang="en-NZ" sz="700"/>
-                        <a:t>Business Banking Manager</a:t>
-                      </a:r>
-                    </a:p>
-                  </a:txBody>
-                  <a:tcPr anchor="ctr">
-                    <a:lnL>
-                      <a:noFill/>
-                    </a:lnL>
-                    <a:lnR>
-                      <a:noFill/>
-                    </a:lnR>
-                    <a:lnT>
-                      <a:noFill/>
-                    </a:lnT>
-                    <a:lnB w="12700" cap="flat" cmpd="sng" algn="ctr">
-                      <a:solidFill>
-                        <a:schemeClr val="bg1"/>
-                      </a:solidFill>
-                      <a:prstDash val="solid"/>
-                      <a:round/>
-                      <a:headEnd type="none" w="med" len="med"/>
-                      <a:tailEnd type="none" w="med" len="med"/>
-                    </a:lnB>
-                    <a:lnTlToBr w="12700" cmpd="sng">
-                      <a:noFill/>
-                      <a:prstDash val="solid"/>
-                    </a:lnTlToBr>
-                    <a:lnBlToTr w="12700" cmpd="sng">
-                      <a:noFill/>
-                      <a:prstDash val="solid"/>
-                    </a:lnBlToTr>
-                  </a:tcPr>
-                </a:tc>
-                <a:tc>
-                  <a:txBody>
-                    <a:bodyPr/>
-                    <a:lstStyle/>
-                    <a:p>
-                      <a:pPr>
-                        <a:buNone/>
-                      </a:pPr>
-                      <a:r>
-                        <a:rPr lang="en-NZ" sz="700"/>
-                        <a:t>2005</a:t>
-                      </a:r>
-                    </a:p>
-                  </a:txBody>
-                  <a:tcPr anchor="ctr">
-                    <a:lnL>
-                      <a:noFill/>
-                    </a:lnL>
-                    <a:lnR>
-                      <a:noFill/>
-                    </a:lnR>
-                    <a:lnT>
-                      <a:noFill/>
-                    </a:lnT>
-                    <a:lnB w="12700" cap="flat" cmpd="sng" algn="ctr">
-                      <a:solidFill>
-                        <a:schemeClr val="bg1"/>
-                      </a:solidFill>
-                      <a:prstDash val="solid"/>
-                      <a:round/>
-                      <a:headEnd type="none" w="med" len="med"/>
-                      <a:tailEnd type="none" w="med" len="med"/>
-                    </a:lnB>
-                    <a:lnTlToBr w="12700" cmpd="sng">
-                      <a:noFill/>
-                      <a:prstDash val="solid"/>
-                    </a:lnTlToBr>
-                    <a:lnBlToTr w="12700" cmpd="sng">
-                      <a:noFill/>
-                      <a:prstDash val="solid"/>
-                    </a:lnBlToTr>
-                  </a:tcPr>
-                </a:tc>
-                <a:tc>
-                  <a:txBody>
-                    <a:bodyPr/>
-                    <a:lstStyle/>
-                    <a:p>
-                      <a:pPr>
-                        <a:buNone/>
-                      </a:pPr>
-                      <a:r>
-                        <a:rPr lang="en-NZ" sz="700"/>
-                        <a:t>2010</a:t>
-                      </a:r>
-                    </a:p>
-                  </a:txBody>
-                  <a:tcPr anchor="ctr">
-                    <a:lnL>
-                      <a:noFill/>
-                    </a:lnL>
-                    <a:lnR>
-                      <a:noFill/>
-                    </a:lnR>
-                    <a:lnT>
-                      <a:noFill/>
-                    </a:lnT>
-                    <a:lnB w="12700" cap="flat" cmpd="sng" algn="ctr">
-                      <a:solidFill>
-                        <a:schemeClr val="bg1"/>
-                      </a:solidFill>
-                      <a:prstDash val="solid"/>
-                      <a:round/>
-                      <a:headEnd type="none" w="med" len="med"/>
-                      <a:tailEnd type="none" w="med" len="med"/>
-                    </a:lnB>
-                    <a:lnTlToBr w="12700" cmpd="sng">
-                      <a:noFill/>
-                      <a:prstDash val="solid"/>
-                    </a:lnTlToBr>
-                    <a:lnBlToTr w="12700" cmpd="sng">
-                      <a:noFill/>
-                      <a:prstDash val="solid"/>
-                    </a:lnBlToTr>
-                  </a:tcPr>
-                </a:tc>
-                <a:tc>
-                  <a:txBody>
-                    <a:bodyPr/>
-                    <a:lstStyle/>
-                    <a:p>
-                      <a:pPr>
-                        <a:buNone/>
-                      </a:pPr>
-                      <a:r>
-                        <a:rPr lang="en-NZ" sz="700"/>
-                        <a:t>5 years</a:t>
-                      </a:r>
-                    </a:p>
-                  </a:txBody>
-                  <a:tcPr anchor="ctr">
-                    <a:lnL>
-                      <a:noFill/>
-                    </a:lnL>
-                    <a:lnR w="12700" cap="flat" cmpd="sng" algn="ctr">
-                      <a:solidFill>
-                        <a:schemeClr val="bg1"/>
-                      </a:solidFill>
-                      <a:prstDash val="solid"/>
-                      <a:round/>
-                      <a:headEnd type="none" w="med" len="med"/>
-                      <a:tailEnd type="none" w="med" len="med"/>
-                    </a:lnR>
-                    <a:lnT>
-                      <a:noFill/>
-                    </a:lnT>
-                    <a:lnB w="12700" cap="flat" cmpd="sng" algn="ctr">
-                      <a:solidFill>
-                        <a:schemeClr val="bg1"/>
-                      </a:solidFill>
-                      <a:prstDash val="solid"/>
-                      <a:round/>
-                      <a:headEnd type="none" w="med" len="med"/>
-                      <a:tailEnd type="none" w="med" len="med"/>
-                    </a:lnB>
-                    <a:lnTlToBr w="12700" cmpd="sng">
-                      <a:noFill/>
-                      <a:prstDash val="solid"/>
-                    </a:lnTlToBr>
-                    <a:lnBlToTr w="12700" cmpd="sng">
-                      <a:noFill/>
-                      <a:prstDash val="solid"/>
-                    </a:lnBlToTr>
-                  </a:tcPr>
-                </a:tc>
-                <a:extLst>
-                  <a:ext uri="{0D108BD9-81ED-4DB2-BD59-A6C34878D82A}">
-                    <a16:rowId xmlns:a16="http://schemas.microsoft.com/office/drawing/2014/main" val="1206542046"/>
-                  </a:ext>
-                </a:extLst>
-              </a:tr>
-            </a:tbl>
-          </a:graphicData>
-        </a:graphic>
-      </p:graphicFrame>
-      <p:sp>
-        <p:nvSpPr>
-          <p:cNvPr id="9" name="Rectangle: Rounded Corners 8">
-            <a:extLst>
-              <a:ext uri="{FF2B5EF4-FFF2-40B4-BE49-F238E27FC236}">
-                <a16:creationId xmlns:a16="http://schemas.microsoft.com/office/drawing/2014/main" id="{98443D9F-E63A-D61F-1C74-102196FCBB99}"/>
-              </a:ext>
-            </a:extLst>
-          </p:cNvPr>
-          <p:cNvSpPr>
-            <a:spLocks/>
-          </p:cNvSpPr>
-          <p:nvPr/>
-        </p:nvSpPr>
-        <p:spPr>
-          <a:xfrm>
-            <a:off x="138678" y="5207893"/>
-            <a:ext cx="6580645" cy="4297478"/>
-          </a:xfrm>
-          <a:prstGeom prst="roundRect">
-            <a:avLst>
-              <a:gd name="adj" fmla="val 0"/>
-            </a:avLst>
-          </a:prstGeom>
-          <a:solidFill>
-            <a:schemeClr val="bg1"/>
-          </a:solidFill>
-          <a:ln>
-            <a:solidFill>
-              <a:srgbClr val="004899"/>
-            </a:solidFill>
-          </a:ln>
-          <a:effectLst>
-            <a:softEdge rad="0"/>
-          </a:effectLst>
-        </p:spPr>
-        <p:style>
-          <a:lnRef idx="2">
-            <a:schemeClr val="accent1">
-              <a:shade val="15000"/>
-            </a:schemeClr>
-          </a:lnRef>
-          <a:fillRef idx="1">
-            <a:schemeClr val="accent1"/>
-          </a:fillRef>
-          <a:effectRef idx="0">
-            <a:schemeClr val="accent1"/>
-          </a:effectRef>
-          <a:fontRef idx="minor">
-            <a:schemeClr val="lt1"/>
-          </a:fontRef>
-        </p:style>
-        <p:txBody>
-          <a:bodyPr tIns="0" rtlCol="0" anchor="t" anchorCtr="0"/>
-          <a:lstStyle/>
-          <a:p>
-            <a:endParaRPr lang="en-NZ" sz="900">
-              <a:solidFill>
-                <a:schemeClr val="tx1"/>
-              </a:solidFill>
-            </a:endParaRPr>
-          </a:p>
-          <a:p>
-            <a:pPr algn="just"/>
-            <a:r>
-              <a:rPr lang="en-NZ" sz="900">
-                <a:solidFill>
-                  <a:schemeClr val="tx1"/>
-                </a:solidFill>
-              </a:rPr>
-              <a:t>Alex is currently leading the investment function for a small boutique social enterprise investment company, Soul Capital. She is looking to move on for a few reasons, but largely due to the organisation being owned and run by academics who lack the governance and experience to move quickly and take advantage of opportunities, as well as concerns about their ability to raise capital. Additionally, her career aligns more with high growth industries and hence her interest in this role at Evolution Healthcare. </a:t>
-            </a:r>
-          </a:p>
-          <a:p>
-            <a:pPr algn="just"/>
-            <a:endParaRPr lang="en-NZ" sz="900">
-              <a:solidFill>
-                <a:schemeClr val="tx1"/>
-              </a:solidFill>
-            </a:endParaRPr>
-          </a:p>
-          <a:p>
-            <a:pPr algn="just"/>
-            <a:r>
-              <a:rPr lang="en-NZ" sz="900">
-                <a:solidFill>
-                  <a:schemeClr val="tx1"/>
-                </a:solidFill>
-              </a:rPr>
-              <a:t>Alex has very good experience in not only M&amp;A but also large and complex capital development projects, most notably at Western Power where she led a complex tripartite commercial negotiation (company, commercial counterpart and various banks) on a $400M capital investment project to build new transmission lines in Western Australia. She led this entire process end to end including in house and external legal teams, procurement and others through to fruition.</a:t>
-            </a:r>
-          </a:p>
-          <a:p>
-            <a:pPr algn="just"/>
-            <a:endParaRPr lang="en-NZ" sz="900">
-              <a:solidFill>
-                <a:schemeClr val="tx1"/>
-              </a:solidFill>
-            </a:endParaRPr>
-          </a:p>
-          <a:p>
-            <a:pPr algn="just"/>
-            <a:r>
-              <a:rPr lang="en-NZ" sz="900">
-                <a:solidFill>
-                  <a:schemeClr val="tx1"/>
-                </a:solidFill>
-              </a:rPr>
-              <a:t>Alex is a very capable leader who is comfortable building high performing teams from scratch and has a focused and empowering leadership style that sets clear direction and expectations of her teams, with an outcome focused agenda. She is people centric and will build good relationships across all aspects of a business.</a:t>
-            </a:r>
-          </a:p>
-          <a:p>
-            <a:pPr algn="just"/>
-            <a:endParaRPr lang="en-NZ" sz="900">
-              <a:solidFill>
-                <a:schemeClr val="tx1"/>
-              </a:solidFill>
-            </a:endParaRPr>
-          </a:p>
-          <a:p>
-            <a:pPr algn="just"/>
-            <a:r>
-              <a:rPr lang="en-NZ" sz="900">
-                <a:solidFill>
-                  <a:schemeClr val="tx1"/>
-                </a:solidFill>
-              </a:rPr>
-              <a:t>Alex really does enjoy getting into the detail and driving process improvement but is extremely capable at a board room table. Her role at Powerglide (boutique New Zealand owned elevator company) perhaps best illustrates her experience of adding true commercial value to a company where she was brought in to turn the business around and prepare it for a potential sale. She drove all aspects of the commercial agenda including product, pricing, operational efficiencies, profit, people and process improvement.</a:t>
-            </a:r>
-          </a:p>
-          <a:p>
-            <a:pPr algn="just"/>
-            <a:endParaRPr lang="en-NZ" sz="900">
-              <a:solidFill>
-                <a:schemeClr val="tx1"/>
-              </a:solidFill>
-            </a:endParaRPr>
-          </a:p>
-          <a:p>
-            <a:pPr algn="just"/>
-            <a:r>
-              <a:rPr lang="en-NZ" sz="900">
-                <a:solidFill>
-                  <a:schemeClr val="tx1"/>
-                </a:solidFill>
-              </a:rPr>
-              <a:t>Alex is a very talented, smart and ambitious person who can operate at all levels of a business. She is very strategic, commercial and driven and could be a strong option for this role.</a:t>
-            </a:r>
-          </a:p>
-          <a:p>
-            <a:pPr algn="just"/>
-            <a:endParaRPr lang="en-NZ" sz="900">
-              <a:solidFill>
-                <a:schemeClr val="tx1"/>
-              </a:solidFill>
-            </a:endParaRPr>
-          </a:p>
-          <a:p>
-            <a:pPr algn="just"/>
-            <a:r>
-              <a:rPr lang="en-NZ" sz="900">
-                <a:solidFill>
-                  <a:schemeClr val="tx1"/>
-                </a:solidFill>
-              </a:rPr>
-              <a:t>It is worth noting that Alex is actively interviewing and does have another opportunity that is progressing so there is a chance that she could be offered a role before we complete this process.</a:t>
-            </a:r>
-          </a:p>
-          <a:p>
-            <a:pPr algn="just">
-              <a:lnSpc>
-                <a:spcPct val="107000"/>
-              </a:lnSpc>
-              <a:spcAft>
-                <a:spcPts val="800"/>
-              </a:spcAft>
-              <a:buNone/>
-            </a:pPr>
-            <a:endParaRPr lang="en-NZ" sz="900" kern="100">
-              <a:solidFill>
-                <a:schemeClr val="tx1"/>
-              </a:solidFill>
-              <a:effectLst/>
-              <a:latin typeface="Aptos" panose="020B0004020202020204" pitchFamily="34" charset="0"/>
-              <a:ea typeface="Aptos" panose="020B0004020202020204" pitchFamily="34" charset="0"/>
-              <a:cs typeface="Arial" panose="020B0604020202020204" pitchFamily="34" charset="0"/>
-            </a:endParaRPr>
-          </a:p>
-        </p:txBody>
-      </p:sp>
-      <p:graphicFrame>
-        <p:nvGraphicFramePr>
-          <p:cNvPr id="3" name="Table 2">
-            <a:extLst>
-              <a:ext uri="{FF2B5EF4-FFF2-40B4-BE49-F238E27FC236}">
-                <a16:creationId xmlns:a16="http://schemas.microsoft.com/office/drawing/2014/main" id="{D111AF5F-E145-9DA9-EDB4-3E18D46EFC9B}"/>
-              </a:ext>
-            </a:extLst>
-          </p:cNvPr>
-          <p:cNvGraphicFramePr>
-            <a:graphicFrameLocks/>
-          </p:cNvGraphicFramePr>
-          <p:nvPr>
-            <p:extLst>
-              <p:ext uri="{D42A27DB-BD31-4B8C-83A1-F6EECF244321}">
-                <p14:modId xmlns:p14="http://schemas.microsoft.com/office/powerpoint/2010/main" val="1813830062"/>
-              </p:ext>
-            </p:extLst>
-          </p:nvPr>
-        </p:nvGraphicFramePr>
-        <p:xfrm>
-          <a:off x="2429934" y="566496"/>
-          <a:ext cx="4186937" cy="2032512"/>
-        </p:xfrm>
-        <a:graphic>
-          <a:graphicData uri="http://schemas.openxmlformats.org/drawingml/2006/table">
-            <a:tbl>
-              <a:tblPr bandRow="1">
-                <a:tableStyleId>{2D5ABB26-0587-4C30-8999-92F81FD0307C}</a:tableStyleId>
-              </a:tblPr>
-              <a:tblGrid>
-                <a:gridCol w="1815753">
-                  <a:extLst>
-                    <a:ext uri="{9D8B030D-6E8A-4147-A177-3AD203B41FA5}">
-                      <a16:colId xmlns:a16="http://schemas.microsoft.com/office/drawing/2014/main" val="2252499205"/>
-                    </a:ext>
-                  </a:extLst>
-                </a:gridCol>
-                <a:gridCol w="2371184">
-                  <a:extLst>
-                    <a:ext uri="{9D8B030D-6E8A-4147-A177-3AD203B41FA5}">
-                      <a16:colId xmlns:a16="http://schemas.microsoft.com/office/drawing/2014/main" val="3268057789"/>
-                    </a:ext>
-                  </a:extLst>
-                </a:gridCol>
-              </a:tblGrid>
-              <a:tr h="363314">
-                <a:tc>
-                  <a:txBody>
-                    <a:bodyPr/>
-                    <a:lstStyle/>
-                    <a:p>
-                      <a:pPr>
-                        <a:buNone/>
-                      </a:pPr>
-                      <a:r>
-                        <a:rPr lang="en-NZ" sz="900" b="1">
-                          <a:solidFill>
-                            <a:schemeClr val="bg1"/>
-                          </a:solidFill>
-                        </a:rPr>
-                        <a:t>Notice Period</a:t>
-                      </a:r>
-                      <a:endParaRPr lang="en-NZ" sz="900">
-                        <a:solidFill>
-                          <a:schemeClr val="bg1"/>
-                        </a:solidFill>
-                      </a:endParaRPr>
-                    </a:p>
-                  </a:txBody>
-                  <a:tcPr anchor="ctr">
-                    <a:lnL>
-                      <a:noFill/>
-                    </a:lnL>
-                    <a:lnR>
-                      <a:noFill/>
-                    </a:lnR>
-                    <a:lnT>
-                      <a:noFill/>
-                    </a:lnT>
-                    <a:lnB>
-                      <a:noFill/>
-                    </a:lnB>
-                    <a:lnTlToBr w="12700" cmpd="sng">
-                      <a:noFill/>
-                      <a:prstDash val="solid"/>
-                    </a:lnTlToBr>
-                    <a:lnBlToTr w="12700" cmpd="sng">
-                      <a:noFill/>
-                      <a:prstDash val="solid"/>
-                    </a:lnBlToTr>
-                    <a:noFill/>
-                  </a:tcPr>
-                </a:tc>
-                <a:tc>
-                  <a:txBody>
-                    <a:bodyPr/>
-                    <a:lstStyle/>
-                    <a:p>
-                      <a:pPr>
-                        <a:buNone/>
-                      </a:pPr>
-                      <a:r>
-                        <a:rPr lang="en-NZ" sz="900">
-                          <a:solidFill>
-                            <a:schemeClr val="bg1"/>
-                          </a:solidFill>
-                        </a:rPr>
-                        <a:t>Four weeks</a:t>
-                      </a:r>
-                    </a:p>
-                  </a:txBody>
-                  <a:tcPr anchor="ctr">
-                    <a:lnL>
-                      <a:noFill/>
-                    </a:lnL>
-                    <a:lnR>
-                      <a:noFill/>
-                    </a:lnR>
-                    <a:lnT>
-                      <a:noFill/>
-                    </a:lnT>
-                    <a:lnB>
-                      <a:noFill/>
-                    </a:lnB>
-                    <a:lnTlToBr w="12700" cmpd="sng">
-                      <a:noFill/>
-                      <a:prstDash val="solid"/>
-                    </a:lnTlToBr>
-                    <a:lnBlToTr w="12700" cmpd="sng">
-                      <a:noFill/>
-                      <a:prstDash val="solid"/>
-                    </a:lnBlToTr>
-                    <a:noFill/>
-                  </a:tcPr>
-                </a:tc>
-                <a:extLst>
-                  <a:ext uri="{0D108BD9-81ED-4DB2-BD59-A6C34878D82A}">
-                    <a16:rowId xmlns:a16="http://schemas.microsoft.com/office/drawing/2014/main" val="358037502"/>
-                  </a:ext>
-                </a:extLst>
-              </a:tr>
-              <a:tr h="348198">
-                <a:tc>
-                  <a:txBody>
-                    <a:bodyPr/>
-                    <a:lstStyle/>
-                    <a:p>
-                      <a:pPr>
-                        <a:buNone/>
-                      </a:pPr>
-                      <a:r>
-                        <a:rPr lang="en-NZ" sz="900" b="1">
-                          <a:solidFill>
-                            <a:schemeClr val="bg1"/>
-                          </a:solidFill>
-                        </a:rPr>
-                        <a:t>Base Salary Expectation</a:t>
-                      </a:r>
-                      <a:endParaRPr lang="en-NZ" sz="900">
-                        <a:solidFill>
-                          <a:schemeClr val="bg1"/>
-                        </a:solidFill>
-                      </a:endParaRPr>
-                    </a:p>
-                  </a:txBody>
-                  <a:tcPr anchor="ctr">
-                    <a:lnL>
-                      <a:noFill/>
-                    </a:lnL>
-                    <a:lnR>
-                      <a:noFill/>
-                    </a:lnR>
-                    <a:lnT>
-                      <a:noFill/>
-                    </a:lnT>
-                    <a:lnB>
-                      <a:noFill/>
-                    </a:lnB>
-                    <a:lnTlToBr w="12700" cmpd="sng">
-                      <a:noFill/>
-                      <a:prstDash val="solid"/>
-                    </a:lnTlToBr>
-                    <a:lnBlToTr w="12700" cmpd="sng">
-                      <a:noFill/>
-                      <a:prstDash val="solid"/>
-                    </a:lnBlToTr>
-                    <a:noFill/>
-                  </a:tcPr>
-                </a:tc>
-                <a:tc>
-                  <a:txBody>
-                    <a:bodyPr/>
-                    <a:lstStyle/>
-                    <a:p>
-                      <a:pPr>
-                        <a:buNone/>
-                      </a:pPr>
-                      <a:r>
-                        <a:rPr lang="en-NZ" sz="900">
-                          <a:solidFill>
-                            <a:schemeClr val="bg1"/>
-                          </a:solidFill>
-                        </a:rPr>
-                        <a:t>$290,000</a:t>
-                      </a:r>
-                    </a:p>
-                  </a:txBody>
-                  <a:tcPr anchor="ctr">
-                    <a:lnL>
-                      <a:noFill/>
-                    </a:lnL>
-                    <a:lnR>
-                      <a:noFill/>
-                    </a:lnR>
-                    <a:lnT>
-                      <a:noFill/>
-                    </a:lnT>
-                    <a:lnB>
-                      <a:noFill/>
-                    </a:lnB>
-                    <a:lnTlToBr w="12700" cmpd="sng">
-                      <a:noFill/>
-                      <a:prstDash val="solid"/>
-                    </a:lnTlToBr>
-                    <a:lnBlToTr w="12700" cmpd="sng">
-                      <a:noFill/>
-                      <a:prstDash val="solid"/>
-                    </a:lnBlToTr>
-                    <a:noFill/>
-                  </a:tcPr>
-                </a:tc>
-                <a:extLst>
-                  <a:ext uri="{0D108BD9-81ED-4DB2-BD59-A6C34878D82A}">
-                    <a16:rowId xmlns:a16="http://schemas.microsoft.com/office/drawing/2014/main" val="49863457"/>
-                  </a:ext>
-                </a:extLst>
-              </a:tr>
-              <a:tr h="543760">
-                <a:tc>
-                  <a:txBody>
-                    <a:bodyPr/>
-                    <a:lstStyle/>
-                    <a:p>
-                      <a:pPr>
-                        <a:buNone/>
-                      </a:pPr>
-                      <a:r>
-                        <a:rPr lang="en-NZ" sz="900" b="1">
-                          <a:solidFill>
-                            <a:schemeClr val="bg1"/>
-                          </a:solidFill>
-                        </a:rPr>
-                        <a:t>Education</a:t>
-                      </a:r>
-                      <a:endParaRPr lang="en-NZ" sz="900">
-                        <a:solidFill>
-                          <a:schemeClr val="bg1"/>
-                        </a:solidFill>
-                      </a:endParaRPr>
-                    </a:p>
-                  </a:txBody>
-                  <a:tcPr anchor="ctr">
-                    <a:lnL>
-                      <a:noFill/>
-                    </a:lnL>
-                    <a:lnR>
-                      <a:noFill/>
-                    </a:lnR>
-                    <a:lnT>
-                      <a:noFill/>
-                    </a:lnT>
-                    <a:lnB>
-                      <a:noFill/>
-                    </a:lnB>
-                    <a:lnTlToBr w="12700" cmpd="sng">
-                      <a:noFill/>
-                      <a:prstDash val="solid"/>
-                    </a:lnTlToBr>
-                    <a:lnBlToTr w="12700" cmpd="sng">
-                      <a:noFill/>
-                      <a:prstDash val="solid"/>
-                    </a:lnBlToTr>
-                    <a:noFill/>
-                  </a:tcPr>
-                </a:tc>
-                <a:tc>
-                  <a:txBody>
-                    <a:bodyPr/>
-                    <a:lstStyle/>
-                    <a:p>
-                      <a:r>
-                        <a:rPr lang="en-GB" sz="900">
-                          <a:solidFill>
-                            <a:schemeClr val="bg1"/>
-                          </a:solidFill>
-                        </a:rPr>
-                        <a:t>The University of Edinburgh</a:t>
-                      </a:r>
-                      <a:br>
-                        <a:rPr lang="en-GB" sz="900">
-                          <a:solidFill>
-                            <a:schemeClr val="bg1"/>
-                          </a:solidFill>
-                        </a:rPr>
-                      </a:br>
-                      <a:r>
-                        <a:rPr lang="en-GB" sz="900">
-                          <a:solidFill>
-                            <a:schemeClr val="bg1"/>
-                          </a:solidFill>
-                        </a:rPr>
-                        <a:t>Bachelor of Commerce Honours Business Studies and Accounting</a:t>
-                      </a:r>
-                      <a:endParaRPr lang="en-NZ" sz="900">
-                        <a:solidFill>
-                          <a:schemeClr val="bg1"/>
-                        </a:solidFill>
-                        <a:ea typeface="Roboto" panose="02000000000000000000" pitchFamily="2" charset="0"/>
-                        <a:cs typeface="Roboto" panose="02000000000000000000" pitchFamily="2" charset="0"/>
-                      </a:endParaRPr>
-                    </a:p>
-                  </a:txBody>
-                  <a:tcPr anchor="ctr">
-                    <a:lnL>
-                      <a:noFill/>
-                    </a:lnL>
-                    <a:lnR>
-                      <a:noFill/>
-                    </a:lnR>
-                    <a:lnT>
-                      <a:noFill/>
-                    </a:lnT>
-                    <a:lnB>
-                      <a:noFill/>
-                    </a:lnB>
-                    <a:lnTlToBr w="12700" cmpd="sng">
-                      <a:noFill/>
-                      <a:prstDash val="solid"/>
-                    </a:lnTlToBr>
-                    <a:lnBlToTr w="12700" cmpd="sng">
-                      <a:noFill/>
-                      <a:prstDash val="solid"/>
-                    </a:lnBlToTr>
-                    <a:noFill/>
-                  </a:tcPr>
-                </a:tc>
-                <a:extLst>
-                  <a:ext uri="{0D108BD9-81ED-4DB2-BD59-A6C34878D82A}">
-                    <a16:rowId xmlns:a16="http://schemas.microsoft.com/office/drawing/2014/main" val="912871463"/>
-                  </a:ext>
-                </a:extLst>
-              </a:tr>
-              <a:tr h="543760">
-                <a:tc>
-                  <a:txBody>
-                    <a:bodyPr/>
-                    <a:lstStyle/>
-                    <a:p>
-                      <a:pPr>
-                        <a:buNone/>
-                      </a:pPr>
-                      <a:r>
-                        <a:rPr lang="en-NZ" sz="900" b="1">
-                          <a:solidFill>
-                            <a:schemeClr val="bg1"/>
-                          </a:solidFill>
-                        </a:rPr>
-                        <a:t>Professional Qualifications</a:t>
-                      </a:r>
-                      <a:endParaRPr lang="en-NZ" sz="900">
-                        <a:solidFill>
-                          <a:schemeClr val="bg1"/>
-                        </a:solidFill>
-                      </a:endParaRPr>
-                    </a:p>
-                  </a:txBody>
-                  <a:tcPr anchor="ctr">
-                    <a:lnL>
-                      <a:noFill/>
-                    </a:lnL>
-                    <a:lnR>
-                      <a:noFill/>
-                    </a:lnR>
-                    <a:lnT>
-                      <a:noFill/>
-                    </a:lnT>
-                    <a:lnB>
-                      <a:noFill/>
-                    </a:lnB>
-                    <a:lnTlToBr w="12700" cmpd="sng">
-                      <a:noFill/>
-                      <a:prstDash val="solid"/>
-                    </a:lnTlToBr>
-                    <a:lnBlToTr w="12700" cmpd="sng">
-                      <a:noFill/>
-                      <a:prstDash val="solid"/>
-                    </a:lnBlToTr>
-                    <a:noFill/>
-                  </a:tcPr>
-                </a:tc>
-                <a:tc>
-                  <a:txBody>
-                    <a:bodyPr/>
-                    <a:lstStyle/>
-                    <a:p>
-                      <a:r>
-                        <a:rPr lang="en-GB" sz="900">
-                          <a:solidFill>
-                            <a:schemeClr val="bg1"/>
-                          </a:solidFill>
-                        </a:rPr>
-                        <a:t>Institute of Directors New Zealand</a:t>
-                      </a:r>
-                      <a:br>
-                        <a:rPr lang="en-GB" sz="900">
-                          <a:solidFill>
-                            <a:schemeClr val="bg1"/>
-                          </a:solidFill>
-                        </a:rPr>
-                      </a:br>
-                      <a:r>
-                        <a:rPr lang="en-GB" sz="900">
-                          <a:solidFill>
-                            <a:schemeClr val="bg1"/>
-                          </a:solidFill>
-                        </a:rPr>
-                        <a:t>Company Directors Course</a:t>
-                      </a:r>
-                    </a:p>
-                    <a:p>
-                      <a:br>
-                        <a:rPr lang="en-GB" sz="900">
-                          <a:solidFill>
-                            <a:schemeClr val="bg1"/>
-                          </a:solidFill>
-                        </a:rPr>
-                      </a:br>
-                      <a:r>
-                        <a:rPr lang="en-GB" sz="900">
-                          <a:solidFill>
-                            <a:schemeClr val="bg1"/>
-                          </a:solidFill>
-                        </a:rPr>
-                        <a:t>Institute of Chartered Accountants Scotland Chartered Accountant</a:t>
-                      </a:r>
-                      <a:endParaRPr lang="en-NZ" sz="900">
-                        <a:solidFill>
-                          <a:schemeClr val="bg1"/>
-                        </a:solidFill>
-                      </a:endParaRPr>
-                    </a:p>
-                  </a:txBody>
-                  <a:tcPr anchor="ctr">
-                    <a:lnL>
-                      <a:noFill/>
-                    </a:lnL>
-                    <a:lnR>
-                      <a:noFill/>
-                    </a:lnR>
-                    <a:lnT>
-                      <a:noFill/>
-                    </a:lnT>
-                    <a:lnB>
-                      <a:noFill/>
-                    </a:lnB>
-                    <a:lnTlToBr w="12700" cmpd="sng">
-                      <a:noFill/>
-                      <a:prstDash val="solid"/>
-                    </a:lnTlToBr>
-                    <a:lnBlToTr w="12700" cmpd="sng">
-                      <a:noFill/>
-                      <a:prstDash val="solid"/>
-                    </a:lnBlToTr>
-                    <a:noFill/>
-                  </a:tcPr>
-                </a:tc>
-                <a:extLst>
-                  <a:ext uri="{0D108BD9-81ED-4DB2-BD59-A6C34878D82A}">
-                    <a16:rowId xmlns:a16="http://schemas.microsoft.com/office/drawing/2014/main" val="932259989"/>
-                  </a:ext>
-                </a:extLst>
-              </a:tr>
-            </a:tbl>
-          </a:graphicData>
-        </a:graphic>
-      </p:graphicFrame>
-      <p:sp>
-        <p:nvSpPr>
-          <p:cNvPr id="5" name="TextBox 4">
-            <a:extLst>
-              <a:ext uri="{FF2B5EF4-FFF2-40B4-BE49-F238E27FC236}">
-                <a16:creationId xmlns:a16="http://schemas.microsoft.com/office/drawing/2014/main" id="{C52EC31B-BA49-270A-60A7-BA89715C04AE}"/>
-              </a:ext>
-            </a:extLst>
-          </p:cNvPr>
-          <p:cNvSpPr txBox="1">
-            <a:spLocks noGrp="1" noRot="1" noMove="1" noResize="1" noEditPoints="1" noAdjustHandles="1" noChangeArrowheads="1" noChangeShapeType="1"/>
-          </p:cNvSpPr>
-          <p:nvPr/>
-        </p:nvSpPr>
-        <p:spPr>
-          <a:xfrm>
-            <a:off x="2429934" y="9495846"/>
-            <a:ext cx="2078914" cy="400110"/>
-          </a:xfrm>
-          <a:prstGeom prst="rect">
-            <a:avLst/>
-          </a:prstGeom>
-          <a:noFill/>
-        </p:spPr>
-        <p:txBody>
-          <a:bodyPr wrap="square" rtlCol="0">
-            <a:spAutoFit/>
-          </a:bodyPr>
-          <a:lstStyle/>
-          <a:p>
-            <a:endParaRPr lang="en-NZ" sz="400"/>
-          </a:p>
-          <a:p>
-            <a:pPr lvl="0" algn="ctr" defTabSz="514344">
-              <a:tabLst>
-                <a:tab pos="1611791" algn="ctr"/>
-                <a:tab pos="3223581" algn="r"/>
-              </a:tabLst>
-              <a:defRPr/>
-            </a:pPr>
-            <a:r>
-              <a:rPr lang="en-NZ" altLang="en-US" sz="400">
-                <a:solidFill>
-                  <a:srgbClr val="6F6F6F"/>
-                </a:solidFill>
-                <a:ea typeface="Calibri" panose="020F0502020204030204" pitchFamily="34" charset="0"/>
-                <a:cs typeface="Arial" panose="020B0604020202020204" pitchFamily="34" charset="0"/>
-              </a:rPr>
-              <a:t>Infinitas Talent Limited, PO BOX 357, 2 Princes Street, Auckland, 1140</a:t>
-            </a:r>
-            <a:endParaRPr lang="en-NZ" altLang="en-US" sz="400">
-              <a:solidFill>
-                <a:prstClr val="black"/>
-              </a:solidFill>
-            </a:endParaRPr>
-          </a:p>
-          <a:p>
-            <a:pPr lvl="0" algn="ctr" defTabSz="514344">
-              <a:tabLst>
-                <a:tab pos="1611791" algn="ctr"/>
-                <a:tab pos="3223581" algn="r"/>
-              </a:tabLst>
-              <a:defRPr/>
-            </a:pPr>
-            <a:r>
-              <a:rPr lang="en-NZ" altLang="en-US" sz="400">
-                <a:solidFill>
-                  <a:srgbClr val="6F6F6F"/>
-                </a:solidFill>
-                <a:ea typeface="Calibri" panose="020F0502020204030204" pitchFamily="34" charset="0"/>
-                <a:cs typeface="Arial" panose="020B0604020202020204" pitchFamily="34" charset="0"/>
-              </a:rPr>
-              <a:t>https://infinitas.co.nz   Tel: +64 (0) 9218 6127 </a:t>
-            </a:r>
-            <a:endParaRPr lang="en-NZ" altLang="en-US" sz="400">
-              <a:solidFill>
-                <a:prstClr val="black"/>
-              </a:solidFill>
-            </a:endParaRPr>
-          </a:p>
-          <a:p>
-            <a:pPr lvl="0" algn="ctr" defTabSz="514344">
-              <a:tabLst>
-                <a:tab pos="1611791" algn="ctr"/>
-                <a:tab pos="3223581" algn="r"/>
-              </a:tabLst>
-              <a:defRPr/>
-            </a:pPr>
-            <a:r>
-              <a:rPr lang="en-NZ" altLang="en-US" sz="400">
-                <a:solidFill>
-                  <a:srgbClr val="6F6F6F"/>
-                </a:solidFill>
-                <a:ea typeface="Calibri" panose="020F0502020204030204" pitchFamily="34" charset="0"/>
-                <a:cs typeface="Arial" panose="020B0604020202020204" pitchFamily="34" charset="0"/>
-              </a:rPr>
-              <a:t>These candidates are being represented by Infinitas Talent Limited.</a:t>
-            </a:r>
-            <a:endParaRPr lang="en-NZ" altLang="en-US" sz="400">
-              <a:solidFill>
-                <a:prstClr val="black"/>
-              </a:solidFill>
-            </a:endParaRPr>
-          </a:p>
-          <a:p>
-            <a:pPr lvl="0" algn="ctr" defTabSz="514344">
-              <a:tabLst>
-                <a:tab pos="1611791" algn="ctr"/>
-                <a:tab pos="3223581" algn="r"/>
-              </a:tabLst>
-              <a:defRPr/>
-            </a:pPr>
-            <a:r>
-              <a:rPr lang="en-NZ" altLang="en-US" sz="400">
-                <a:solidFill>
-                  <a:srgbClr val="6F6F6F"/>
-                </a:solidFill>
-                <a:ea typeface="Calibri" panose="020F0502020204030204" pitchFamily="34" charset="0"/>
-                <a:cs typeface="Arial" panose="020B0604020202020204" pitchFamily="34" charset="0"/>
-              </a:rPr>
-              <a:t>Our standard terms of business will apply. This document is private and confidential.</a:t>
-            </a:r>
-            <a:endParaRPr lang="en-NZ" altLang="en-US" sz="400">
-              <a:solidFill>
-                <a:prstClr val="black"/>
-              </a:solidFill>
-            </a:endParaRPr>
-          </a:p>
-        </p:txBody>
-      </p:sp>
-      <p:pic>
-        <p:nvPicPr>
-          <p:cNvPr id="16" name="Picture 2" descr="Alex Dallas - ❚ Business builder - Investor - Executive - Director |  LinkedIn">
-            <a:extLst>
-              <a:ext uri="{FF2B5EF4-FFF2-40B4-BE49-F238E27FC236}">
-                <a16:creationId xmlns:a16="http://schemas.microsoft.com/office/drawing/2014/main" id="{6F5F3FE8-024D-0671-2458-2600DAEFBF94}"/>
-              </a:ext>
-            </a:extLst>
-          </p:cNvPr>
-          <p:cNvPicPr>
-            <a:picLocks noChangeAspect="1" noChangeArrowheads="1"/>
-          </p:cNvPicPr>
-          <p:nvPr/>
-        </p:nvPicPr>
-        <p:blipFill rotWithShape="1">
-          <a:blip r:embed="rId2">
-            <a:extLst>
-              <a:ext uri="{28A0092B-C50C-407E-A947-70E740481C1C}">
-                <a14:useLocalDpi xmlns:a14="http://schemas.microsoft.com/office/drawing/2010/main" val="0"/>
-              </a:ext>
-            </a:extLst>
-          </a:blip>
-          <a:srcRect l="807" t="513" r="2336" b="1125"/>
-          <a:stretch>
-            <a:fillRect/>
-          </a:stretch>
-        </p:blipFill>
-        <p:spPr bwMode="auto">
-          <a:xfrm>
-            <a:off x="503914" y="566496"/>
-            <a:ext cx="1799033" cy="1826977"/>
-          </a:xfrm>
-          <a:prstGeom prst="roundRect">
-            <a:avLst>
-              <a:gd name="adj" fmla="val 10041"/>
-            </a:avLst>
-          </a:prstGeom>
-          <a:noFill/>
-          <a:ln>
-            <a:solidFill>
-              <a:schemeClr val="bg1"/>
-            </a:solidFill>
-          </a:ln>
-          <a:extLst>
-            <a:ext uri="{909E8E84-426E-40DD-AFC4-6F175D3DCCD1}">
-              <a14:hiddenFill xmlns:a14="http://schemas.microsoft.com/office/drawing/2010/main">
-                <a:solidFill>
-                  <a:srgbClr val="FFFFFF"/>
-                </a:solidFill>
-              </a14:hiddenFill>
-            </a:ext>
-          </a:extLst>
-        </p:spPr>
-      </p:pic>
-    </p:spTree>
-    <p:extLst>
-      <p:ext uri="{BB962C8B-B14F-4D97-AF65-F5344CB8AC3E}">
-        <p14:creationId xmlns:p14="http://schemas.microsoft.com/office/powerpoint/2010/main" val="4014426279"/>
-      </p:ext>
-    </p:extLst>
-  </p:cSld>
-  <p:clrMapOvr>
-    <a:masterClrMapping/>
-  </p:clrMapOvr>
-</p:sld>
-</file>
-
-<file path=ppt/slides/slide4.xml><?xml version="1.0" encoding="utf-8"?>
-<p:sld xmlns:a="http://schemas.openxmlformats.org/drawingml/2006/main" xmlns:r="http://schemas.openxmlformats.org/officeDocument/2006/relationships" xmlns:p="http://schemas.openxmlformats.org/presentationml/2006/main">
-  <p:cSld>
-    <p:spTree>
-      <p:nvGrpSpPr>
-        <p:cNvPr id="1" name="">
-          <a:extLst>
-            <a:ext uri="{FF2B5EF4-FFF2-40B4-BE49-F238E27FC236}">
-              <a16:creationId xmlns:a16="http://schemas.microsoft.com/office/drawing/2014/main" id="{180EE6A5-A8F8-F5C9-1F3C-B85F008376F3}"/>
-            </a:ext>
-          </a:extLst>
-        </p:cNvPr>
-        <p:cNvGrpSpPr/>
-        <p:nvPr/>
-      </p:nvGrpSpPr>
-      <p:grpSpPr>
-        <a:xfrm>
-          <a:off x="0" y="0"/>
-          <a:ext cx="0" cy="0"/>
-          <a:chOff x="0" y="0"/>
-          <a:chExt cx="0" cy="0"/>
-        </a:xfrm>
-      </p:grpSpPr>
-      <p:sp>
-        <p:nvSpPr>
-          <p:cNvPr id="4" name="Rectangle: Rounded Corners 3">
-            <a:extLst>
-              <a:ext uri="{FF2B5EF4-FFF2-40B4-BE49-F238E27FC236}">
-                <a16:creationId xmlns:a16="http://schemas.microsoft.com/office/drawing/2014/main" id="{8C9F4DE4-FF25-874A-7BC0-7E8B379DE95B}"/>
-              </a:ext>
-            </a:extLst>
-          </p:cNvPr>
-          <p:cNvSpPr>
-            <a:spLocks/>
-          </p:cNvSpPr>
-          <p:nvPr/>
-        </p:nvSpPr>
-        <p:spPr>
-          <a:xfrm>
-            <a:off x="138677" y="85725"/>
-            <a:ext cx="6580646" cy="5061686"/>
-          </a:xfrm>
-          <a:prstGeom prst="roundRect">
-            <a:avLst>
-              <a:gd name="adj" fmla="val 0"/>
-            </a:avLst>
-          </a:prstGeom>
-          <a:solidFill>
-            <a:srgbClr val="004899"/>
-          </a:solidFill>
-          <a:ln>
-            <a:noFill/>
-          </a:ln>
-          <a:effectLst>
-            <a:softEdge rad="0"/>
-          </a:effectLst>
-        </p:spPr>
-        <p:style>
-          <a:lnRef idx="2">
-            <a:schemeClr val="accent1">
-              <a:shade val="15000"/>
-            </a:schemeClr>
-          </a:lnRef>
-          <a:fillRef idx="1">
-            <a:schemeClr val="accent1"/>
-          </a:fillRef>
-          <a:effectRef idx="0">
-            <a:schemeClr val="accent1"/>
-          </a:effectRef>
-          <a:fontRef idx="minor">
-            <a:schemeClr val="lt1"/>
-          </a:fontRef>
-        </p:style>
-        <p:txBody>
-          <a:bodyPr tIns="14019" numCol="2" rtlCol="0" anchor="t" anchorCtr="0"/>
-          <a:lstStyle/>
-          <a:p>
-            <a:endParaRPr lang="en-NZ" sz="701">
-              <a:latin typeface="Roboto" panose="02000000000000000000" pitchFamily="2" charset="0"/>
-              <a:ea typeface="Roboto" panose="02000000000000000000" pitchFamily="2" charset="0"/>
-              <a:cs typeface="Roboto" panose="02000000000000000000" pitchFamily="2" charset="0"/>
-            </a:endParaRPr>
-          </a:p>
-        </p:txBody>
-      </p:sp>
-      <p:sp>
-        <p:nvSpPr>
-          <p:cNvPr id="7" name="TextBox 6">
-            <a:extLst>
-              <a:ext uri="{FF2B5EF4-FFF2-40B4-BE49-F238E27FC236}">
-                <a16:creationId xmlns:a16="http://schemas.microsoft.com/office/drawing/2014/main" id="{D325D6D5-BEE9-E449-D391-EB8FFEB3F5A7}"/>
-              </a:ext>
-            </a:extLst>
-          </p:cNvPr>
-          <p:cNvSpPr txBox="1">
-            <a:spLocks noGrp="1" noRot="1" noMove="1" noResize="1" noEditPoints="1" noAdjustHandles="1" noChangeArrowheads="1" noChangeShapeType="1"/>
-          </p:cNvSpPr>
-          <p:nvPr/>
-        </p:nvSpPr>
-        <p:spPr>
-          <a:xfrm>
-            <a:off x="376929" y="136682"/>
-            <a:ext cx="2053005" cy="369332"/>
-          </a:xfrm>
-          <a:prstGeom prst="rect">
-            <a:avLst/>
-          </a:prstGeom>
-          <a:noFill/>
-        </p:spPr>
-        <p:txBody>
-          <a:bodyPr wrap="square" rtlCol="0">
-            <a:spAutoFit/>
-          </a:bodyPr>
-          <a:lstStyle/>
-          <a:p>
-            <a:pPr algn="ctr"/>
-            <a:r>
-              <a:rPr lang="en-NZ" b="1">
-                <a:solidFill>
-                  <a:schemeClr val="bg1"/>
-                </a:solidFill>
-                <a:ea typeface="Roboto" panose="02000000000000000000" pitchFamily="2" charset="0"/>
-                <a:cs typeface="Roboto" panose="02000000000000000000" pitchFamily="2" charset="0"/>
-              </a:rPr>
-              <a:t>Alex Dallas</a:t>
-            </a:r>
-          </a:p>
-        </p:txBody>
-      </p:sp>
-      <p:graphicFrame>
-        <p:nvGraphicFramePr>
-          <p:cNvPr id="8" name="Table 7">
-            <a:extLst>
-              <a:ext uri="{FF2B5EF4-FFF2-40B4-BE49-F238E27FC236}">
-                <a16:creationId xmlns:a16="http://schemas.microsoft.com/office/drawing/2014/main" id="{F2095B1E-E6C9-5795-8F81-5A6D4D414A3D}"/>
-              </a:ext>
-            </a:extLst>
-          </p:cNvPr>
-          <p:cNvGraphicFramePr>
-            <a:graphicFrameLocks/>
-          </p:cNvGraphicFramePr>
-          <p:nvPr/>
-        </p:nvGraphicFramePr>
-        <p:xfrm>
-          <a:off x="256830" y="2763240"/>
-          <a:ext cx="6344340" cy="2265682"/>
-        </p:xfrm>
-        <a:graphic>
-          <a:graphicData uri="http://schemas.openxmlformats.org/drawingml/2006/table">
-            <a:tbl>
-              <a:tblPr firstRow="1" bandRow="1">
-                <a:tableStyleId>{8EC20E35-A176-4012-BC5E-935CFFF8708E}</a:tableStyleId>
-              </a:tblPr>
-              <a:tblGrid>
-                <a:gridCol w="1788776">
-                  <a:extLst>
-                    <a:ext uri="{9D8B030D-6E8A-4147-A177-3AD203B41FA5}">
-                      <a16:colId xmlns:a16="http://schemas.microsoft.com/office/drawing/2014/main" val="2119135538"/>
-                    </a:ext>
-                  </a:extLst>
-                </a:gridCol>
-                <a:gridCol w="2044709">
-                  <a:extLst>
-                    <a:ext uri="{9D8B030D-6E8A-4147-A177-3AD203B41FA5}">
-                      <a16:colId xmlns:a16="http://schemas.microsoft.com/office/drawing/2014/main" val="819543413"/>
-                    </a:ext>
-                  </a:extLst>
-                </a:gridCol>
-                <a:gridCol w="836952">
-                  <a:extLst>
-                    <a:ext uri="{9D8B030D-6E8A-4147-A177-3AD203B41FA5}">
-                      <a16:colId xmlns:a16="http://schemas.microsoft.com/office/drawing/2014/main" val="2699358850"/>
-                    </a:ext>
-                  </a:extLst>
-                </a:gridCol>
-                <a:gridCol w="676825">
-                  <a:extLst>
-                    <a:ext uri="{9D8B030D-6E8A-4147-A177-3AD203B41FA5}">
-                      <a16:colId xmlns:a16="http://schemas.microsoft.com/office/drawing/2014/main" val="3271143972"/>
-                    </a:ext>
-                  </a:extLst>
-                </a:gridCol>
-                <a:gridCol w="997078">
-                  <a:extLst>
-                    <a:ext uri="{9D8B030D-6E8A-4147-A177-3AD203B41FA5}">
-                      <a16:colId xmlns:a16="http://schemas.microsoft.com/office/drawing/2014/main" val="3189428181"/>
-                    </a:ext>
-                  </a:extLst>
-                </a:gridCol>
-              </a:tblGrid>
-              <a:tr h="194499">
-                <a:tc>
-                  <a:txBody>
-                    <a:bodyPr/>
-                    <a:lstStyle/>
-                    <a:p>
-                      <a:pPr>
-                        <a:buNone/>
-                      </a:pPr>
-                      <a:r>
-                        <a:rPr lang="en-NZ" sz="700" b="1"/>
-                        <a:t>Company</a:t>
-                      </a:r>
-                    </a:p>
-                  </a:txBody>
-                  <a:tcPr anchor="ctr">
-                    <a:lnL w="12700" cap="flat" cmpd="sng" algn="ctr">
-                      <a:solidFill>
-                        <a:schemeClr val="bg1"/>
-                      </a:solidFill>
-                      <a:prstDash val="solid"/>
-                      <a:round/>
-                      <a:headEnd type="none" w="med" len="med"/>
-                      <a:tailEnd type="none" w="med" len="med"/>
-                    </a:lnL>
-                    <a:lnR w="12700" cap="flat" cmpd="sng" algn="ctr">
-                      <a:solidFill>
-                        <a:schemeClr val="bg1"/>
-                      </a:solidFill>
-                      <a:prstDash val="solid"/>
-                      <a:round/>
-                      <a:headEnd type="none" w="med" len="med"/>
-                      <a:tailEnd type="none" w="med" len="med"/>
-                    </a:lnR>
-                    <a:lnT w="12700" cap="flat" cmpd="sng" algn="ctr">
-                      <a:solidFill>
-                        <a:schemeClr val="bg1"/>
-                      </a:solidFill>
-                      <a:prstDash val="solid"/>
-                      <a:round/>
-                      <a:headEnd type="none" w="med" len="med"/>
-                      <a:tailEnd type="none" w="med" len="med"/>
-                    </a:lnT>
-                    <a:lnB w="12700" cap="flat" cmpd="sng" algn="ctr">
-                      <a:solidFill>
-                        <a:schemeClr val="bg1"/>
-                      </a:solidFill>
-                      <a:prstDash val="solid"/>
-                      <a:round/>
-                      <a:headEnd type="none" w="med" len="med"/>
-                      <a:tailEnd type="none" w="med" len="med"/>
-                    </a:lnB>
-                    <a:lnTlToBr w="12700" cmpd="sng">
-                      <a:noFill/>
-                      <a:prstDash val="solid"/>
-                    </a:lnTlToBr>
-                    <a:lnBlToTr w="12700" cmpd="sng">
-                      <a:noFill/>
-                      <a:prstDash val="solid"/>
-                    </a:lnBlToTr>
-                    <a:solidFill>
-                      <a:srgbClr val="004899"/>
-                    </a:solidFill>
-                  </a:tcPr>
-                </a:tc>
-                <a:tc>
-                  <a:txBody>
-                    <a:bodyPr/>
-                    <a:lstStyle/>
-                    <a:p>
-                      <a:pPr>
-                        <a:buNone/>
-                      </a:pPr>
-                      <a:r>
-                        <a:rPr lang="en-NZ" sz="700"/>
-                        <a:t>Title</a:t>
-                      </a:r>
-                    </a:p>
-                  </a:txBody>
-                  <a:tcPr anchor="ctr">
-                    <a:lnL w="12700" cap="flat" cmpd="sng" algn="ctr">
-                      <a:solidFill>
-                        <a:schemeClr val="bg1"/>
-                      </a:solidFill>
-                      <a:prstDash val="solid"/>
-                      <a:round/>
-                      <a:headEnd type="none" w="med" len="med"/>
-                      <a:tailEnd type="none" w="med" len="med"/>
-                    </a:lnL>
-                    <a:lnR>
-                      <a:noFill/>
-                    </a:lnR>
-                    <a:lnT w="12700" cap="flat" cmpd="sng" algn="ctr">
-                      <a:solidFill>
-                        <a:schemeClr val="bg1"/>
-                      </a:solidFill>
-                      <a:prstDash val="solid"/>
-                      <a:round/>
-                      <a:headEnd type="none" w="med" len="med"/>
-                      <a:tailEnd type="none" w="med" len="med"/>
-                    </a:lnT>
-                    <a:lnB w="12700" cap="flat" cmpd="sng" algn="ctr">
-                      <a:solidFill>
-                        <a:schemeClr val="bg1"/>
-                      </a:solidFill>
-                      <a:prstDash val="solid"/>
-                      <a:round/>
-                      <a:headEnd type="none" w="med" len="med"/>
-                      <a:tailEnd type="none" w="med" len="med"/>
-                    </a:lnB>
-                    <a:lnTlToBr w="12700" cmpd="sng">
-                      <a:noFill/>
-                      <a:prstDash val="solid"/>
-                    </a:lnTlToBr>
-                    <a:lnBlToTr w="12700" cmpd="sng">
-                      <a:noFill/>
-                      <a:prstDash val="solid"/>
-                    </a:lnBlToTr>
-                    <a:solidFill>
-                      <a:srgbClr val="004899"/>
-                    </a:solidFill>
-                  </a:tcPr>
-                </a:tc>
-                <a:tc>
-                  <a:txBody>
-                    <a:bodyPr/>
-                    <a:lstStyle/>
-                    <a:p>
-                      <a:pPr>
-                        <a:buNone/>
-                      </a:pPr>
-                      <a:r>
-                        <a:rPr lang="en-NZ" sz="700"/>
-                        <a:t>Start Date</a:t>
-                      </a:r>
-                    </a:p>
-                  </a:txBody>
-                  <a:tcPr anchor="ctr">
-                    <a:lnL>
-                      <a:noFill/>
-                    </a:lnL>
-                    <a:lnR>
-                      <a:noFill/>
-                    </a:lnR>
-                    <a:lnT w="12700" cap="flat" cmpd="sng" algn="ctr">
-                      <a:solidFill>
-                        <a:schemeClr val="bg1"/>
-                      </a:solidFill>
-                      <a:prstDash val="solid"/>
-                      <a:round/>
-                      <a:headEnd type="none" w="med" len="med"/>
-                      <a:tailEnd type="none" w="med" len="med"/>
-                    </a:lnT>
-                    <a:lnB w="12700" cap="flat" cmpd="sng" algn="ctr">
-                      <a:solidFill>
-                        <a:schemeClr val="bg1"/>
-                      </a:solidFill>
-                      <a:prstDash val="solid"/>
-                      <a:round/>
-                      <a:headEnd type="none" w="med" len="med"/>
-                      <a:tailEnd type="none" w="med" len="med"/>
-                    </a:lnB>
-                    <a:lnTlToBr w="12700" cmpd="sng">
-                      <a:noFill/>
-                      <a:prstDash val="solid"/>
-                    </a:lnTlToBr>
-                    <a:lnBlToTr w="12700" cmpd="sng">
-                      <a:noFill/>
-                      <a:prstDash val="solid"/>
-                    </a:lnBlToTr>
-                    <a:solidFill>
-                      <a:srgbClr val="004899"/>
-                    </a:solidFill>
-                  </a:tcPr>
-                </a:tc>
-                <a:tc>
-                  <a:txBody>
-                    <a:bodyPr/>
-                    <a:lstStyle/>
-                    <a:p>
-                      <a:pPr>
-                        <a:buNone/>
-                      </a:pPr>
-                      <a:r>
-                        <a:rPr lang="en-NZ" sz="700"/>
-                        <a:t>End Date</a:t>
-                      </a:r>
-                    </a:p>
-                  </a:txBody>
-                  <a:tcPr anchor="ctr">
-                    <a:lnL>
-                      <a:noFill/>
-                    </a:lnL>
-                    <a:lnR>
-                      <a:noFill/>
-                    </a:lnR>
-                    <a:lnT w="12700" cap="flat" cmpd="sng" algn="ctr">
-                      <a:solidFill>
-                        <a:schemeClr val="bg1"/>
-                      </a:solidFill>
-                      <a:prstDash val="solid"/>
-                      <a:round/>
-                      <a:headEnd type="none" w="med" len="med"/>
-                      <a:tailEnd type="none" w="med" len="med"/>
-                    </a:lnT>
-                    <a:lnB w="12700" cap="flat" cmpd="sng" algn="ctr">
-                      <a:solidFill>
-                        <a:schemeClr val="bg1"/>
-                      </a:solidFill>
-                      <a:prstDash val="solid"/>
-                      <a:round/>
-                      <a:headEnd type="none" w="med" len="med"/>
-                      <a:tailEnd type="none" w="med" len="med"/>
-                    </a:lnB>
-                    <a:lnTlToBr w="12700" cmpd="sng">
-                      <a:noFill/>
-                      <a:prstDash val="solid"/>
-                    </a:lnTlToBr>
-                    <a:lnBlToTr w="12700" cmpd="sng">
-                      <a:noFill/>
-                      <a:prstDash val="solid"/>
-                    </a:lnBlToTr>
-                    <a:solidFill>
-                      <a:srgbClr val="004899"/>
-                    </a:solidFill>
-                  </a:tcPr>
-                </a:tc>
-                <a:tc>
-                  <a:txBody>
-                    <a:bodyPr/>
-                    <a:lstStyle/>
-                    <a:p>
-                      <a:pPr>
-                        <a:buNone/>
-                      </a:pPr>
-                      <a:r>
-                        <a:rPr lang="en-NZ" sz="700"/>
-                        <a:t>Duration</a:t>
-                      </a:r>
-                    </a:p>
-                  </a:txBody>
-                  <a:tcPr anchor="ctr">
-                    <a:lnL>
-                      <a:noFill/>
-                    </a:lnL>
-                    <a:lnR w="12700" cap="flat" cmpd="sng" algn="ctr">
-                      <a:solidFill>
-                        <a:schemeClr val="bg1"/>
-                      </a:solidFill>
-                      <a:prstDash val="solid"/>
-                      <a:round/>
-                      <a:headEnd type="none" w="med" len="med"/>
-                      <a:tailEnd type="none" w="med" len="med"/>
-                    </a:lnR>
-                    <a:lnT w="12700" cap="flat" cmpd="sng" algn="ctr">
-                      <a:solidFill>
-                        <a:schemeClr val="bg1"/>
-                      </a:solidFill>
-                      <a:prstDash val="solid"/>
-                      <a:round/>
-                      <a:headEnd type="none" w="med" len="med"/>
-                      <a:tailEnd type="none" w="med" len="med"/>
-                    </a:lnT>
-                    <a:lnB w="12700" cap="flat" cmpd="sng" algn="ctr">
-                      <a:solidFill>
-                        <a:schemeClr val="bg1"/>
-                      </a:solidFill>
-                      <a:prstDash val="solid"/>
-                      <a:round/>
-                      <a:headEnd type="none" w="med" len="med"/>
-                      <a:tailEnd type="none" w="med" len="med"/>
-                    </a:lnB>
-                    <a:lnTlToBr w="12700" cmpd="sng">
-                      <a:noFill/>
-                      <a:prstDash val="solid"/>
-                    </a:lnTlToBr>
-                    <a:lnBlToTr w="12700" cmpd="sng">
-                      <a:noFill/>
-                      <a:prstDash val="solid"/>
-                    </a:lnBlToTr>
-                    <a:solidFill>
-                      <a:srgbClr val="004899"/>
-                    </a:solidFill>
-                  </a:tcPr>
-                </a:tc>
-                <a:extLst>
-                  <a:ext uri="{0D108BD9-81ED-4DB2-BD59-A6C34878D82A}">
-                    <a16:rowId xmlns:a16="http://schemas.microsoft.com/office/drawing/2014/main" val="1531709464"/>
-                  </a:ext>
-                </a:extLst>
-              </a:tr>
-              <a:tr h="295366">
-                <a:tc>
-                  <a:txBody>
-                    <a:bodyPr/>
-                    <a:lstStyle/>
-                    <a:p>
-                      <a:pPr>
-                        <a:buNone/>
-                      </a:pPr>
-                      <a:r>
-                        <a:rPr lang="en-NZ" sz="700" b="1"/>
-                        <a:t>Soul Capital</a:t>
-                      </a:r>
-                    </a:p>
-                  </a:txBody>
-                  <a:tcPr anchor="ctr">
-                    <a:lnL w="12700" cap="flat" cmpd="sng" algn="ctr">
-                      <a:solidFill>
-                        <a:schemeClr val="bg1"/>
-                      </a:solidFill>
-                      <a:prstDash val="solid"/>
-                      <a:round/>
-                      <a:headEnd type="none" w="med" len="med"/>
-                      <a:tailEnd type="none" w="med" len="med"/>
-                    </a:lnL>
-                    <a:lnR>
-                      <a:noFill/>
-                    </a:lnR>
-                    <a:lnT w="12700" cap="flat" cmpd="sng" algn="ctr">
-                      <a:solidFill>
-                        <a:schemeClr val="bg1"/>
-                      </a:solidFill>
-                      <a:prstDash val="solid"/>
-                      <a:round/>
-                      <a:headEnd type="none" w="med" len="med"/>
-                      <a:tailEnd type="none" w="med" len="med"/>
-                    </a:lnT>
-                    <a:lnB>
-                      <a:noFill/>
-                    </a:lnB>
-                    <a:lnTlToBr w="12700" cmpd="sng">
-                      <a:noFill/>
-                      <a:prstDash val="solid"/>
-                    </a:lnTlToBr>
-                    <a:lnBlToTr w="12700" cmpd="sng">
-                      <a:noFill/>
-                      <a:prstDash val="solid"/>
-                    </a:lnBlToTr>
-                  </a:tcPr>
-                </a:tc>
-                <a:tc>
-                  <a:txBody>
-                    <a:bodyPr/>
-                    <a:lstStyle/>
-                    <a:p>
-                      <a:pPr>
-                        <a:buNone/>
-                      </a:pPr>
-                      <a:r>
-                        <a:rPr lang="en-NZ" sz="700"/>
-                        <a:t>Investment Principal</a:t>
-                      </a:r>
-                    </a:p>
-                  </a:txBody>
-                  <a:tcPr anchor="ctr">
-                    <a:lnL>
-                      <a:noFill/>
-                    </a:lnL>
-                    <a:lnR>
-                      <a:noFill/>
-                    </a:lnR>
-                    <a:lnT w="12700" cap="flat" cmpd="sng" algn="ctr">
-                      <a:solidFill>
-                        <a:schemeClr val="bg1"/>
-                      </a:solidFill>
-                      <a:prstDash val="solid"/>
-                      <a:round/>
-                      <a:headEnd type="none" w="med" len="med"/>
-                      <a:tailEnd type="none" w="med" len="med"/>
-                    </a:lnT>
-                    <a:lnB>
-                      <a:noFill/>
-                    </a:lnB>
-                    <a:lnTlToBr w="12700" cmpd="sng">
-                      <a:noFill/>
-                      <a:prstDash val="solid"/>
-                    </a:lnTlToBr>
-                    <a:lnBlToTr w="12700" cmpd="sng">
-                      <a:noFill/>
-                      <a:prstDash val="solid"/>
-                    </a:lnBlToTr>
-                  </a:tcPr>
-                </a:tc>
-                <a:tc>
-                  <a:txBody>
-                    <a:bodyPr/>
-                    <a:lstStyle/>
-                    <a:p>
-                      <a:pPr>
-                        <a:buNone/>
-                      </a:pPr>
-                      <a:r>
-                        <a:rPr lang="en-NZ" sz="700"/>
-                        <a:t>Jun 2022</a:t>
-                      </a:r>
-                    </a:p>
-                  </a:txBody>
-                  <a:tcPr anchor="ctr">
-                    <a:lnL>
-                      <a:noFill/>
-                    </a:lnL>
-                    <a:lnR>
-                      <a:noFill/>
-                    </a:lnR>
-                    <a:lnT w="12700" cap="flat" cmpd="sng" algn="ctr">
-                      <a:solidFill>
-                        <a:schemeClr val="bg1"/>
-                      </a:solidFill>
-                      <a:prstDash val="solid"/>
-                      <a:round/>
-                      <a:headEnd type="none" w="med" len="med"/>
-                      <a:tailEnd type="none" w="med" len="med"/>
-                    </a:lnT>
-                    <a:lnB>
-                      <a:noFill/>
-                    </a:lnB>
-                    <a:lnTlToBr w="12700" cmpd="sng">
-                      <a:noFill/>
-                      <a:prstDash val="solid"/>
-                    </a:lnTlToBr>
-                    <a:lnBlToTr w="12700" cmpd="sng">
-                      <a:noFill/>
-                      <a:prstDash val="solid"/>
-                    </a:lnBlToTr>
-                  </a:tcPr>
-                </a:tc>
-                <a:tc>
-                  <a:txBody>
-                    <a:bodyPr/>
-                    <a:lstStyle/>
-                    <a:p>
-                      <a:pPr>
-                        <a:buNone/>
-                      </a:pPr>
-                      <a:r>
-                        <a:rPr lang="en-NZ" sz="700"/>
-                        <a:t>Present</a:t>
-                      </a:r>
-                    </a:p>
-                  </a:txBody>
-                  <a:tcPr anchor="ctr">
-                    <a:lnL>
-                      <a:noFill/>
-                    </a:lnL>
-                    <a:lnR>
-                      <a:noFill/>
-                    </a:lnR>
-                    <a:lnT w="12700" cap="flat" cmpd="sng" algn="ctr">
-                      <a:solidFill>
-                        <a:schemeClr val="bg1"/>
-                      </a:solidFill>
-                      <a:prstDash val="solid"/>
-                      <a:round/>
-                      <a:headEnd type="none" w="med" len="med"/>
-                      <a:tailEnd type="none" w="med" len="med"/>
-                    </a:lnT>
-                    <a:lnB>
-                      <a:noFill/>
-                    </a:lnB>
-                    <a:lnTlToBr w="12700" cmpd="sng">
-                      <a:noFill/>
-                      <a:prstDash val="solid"/>
-                    </a:lnTlToBr>
-                    <a:lnBlToTr w="12700" cmpd="sng">
-                      <a:noFill/>
-                      <a:prstDash val="solid"/>
-                    </a:lnBlToTr>
-                  </a:tcPr>
-                </a:tc>
-                <a:tc>
-                  <a:txBody>
-                    <a:bodyPr/>
-                    <a:lstStyle/>
-                    <a:p>
-                      <a:pPr>
-                        <a:buNone/>
-                      </a:pPr>
-                      <a:r>
-                        <a:rPr lang="en-NZ" sz="700"/>
-                        <a:t>3 years, 5 months</a:t>
-                      </a:r>
-                    </a:p>
-                  </a:txBody>
-                  <a:tcPr anchor="ctr">
-                    <a:lnL>
-                      <a:noFill/>
-                    </a:lnL>
-                    <a:lnR w="12700" cap="flat" cmpd="sng" algn="ctr">
-                      <a:solidFill>
-                        <a:schemeClr val="bg1"/>
-                      </a:solidFill>
-                      <a:prstDash val="solid"/>
-                      <a:round/>
-                      <a:headEnd type="none" w="med" len="med"/>
-                      <a:tailEnd type="none" w="med" len="med"/>
-                    </a:lnR>
-                    <a:lnT w="12700" cap="flat" cmpd="sng" algn="ctr">
-                      <a:solidFill>
-                        <a:schemeClr val="bg1"/>
-                      </a:solidFill>
-                      <a:prstDash val="solid"/>
-                      <a:round/>
-                      <a:headEnd type="none" w="med" len="med"/>
-                      <a:tailEnd type="none" w="med" len="med"/>
-                    </a:lnT>
-                    <a:lnB>
-                      <a:noFill/>
-                    </a:lnB>
-                    <a:lnTlToBr w="12700" cmpd="sng">
-                      <a:noFill/>
-                      <a:prstDash val="solid"/>
-                    </a:lnTlToBr>
-                    <a:lnBlToTr w="12700" cmpd="sng">
-                      <a:noFill/>
-                      <a:prstDash val="solid"/>
-                    </a:lnBlToTr>
-                  </a:tcPr>
-                </a:tc>
-                <a:extLst>
-                  <a:ext uri="{0D108BD9-81ED-4DB2-BD59-A6C34878D82A}">
-                    <a16:rowId xmlns:a16="http://schemas.microsoft.com/office/drawing/2014/main" val="1388529160"/>
-                  </a:ext>
-                </a:extLst>
-              </a:tr>
-              <a:tr h="295366">
-                <a:tc>
-                  <a:txBody>
-                    <a:bodyPr/>
-                    <a:lstStyle/>
-                    <a:p>
-                      <a:pPr>
-                        <a:buNone/>
-                      </a:pPr>
-                      <a:r>
-                        <a:rPr lang="en-NZ" sz="700" b="1"/>
-                        <a:t>Powerglide</a:t>
-                      </a:r>
-                    </a:p>
-                  </a:txBody>
-                  <a:tcPr anchor="ctr">
-                    <a:lnL w="12700" cap="flat" cmpd="sng" algn="ctr">
-                      <a:solidFill>
-                        <a:schemeClr val="bg1"/>
-                      </a:solidFill>
-                      <a:prstDash val="solid"/>
-                      <a:round/>
-                      <a:headEnd type="none" w="med" len="med"/>
-                      <a:tailEnd type="none" w="med" len="med"/>
-                    </a:lnL>
-                    <a:lnR>
-                      <a:noFill/>
-                    </a:lnR>
-                    <a:lnT>
-                      <a:noFill/>
-                    </a:lnT>
-                    <a:lnB>
-                      <a:noFill/>
-                    </a:lnB>
-                    <a:lnTlToBr w="12700" cmpd="sng">
-                      <a:noFill/>
-                      <a:prstDash val="solid"/>
-                    </a:lnTlToBr>
-                    <a:lnBlToTr w="12700" cmpd="sng">
-                      <a:noFill/>
-                      <a:prstDash val="solid"/>
-                    </a:lnBlToTr>
-                  </a:tcPr>
-                </a:tc>
-                <a:tc>
-                  <a:txBody>
-                    <a:bodyPr/>
-                    <a:lstStyle/>
-                    <a:p>
-                      <a:pPr>
-                        <a:buNone/>
-                      </a:pPr>
-                      <a:r>
-                        <a:rPr lang="en-NZ" sz="700"/>
-                        <a:t>Corporate Finance Advisor / Director</a:t>
-                      </a:r>
-                    </a:p>
-                  </a:txBody>
-                  <a:tcPr anchor="ctr">
-                    <a:lnL>
-                      <a:noFill/>
-                    </a:lnL>
-                    <a:lnR>
-                      <a:noFill/>
-                    </a:lnR>
-                    <a:lnT>
-                      <a:noFill/>
-                    </a:lnT>
-                    <a:lnB>
-                      <a:noFill/>
-                    </a:lnB>
-                    <a:lnTlToBr w="12700" cmpd="sng">
-                      <a:noFill/>
-                      <a:prstDash val="solid"/>
-                    </a:lnTlToBr>
-                    <a:lnBlToTr w="12700" cmpd="sng">
-                      <a:noFill/>
-                      <a:prstDash val="solid"/>
-                    </a:lnBlToTr>
-                  </a:tcPr>
-                </a:tc>
-                <a:tc>
-                  <a:txBody>
-                    <a:bodyPr/>
-                    <a:lstStyle/>
-                    <a:p>
-                      <a:pPr>
-                        <a:buNone/>
-                      </a:pPr>
-                      <a:r>
-                        <a:rPr lang="en-NZ" sz="700"/>
-                        <a:t>Mar 2021</a:t>
-                      </a:r>
-                    </a:p>
-                  </a:txBody>
-                  <a:tcPr anchor="ctr">
-                    <a:lnL>
-                      <a:noFill/>
-                    </a:lnL>
-                    <a:lnR>
-                      <a:noFill/>
-                    </a:lnR>
-                    <a:lnT>
-                      <a:noFill/>
-                    </a:lnT>
-                    <a:lnB>
-                      <a:noFill/>
-                    </a:lnB>
-                    <a:lnTlToBr w="12700" cmpd="sng">
-                      <a:noFill/>
-                      <a:prstDash val="solid"/>
-                    </a:lnTlToBr>
-                    <a:lnBlToTr w="12700" cmpd="sng">
-                      <a:noFill/>
-                      <a:prstDash val="solid"/>
-                    </a:lnBlToTr>
-                  </a:tcPr>
-                </a:tc>
-                <a:tc>
-                  <a:txBody>
-                    <a:bodyPr/>
-                    <a:lstStyle/>
-                    <a:p>
-                      <a:pPr>
-                        <a:buNone/>
-                      </a:pPr>
-                      <a:r>
-                        <a:rPr lang="en-NZ" sz="700"/>
-                        <a:t>Present</a:t>
-                      </a:r>
-                    </a:p>
-                  </a:txBody>
-                  <a:tcPr anchor="ctr">
-                    <a:lnL>
-                      <a:noFill/>
-                    </a:lnL>
-                    <a:lnR>
-                      <a:noFill/>
-                    </a:lnR>
-                    <a:lnT>
-                      <a:noFill/>
-                    </a:lnT>
-                    <a:lnB>
-                      <a:noFill/>
-                    </a:lnB>
-                    <a:lnTlToBr w="12700" cmpd="sng">
-                      <a:noFill/>
-                      <a:prstDash val="solid"/>
-                    </a:lnTlToBr>
-                    <a:lnBlToTr w="12700" cmpd="sng">
-                      <a:noFill/>
-                      <a:prstDash val="solid"/>
-                    </a:lnBlToTr>
-                  </a:tcPr>
-                </a:tc>
-                <a:tc>
-                  <a:txBody>
-                    <a:bodyPr/>
-                    <a:lstStyle/>
-                    <a:p>
-                      <a:pPr>
-                        <a:buNone/>
-                      </a:pPr>
-                      <a:r>
-                        <a:rPr lang="en-NZ" sz="700"/>
-                        <a:t>4 years, 8 months</a:t>
-                      </a:r>
-                    </a:p>
-                  </a:txBody>
-                  <a:tcPr anchor="ctr">
-                    <a:lnL>
-                      <a:noFill/>
-                    </a:lnL>
-                    <a:lnR w="12700" cap="flat" cmpd="sng" algn="ctr">
-                      <a:solidFill>
-                        <a:schemeClr val="bg1"/>
-                      </a:solidFill>
-                      <a:prstDash val="solid"/>
-                      <a:round/>
-                      <a:headEnd type="none" w="med" len="med"/>
-                      <a:tailEnd type="none" w="med" len="med"/>
-                    </a:lnR>
-                    <a:lnT>
-                      <a:noFill/>
-                    </a:lnT>
-                    <a:lnB>
-                      <a:noFill/>
-                    </a:lnB>
-                    <a:lnTlToBr w="12700" cmpd="sng">
-                      <a:noFill/>
-                      <a:prstDash val="solid"/>
-                    </a:lnTlToBr>
-                    <a:lnBlToTr w="12700" cmpd="sng">
-                      <a:noFill/>
-                      <a:prstDash val="solid"/>
-                    </a:lnBlToTr>
-                  </a:tcPr>
-                </a:tc>
-                <a:extLst>
-                  <a:ext uri="{0D108BD9-81ED-4DB2-BD59-A6C34878D82A}">
-                    <a16:rowId xmlns:a16="http://schemas.microsoft.com/office/drawing/2014/main" val="837386597"/>
-                  </a:ext>
-                </a:extLst>
-              </a:tr>
-              <a:tr h="295366">
-                <a:tc>
-                  <a:txBody>
-                    <a:bodyPr/>
-                    <a:lstStyle/>
-                    <a:p>
-                      <a:pPr>
-                        <a:buNone/>
-                      </a:pPr>
-                      <a:r>
-                        <a:rPr lang="en-NZ" sz="700" b="1"/>
-                        <a:t>Purpose Capital</a:t>
-                      </a:r>
-                    </a:p>
-                  </a:txBody>
-                  <a:tcPr anchor="ctr">
-                    <a:lnL w="12700" cap="flat" cmpd="sng" algn="ctr">
-                      <a:solidFill>
-                        <a:schemeClr val="bg1"/>
-                      </a:solidFill>
-                      <a:prstDash val="solid"/>
-                      <a:round/>
-                      <a:headEnd type="none" w="med" len="med"/>
-                      <a:tailEnd type="none" w="med" len="med"/>
-                    </a:lnL>
-                    <a:lnR>
-                      <a:noFill/>
-                    </a:lnR>
-                    <a:lnT>
-                      <a:noFill/>
-                    </a:lnT>
-                    <a:lnB>
-                      <a:noFill/>
-                    </a:lnB>
-                    <a:lnTlToBr w="12700" cmpd="sng">
-                      <a:noFill/>
-                      <a:prstDash val="solid"/>
-                    </a:lnTlToBr>
-                    <a:lnBlToTr w="12700" cmpd="sng">
-                      <a:noFill/>
-                      <a:prstDash val="solid"/>
-                    </a:lnBlToTr>
-                  </a:tcPr>
-                </a:tc>
-                <a:tc>
-                  <a:txBody>
-                    <a:bodyPr/>
-                    <a:lstStyle/>
-                    <a:p>
-                      <a:pPr>
-                        <a:buNone/>
-                      </a:pPr>
-                      <a:r>
-                        <a:rPr lang="en-NZ" sz="700"/>
-                        <a:t>Investment Manager</a:t>
-                      </a:r>
-                    </a:p>
-                  </a:txBody>
-                  <a:tcPr anchor="ctr">
-                    <a:lnL>
-                      <a:noFill/>
-                    </a:lnL>
-                    <a:lnR>
-                      <a:noFill/>
-                    </a:lnR>
-                    <a:lnT>
-                      <a:noFill/>
-                    </a:lnT>
-                    <a:lnB>
-                      <a:noFill/>
-                    </a:lnB>
-                    <a:lnTlToBr w="12700" cmpd="sng">
-                      <a:noFill/>
-                      <a:prstDash val="solid"/>
-                    </a:lnTlToBr>
-                    <a:lnBlToTr w="12700" cmpd="sng">
-                      <a:noFill/>
-                      <a:prstDash val="solid"/>
-                    </a:lnBlToTr>
-                  </a:tcPr>
-                </a:tc>
-                <a:tc>
-                  <a:txBody>
-                    <a:bodyPr/>
-                    <a:lstStyle/>
-                    <a:p>
-                      <a:pPr>
-                        <a:buNone/>
-                      </a:pPr>
-                      <a:r>
-                        <a:rPr lang="en-NZ" sz="700"/>
-                        <a:t>Mar 2020</a:t>
-                      </a:r>
-                    </a:p>
-                  </a:txBody>
-                  <a:tcPr anchor="ctr">
-                    <a:lnL>
-                      <a:noFill/>
-                    </a:lnL>
-                    <a:lnR>
-                      <a:noFill/>
-                    </a:lnR>
-                    <a:lnT>
-                      <a:noFill/>
-                    </a:lnT>
-                    <a:lnB>
-                      <a:noFill/>
-                    </a:lnB>
-                    <a:lnTlToBr w="12700" cmpd="sng">
-                      <a:noFill/>
-                      <a:prstDash val="solid"/>
-                    </a:lnTlToBr>
-                    <a:lnBlToTr w="12700" cmpd="sng">
-                      <a:noFill/>
-                      <a:prstDash val="solid"/>
-                    </a:lnBlToTr>
-                  </a:tcPr>
-                </a:tc>
-                <a:tc>
-                  <a:txBody>
-                    <a:bodyPr/>
-                    <a:lstStyle/>
-                    <a:p>
-                      <a:pPr>
-                        <a:buNone/>
-                      </a:pPr>
-                      <a:r>
-                        <a:rPr lang="en-NZ" sz="700"/>
-                        <a:t>Mar 2021</a:t>
-                      </a:r>
-                    </a:p>
-                  </a:txBody>
-                  <a:tcPr anchor="ctr">
-                    <a:lnL>
-                      <a:noFill/>
-                    </a:lnL>
-                    <a:lnR>
-                      <a:noFill/>
-                    </a:lnR>
-                    <a:lnT>
-                      <a:noFill/>
-                    </a:lnT>
-                    <a:lnB>
-                      <a:noFill/>
-                    </a:lnB>
-                    <a:lnTlToBr w="12700" cmpd="sng">
-                      <a:noFill/>
-                      <a:prstDash val="solid"/>
-                    </a:lnTlToBr>
-                    <a:lnBlToTr w="12700" cmpd="sng">
-                      <a:noFill/>
-                      <a:prstDash val="solid"/>
-                    </a:lnBlToTr>
-                  </a:tcPr>
-                </a:tc>
-                <a:tc>
-                  <a:txBody>
-                    <a:bodyPr/>
-                    <a:lstStyle/>
-                    <a:p>
-                      <a:pPr>
-                        <a:buNone/>
-                      </a:pPr>
-                      <a:r>
-                        <a:rPr lang="en-NZ" sz="700"/>
-                        <a:t>1 year</a:t>
-                      </a:r>
-                    </a:p>
-                  </a:txBody>
-                  <a:tcPr anchor="ctr">
-                    <a:lnL>
-                      <a:noFill/>
-                    </a:lnL>
-                    <a:lnR w="12700" cap="flat" cmpd="sng" algn="ctr">
-                      <a:solidFill>
-                        <a:schemeClr val="bg1"/>
-                      </a:solidFill>
-                      <a:prstDash val="solid"/>
-                      <a:round/>
-                      <a:headEnd type="none" w="med" len="med"/>
-                      <a:tailEnd type="none" w="med" len="med"/>
-                    </a:lnR>
-                    <a:lnT>
-                      <a:noFill/>
-                    </a:lnT>
-                    <a:lnB>
-                      <a:noFill/>
-                    </a:lnB>
-                    <a:lnTlToBr w="12700" cmpd="sng">
-                      <a:noFill/>
-                      <a:prstDash val="solid"/>
-                    </a:lnTlToBr>
-                    <a:lnBlToTr w="12700" cmpd="sng">
-                      <a:noFill/>
-                      <a:prstDash val="solid"/>
-                    </a:lnBlToTr>
-                  </a:tcPr>
-                </a:tc>
-                <a:extLst>
-                  <a:ext uri="{0D108BD9-81ED-4DB2-BD59-A6C34878D82A}">
-                    <a16:rowId xmlns:a16="http://schemas.microsoft.com/office/drawing/2014/main" val="2649441180"/>
-                  </a:ext>
-                </a:extLst>
-              </a:tr>
-              <a:tr h="295366">
-                <a:tc>
-                  <a:txBody>
-                    <a:bodyPr/>
-                    <a:lstStyle/>
-                    <a:p>
-                      <a:pPr>
-                        <a:buNone/>
-                      </a:pPr>
-                      <a:r>
-                        <a:rPr lang="en-NZ" sz="700" b="1"/>
-                        <a:t>Inverse</a:t>
-                      </a:r>
-                    </a:p>
-                  </a:txBody>
-                  <a:tcPr anchor="ctr">
-                    <a:lnL w="12700" cap="flat" cmpd="sng" algn="ctr">
-                      <a:solidFill>
-                        <a:schemeClr val="bg1"/>
-                      </a:solidFill>
-                      <a:prstDash val="solid"/>
-                      <a:round/>
-                      <a:headEnd type="none" w="med" len="med"/>
-                      <a:tailEnd type="none" w="med" len="med"/>
-                    </a:lnL>
-                    <a:lnR>
-                      <a:noFill/>
-                    </a:lnR>
-                    <a:lnT>
-                      <a:noFill/>
-                    </a:lnT>
-                    <a:lnB>
-                      <a:noFill/>
-                    </a:lnB>
-                    <a:lnTlToBr w="12700" cmpd="sng">
-                      <a:noFill/>
-                      <a:prstDash val="solid"/>
-                    </a:lnTlToBr>
-                    <a:lnBlToTr w="12700" cmpd="sng">
-                      <a:noFill/>
-                      <a:prstDash val="solid"/>
-                    </a:lnBlToTr>
-                  </a:tcPr>
-                </a:tc>
-                <a:tc>
-                  <a:txBody>
-                    <a:bodyPr/>
-                    <a:lstStyle/>
-                    <a:p>
-                      <a:pPr>
-                        <a:buNone/>
-                      </a:pPr>
-                      <a:r>
-                        <a:rPr lang="en-NZ" sz="700"/>
-                        <a:t>Chief Financial Officer</a:t>
-                      </a:r>
-                    </a:p>
-                  </a:txBody>
-                  <a:tcPr anchor="ctr">
-                    <a:lnL>
-                      <a:noFill/>
-                    </a:lnL>
-                    <a:lnR>
-                      <a:noFill/>
-                    </a:lnR>
-                    <a:lnT>
-                      <a:noFill/>
-                    </a:lnT>
-                    <a:lnB>
-                      <a:noFill/>
-                    </a:lnB>
-                    <a:lnTlToBr w="12700" cmpd="sng">
-                      <a:noFill/>
-                      <a:prstDash val="solid"/>
-                    </a:lnTlToBr>
-                    <a:lnBlToTr w="12700" cmpd="sng">
-                      <a:noFill/>
-                      <a:prstDash val="solid"/>
-                    </a:lnBlToTr>
-                  </a:tcPr>
-                </a:tc>
-                <a:tc>
-                  <a:txBody>
-                    <a:bodyPr/>
-                    <a:lstStyle/>
-                    <a:p>
-                      <a:pPr>
-                        <a:buNone/>
-                      </a:pPr>
-                      <a:r>
-                        <a:rPr lang="en-NZ" sz="700"/>
-                        <a:t>Mar 2017</a:t>
-                      </a:r>
-                    </a:p>
-                  </a:txBody>
-                  <a:tcPr anchor="ctr">
-                    <a:lnL>
-                      <a:noFill/>
-                    </a:lnL>
-                    <a:lnR>
-                      <a:noFill/>
-                    </a:lnR>
-                    <a:lnT>
-                      <a:noFill/>
-                    </a:lnT>
-                    <a:lnB>
-                      <a:noFill/>
-                    </a:lnB>
-                    <a:lnTlToBr w="12700" cmpd="sng">
-                      <a:noFill/>
-                      <a:prstDash val="solid"/>
-                    </a:lnTlToBr>
-                    <a:lnBlToTr w="12700" cmpd="sng">
-                      <a:noFill/>
-                      <a:prstDash val="solid"/>
-                    </a:lnBlToTr>
-                  </a:tcPr>
-                </a:tc>
-                <a:tc>
-                  <a:txBody>
-                    <a:bodyPr/>
-                    <a:lstStyle/>
-                    <a:p>
-                      <a:pPr>
-                        <a:buNone/>
-                      </a:pPr>
-                      <a:r>
-                        <a:rPr lang="en-NZ" sz="700"/>
-                        <a:t>Nov 2022</a:t>
-                      </a:r>
-                    </a:p>
-                  </a:txBody>
-                  <a:tcPr anchor="ctr">
-                    <a:lnL>
-                      <a:noFill/>
-                    </a:lnL>
-                    <a:lnR>
-                      <a:noFill/>
-                    </a:lnR>
-                    <a:lnT>
-                      <a:noFill/>
-                    </a:lnT>
-                    <a:lnB>
-                      <a:noFill/>
-                    </a:lnB>
-                    <a:lnTlToBr w="12700" cmpd="sng">
-                      <a:noFill/>
-                      <a:prstDash val="solid"/>
-                    </a:lnTlToBr>
-                    <a:lnBlToTr w="12700" cmpd="sng">
-                      <a:noFill/>
-                      <a:prstDash val="solid"/>
-                    </a:lnBlToTr>
-                  </a:tcPr>
-                </a:tc>
-                <a:tc>
-                  <a:txBody>
-                    <a:bodyPr/>
-                    <a:lstStyle/>
-                    <a:p>
-                      <a:pPr>
-                        <a:buNone/>
-                      </a:pPr>
-                      <a:r>
-                        <a:rPr lang="en-NZ" sz="700"/>
-                        <a:t>5 years, 9 months</a:t>
-                      </a:r>
-                    </a:p>
-                  </a:txBody>
-                  <a:tcPr anchor="ctr">
-                    <a:lnL>
-                      <a:noFill/>
-                    </a:lnL>
-                    <a:lnR w="12700" cap="flat" cmpd="sng" algn="ctr">
-                      <a:solidFill>
-                        <a:schemeClr val="bg1"/>
-                      </a:solidFill>
-                      <a:prstDash val="solid"/>
-                      <a:round/>
-                      <a:headEnd type="none" w="med" len="med"/>
-                      <a:tailEnd type="none" w="med" len="med"/>
-                    </a:lnR>
-                    <a:lnT>
-                      <a:noFill/>
-                    </a:lnT>
-                    <a:lnB>
-                      <a:noFill/>
-                    </a:lnB>
-                    <a:lnTlToBr w="12700" cmpd="sng">
-                      <a:noFill/>
-                      <a:prstDash val="solid"/>
-                    </a:lnTlToBr>
-                    <a:lnBlToTr w="12700" cmpd="sng">
-                      <a:noFill/>
-                      <a:prstDash val="solid"/>
-                    </a:lnBlToTr>
-                  </a:tcPr>
-                </a:tc>
-                <a:extLst>
-                  <a:ext uri="{0D108BD9-81ED-4DB2-BD59-A6C34878D82A}">
-                    <a16:rowId xmlns:a16="http://schemas.microsoft.com/office/drawing/2014/main" val="2980113677"/>
-                  </a:ext>
-                </a:extLst>
-              </a:tr>
-              <a:tr h="295366">
-                <a:tc>
-                  <a:txBody>
-                    <a:bodyPr/>
-                    <a:lstStyle/>
-                    <a:p>
-                      <a:pPr>
-                        <a:buNone/>
-                      </a:pPr>
-                      <a:r>
-                        <a:rPr lang="en-NZ" sz="700" b="1"/>
-                        <a:t>Western Power (Australia)</a:t>
-                      </a:r>
-                    </a:p>
-                  </a:txBody>
-                  <a:tcPr anchor="ctr">
-                    <a:lnL w="12700" cap="flat" cmpd="sng" algn="ctr">
-                      <a:solidFill>
-                        <a:schemeClr val="bg1"/>
-                      </a:solidFill>
-                      <a:prstDash val="solid"/>
-                      <a:round/>
-                      <a:headEnd type="none" w="med" len="med"/>
-                      <a:tailEnd type="none" w="med" len="med"/>
-                    </a:lnL>
-                    <a:lnR>
-                      <a:noFill/>
-                    </a:lnR>
-                    <a:lnT>
-                      <a:noFill/>
-                    </a:lnT>
-                    <a:lnB>
-                      <a:noFill/>
-                    </a:lnB>
-                    <a:lnTlToBr w="12700" cmpd="sng">
-                      <a:noFill/>
-                      <a:prstDash val="solid"/>
-                    </a:lnTlToBr>
-                    <a:lnBlToTr w="12700" cmpd="sng">
-                      <a:noFill/>
-                      <a:prstDash val="solid"/>
-                    </a:lnBlToTr>
-                  </a:tcPr>
-                </a:tc>
-                <a:tc>
-                  <a:txBody>
-                    <a:bodyPr/>
-                    <a:lstStyle/>
-                    <a:p>
-                      <a:pPr>
-                        <a:buNone/>
-                      </a:pPr>
-                      <a:r>
-                        <a:rPr lang="en-NZ" sz="700"/>
-                        <a:t>Corporate Risk Manager</a:t>
-                      </a:r>
-                    </a:p>
-                  </a:txBody>
-                  <a:tcPr anchor="ctr">
-                    <a:lnL>
-                      <a:noFill/>
-                    </a:lnL>
-                    <a:lnR>
-                      <a:noFill/>
-                    </a:lnR>
-                    <a:lnT>
-                      <a:noFill/>
-                    </a:lnT>
-                    <a:lnB>
-                      <a:noFill/>
-                    </a:lnB>
-                    <a:lnTlToBr w="12700" cmpd="sng">
-                      <a:noFill/>
-                      <a:prstDash val="solid"/>
-                    </a:lnTlToBr>
-                    <a:lnBlToTr w="12700" cmpd="sng">
-                      <a:noFill/>
-                      <a:prstDash val="solid"/>
-                    </a:lnBlToTr>
-                  </a:tcPr>
-                </a:tc>
-                <a:tc>
-                  <a:txBody>
-                    <a:bodyPr/>
-                    <a:lstStyle/>
-                    <a:p>
-                      <a:pPr>
-                        <a:buNone/>
-                      </a:pPr>
-                      <a:r>
-                        <a:rPr lang="en-NZ" sz="700"/>
-                        <a:t>2011</a:t>
-                      </a:r>
-                    </a:p>
-                  </a:txBody>
-                  <a:tcPr anchor="ctr">
-                    <a:lnL>
-                      <a:noFill/>
-                    </a:lnL>
-                    <a:lnR>
-                      <a:noFill/>
-                    </a:lnR>
-                    <a:lnT>
-                      <a:noFill/>
-                    </a:lnT>
-                    <a:lnB>
-                      <a:noFill/>
-                    </a:lnB>
-                    <a:lnTlToBr w="12700" cmpd="sng">
-                      <a:noFill/>
-                      <a:prstDash val="solid"/>
-                    </a:lnTlToBr>
-                    <a:lnBlToTr w="12700" cmpd="sng">
-                      <a:noFill/>
-                      <a:prstDash val="solid"/>
-                    </a:lnBlToTr>
-                  </a:tcPr>
-                </a:tc>
-                <a:tc>
-                  <a:txBody>
-                    <a:bodyPr/>
-                    <a:lstStyle/>
-                    <a:p>
-                      <a:pPr>
-                        <a:buNone/>
-                      </a:pPr>
-                      <a:r>
-                        <a:rPr lang="en-NZ" sz="700"/>
-                        <a:t>2016</a:t>
-                      </a:r>
-                    </a:p>
-                  </a:txBody>
-                  <a:tcPr anchor="ctr">
-                    <a:lnL>
-                      <a:noFill/>
-                    </a:lnL>
-                    <a:lnR>
-                      <a:noFill/>
-                    </a:lnR>
-                    <a:lnT>
-                      <a:noFill/>
-                    </a:lnT>
-                    <a:lnB>
-                      <a:noFill/>
-                    </a:lnB>
-                    <a:lnTlToBr w="12700" cmpd="sng">
-                      <a:noFill/>
-                      <a:prstDash val="solid"/>
-                    </a:lnTlToBr>
-                    <a:lnBlToTr w="12700" cmpd="sng">
-                      <a:noFill/>
-                      <a:prstDash val="solid"/>
-                    </a:lnBlToTr>
-                  </a:tcPr>
-                </a:tc>
-                <a:tc>
-                  <a:txBody>
-                    <a:bodyPr/>
-                    <a:lstStyle/>
-                    <a:p>
-                      <a:pPr>
-                        <a:buNone/>
-                      </a:pPr>
-                      <a:r>
-                        <a:rPr lang="en-NZ" sz="700"/>
-                        <a:t>5 years</a:t>
-                      </a:r>
-                    </a:p>
-                  </a:txBody>
-                  <a:tcPr anchor="ctr">
-                    <a:lnL>
-                      <a:noFill/>
-                    </a:lnL>
-                    <a:lnR w="12700" cap="flat" cmpd="sng" algn="ctr">
-                      <a:solidFill>
-                        <a:schemeClr val="bg1"/>
-                      </a:solidFill>
-                      <a:prstDash val="solid"/>
-                      <a:round/>
-                      <a:headEnd type="none" w="med" len="med"/>
-                      <a:tailEnd type="none" w="med" len="med"/>
-                    </a:lnR>
-                    <a:lnT>
-                      <a:noFill/>
-                    </a:lnT>
-                    <a:lnB>
-                      <a:noFill/>
-                    </a:lnB>
-                    <a:lnTlToBr w="12700" cmpd="sng">
-                      <a:noFill/>
-                      <a:prstDash val="solid"/>
-                    </a:lnTlToBr>
-                    <a:lnBlToTr w="12700" cmpd="sng">
-                      <a:noFill/>
-                      <a:prstDash val="solid"/>
-                    </a:lnBlToTr>
-                  </a:tcPr>
-                </a:tc>
-                <a:extLst>
-                  <a:ext uri="{0D108BD9-81ED-4DB2-BD59-A6C34878D82A}">
-                    <a16:rowId xmlns:a16="http://schemas.microsoft.com/office/drawing/2014/main" val="1638687515"/>
-                  </a:ext>
-                </a:extLst>
-              </a:tr>
-              <a:tr h="295366">
-                <a:tc>
-                  <a:txBody>
-                    <a:bodyPr/>
-                    <a:lstStyle/>
-                    <a:p>
-                      <a:pPr>
-                        <a:buNone/>
-                      </a:pPr>
-                      <a:r>
-                        <a:rPr lang="en-NZ" sz="700" b="1"/>
-                        <a:t>BHP Billiton (UK / Australia)</a:t>
-                      </a:r>
-                    </a:p>
-                  </a:txBody>
-                  <a:tcPr anchor="ctr">
-                    <a:lnL w="12700" cap="flat" cmpd="sng" algn="ctr">
-                      <a:solidFill>
-                        <a:schemeClr val="bg1"/>
-                      </a:solidFill>
-                      <a:prstDash val="solid"/>
-                      <a:round/>
-                      <a:headEnd type="none" w="med" len="med"/>
-                      <a:tailEnd type="none" w="med" len="med"/>
-                    </a:lnL>
-                    <a:lnR>
-                      <a:noFill/>
-                    </a:lnR>
-                    <a:lnT>
-                      <a:noFill/>
-                    </a:lnT>
-                    <a:lnB w="12700" cap="flat" cmpd="sng" algn="ctr">
-                      <a:noFill/>
-                      <a:prstDash val="solid"/>
-                      <a:round/>
-                      <a:headEnd type="none" w="med" len="med"/>
-                      <a:tailEnd type="none" w="med" len="med"/>
-                    </a:lnB>
-                    <a:lnTlToBr w="12700" cmpd="sng">
-                      <a:noFill/>
-                      <a:prstDash val="solid"/>
-                    </a:lnTlToBr>
-                    <a:lnBlToTr w="12700" cmpd="sng">
-                      <a:noFill/>
-                      <a:prstDash val="solid"/>
-                    </a:lnBlToTr>
-                  </a:tcPr>
-                </a:tc>
-                <a:tc>
-                  <a:txBody>
-                    <a:bodyPr/>
-                    <a:lstStyle/>
-                    <a:p>
-                      <a:pPr>
-                        <a:buNone/>
-                      </a:pPr>
-                      <a:r>
-                        <a:rPr lang="en-NZ" sz="700"/>
-                        <a:t>Management Accountant</a:t>
-                      </a:r>
-                    </a:p>
-                  </a:txBody>
-                  <a:tcPr anchor="ctr">
-                    <a:lnL>
-                      <a:noFill/>
-                    </a:lnL>
-                    <a:lnR>
-                      <a:noFill/>
-                    </a:lnR>
-                    <a:lnT>
-                      <a:noFill/>
-                    </a:lnT>
-                    <a:lnB w="12700" cap="flat" cmpd="sng" algn="ctr">
-                      <a:noFill/>
-                      <a:prstDash val="solid"/>
-                      <a:round/>
-                      <a:headEnd type="none" w="med" len="med"/>
-                      <a:tailEnd type="none" w="med" len="med"/>
-                    </a:lnB>
-                    <a:lnTlToBr w="12700" cmpd="sng">
-                      <a:noFill/>
-                      <a:prstDash val="solid"/>
-                    </a:lnTlToBr>
-                    <a:lnBlToTr w="12700" cmpd="sng">
-                      <a:noFill/>
-                      <a:prstDash val="solid"/>
-                    </a:lnBlToTr>
-                  </a:tcPr>
-                </a:tc>
-                <a:tc>
-                  <a:txBody>
-                    <a:bodyPr/>
-                    <a:lstStyle/>
-                    <a:p>
-                      <a:pPr>
-                        <a:buNone/>
-                      </a:pPr>
-                      <a:r>
-                        <a:rPr lang="en-NZ" sz="700"/>
-                        <a:t>2010</a:t>
-                      </a:r>
-                    </a:p>
-                  </a:txBody>
-                  <a:tcPr anchor="ctr">
-                    <a:lnL>
-                      <a:noFill/>
-                    </a:lnL>
-                    <a:lnR>
-                      <a:noFill/>
-                    </a:lnR>
-                    <a:lnT>
-                      <a:noFill/>
-                    </a:lnT>
-                    <a:lnB w="12700" cap="flat" cmpd="sng" algn="ctr">
-                      <a:noFill/>
-                      <a:prstDash val="solid"/>
-                      <a:round/>
-                      <a:headEnd type="none" w="med" len="med"/>
-                      <a:tailEnd type="none" w="med" len="med"/>
-                    </a:lnB>
-                    <a:lnTlToBr w="12700" cmpd="sng">
-                      <a:noFill/>
-                      <a:prstDash val="solid"/>
-                    </a:lnTlToBr>
-                    <a:lnBlToTr w="12700" cmpd="sng">
-                      <a:noFill/>
-                      <a:prstDash val="solid"/>
-                    </a:lnBlToTr>
-                  </a:tcPr>
-                </a:tc>
-                <a:tc>
-                  <a:txBody>
-                    <a:bodyPr/>
-                    <a:lstStyle/>
-                    <a:p>
-                      <a:pPr>
-                        <a:buNone/>
-                      </a:pPr>
-                      <a:r>
-                        <a:rPr lang="en-NZ" sz="700"/>
-                        <a:t>2011</a:t>
-                      </a:r>
-                    </a:p>
-                  </a:txBody>
-                  <a:tcPr anchor="ctr">
-                    <a:lnL>
-                      <a:noFill/>
-                    </a:lnL>
-                    <a:lnR>
-                      <a:noFill/>
-                    </a:lnR>
-                    <a:lnT>
-                      <a:noFill/>
-                    </a:lnT>
-                    <a:lnB w="12700" cap="flat" cmpd="sng" algn="ctr">
-                      <a:noFill/>
-                      <a:prstDash val="solid"/>
-                      <a:round/>
-                      <a:headEnd type="none" w="med" len="med"/>
-                      <a:tailEnd type="none" w="med" len="med"/>
-                    </a:lnB>
-                    <a:lnTlToBr w="12700" cmpd="sng">
-                      <a:noFill/>
-                      <a:prstDash val="solid"/>
-                    </a:lnTlToBr>
-                    <a:lnBlToTr w="12700" cmpd="sng">
-                      <a:noFill/>
-                      <a:prstDash val="solid"/>
-                    </a:lnBlToTr>
-                  </a:tcPr>
-                </a:tc>
-                <a:tc>
-                  <a:txBody>
-                    <a:bodyPr/>
-                    <a:lstStyle/>
-                    <a:p>
-                      <a:pPr>
-                        <a:buNone/>
-                      </a:pPr>
-                      <a:r>
-                        <a:rPr lang="en-NZ" sz="700"/>
-                        <a:t>1 year</a:t>
-                      </a:r>
-                    </a:p>
-                  </a:txBody>
-                  <a:tcPr anchor="ctr">
-                    <a:lnL>
-                      <a:noFill/>
-                    </a:lnL>
-                    <a:lnR w="12700" cap="flat" cmpd="sng" algn="ctr">
-                      <a:solidFill>
-                        <a:schemeClr val="bg1"/>
-                      </a:solidFill>
-                      <a:prstDash val="solid"/>
-                      <a:round/>
-                      <a:headEnd type="none" w="med" len="med"/>
-                      <a:tailEnd type="none" w="med" len="med"/>
-                    </a:lnR>
-                    <a:lnT>
-                      <a:noFill/>
-                    </a:lnT>
-                    <a:lnB w="12700" cap="flat" cmpd="sng" algn="ctr">
-                      <a:noFill/>
-                      <a:prstDash val="solid"/>
-                      <a:round/>
-                      <a:headEnd type="none" w="med" len="med"/>
-                      <a:tailEnd type="none" w="med" len="med"/>
-                    </a:lnB>
-                    <a:lnTlToBr w="12700" cmpd="sng">
-                      <a:noFill/>
-                      <a:prstDash val="solid"/>
-                    </a:lnTlToBr>
-                    <a:lnBlToTr w="12700" cmpd="sng">
-                      <a:noFill/>
-                      <a:prstDash val="solid"/>
-                    </a:lnBlToTr>
-                  </a:tcPr>
-                </a:tc>
-                <a:extLst>
-                  <a:ext uri="{0D108BD9-81ED-4DB2-BD59-A6C34878D82A}">
-                    <a16:rowId xmlns:a16="http://schemas.microsoft.com/office/drawing/2014/main" val="4208584389"/>
-                  </a:ext>
-                </a:extLst>
-              </a:tr>
-              <a:tr h="295366">
-                <a:tc>
-                  <a:txBody>
-                    <a:bodyPr/>
-                    <a:lstStyle/>
-                    <a:p>
-                      <a:pPr>
-                        <a:buNone/>
-                      </a:pPr>
-                      <a:r>
-                        <a:rPr lang="en-GB" sz="700" b="1"/>
-                        <a:t>Westpac Business Bank (Bay of Plenty)</a:t>
-                      </a:r>
-                    </a:p>
-                  </a:txBody>
-                  <a:tcPr anchor="ctr">
-                    <a:lnL w="12700" cap="flat" cmpd="sng" algn="ctr">
-                      <a:solidFill>
-                        <a:schemeClr val="bg1"/>
-                      </a:solidFill>
-                      <a:prstDash val="solid"/>
-                      <a:round/>
-                      <a:headEnd type="none" w="med" len="med"/>
-                      <a:tailEnd type="none" w="med" len="med"/>
-                    </a:lnL>
-                    <a:lnR>
-                      <a:noFill/>
-                    </a:lnR>
-                    <a:lnT>
-                      <a:noFill/>
-                    </a:lnT>
-                    <a:lnB w="12700" cap="flat" cmpd="sng" algn="ctr">
-                      <a:solidFill>
-                        <a:schemeClr val="bg1"/>
-                      </a:solidFill>
-                      <a:prstDash val="solid"/>
-                      <a:round/>
-                      <a:headEnd type="none" w="med" len="med"/>
-                      <a:tailEnd type="none" w="med" len="med"/>
-                    </a:lnB>
-                    <a:lnTlToBr w="12700" cmpd="sng">
-                      <a:noFill/>
-                      <a:prstDash val="solid"/>
-                    </a:lnTlToBr>
-                    <a:lnBlToTr w="12700" cmpd="sng">
-                      <a:noFill/>
-                      <a:prstDash val="solid"/>
-                    </a:lnBlToTr>
-                  </a:tcPr>
-                </a:tc>
-                <a:tc>
-                  <a:txBody>
-                    <a:bodyPr/>
-                    <a:lstStyle/>
-                    <a:p>
-                      <a:pPr>
-                        <a:buNone/>
-                      </a:pPr>
-                      <a:r>
-                        <a:rPr lang="en-NZ" sz="700"/>
-                        <a:t>Business Banking Manager</a:t>
-                      </a:r>
-                    </a:p>
-                  </a:txBody>
-                  <a:tcPr anchor="ctr">
-                    <a:lnL>
-                      <a:noFill/>
-                    </a:lnL>
-                    <a:lnR>
-                      <a:noFill/>
-                    </a:lnR>
-                    <a:lnT>
-                      <a:noFill/>
-                    </a:lnT>
-                    <a:lnB w="12700" cap="flat" cmpd="sng" algn="ctr">
-                      <a:solidFill>
-                        <a:schemeClr val="bg1"/>
-                      </a:solidFill>
-                      <a:prstDash val="solid"/>
-                      <a:round/>
-                      <a:headEnd type="none" w="med" len="med"/>
-                      <a:tailEnd type="none" w="med" len="med"/>
-                    </a:lnB>
-                    <a:lnTlToBr w="12700" cmpd="sng">
-                      <a:noFill/>
-                      <a:prstDash val="solid"/>
-                    </a:lnTlToBr>
-                    <a:lnBlToTr w="12700" cmpd="sng">
-                      <a:noFill/>
-                      <a:prstDash val="solid"/>
-                    </a:lnBlToTr>
-                  </a:tcPr>
-                </a:tc>
-                <a:tc>
-                  <a:txBody>
-                    <a:bodyPr/>
-                    <a:lstStyle/>
-                    <a:p>
-                      <a:pPr>
-                        <a:buNone/>
-                      </a:pPr>
-                      <a:r>
-                        <a:rPr lang="en-NZ" sz="700"/>
-                        <a:t>2005</a:t>
-                      </a:r>
-                    </a:p>
-                  </a:txBody>
-                  <a:tcPr anchor="ctr">
-                    <a:lnL>
-                      <a:noFill/>
-                    </a:lnL>
-                    <a:lnR>
-                      <a:noFill/>
-                    </a:lnR>
-                    <a:lnT>
-                      <a:noFill/>
-                    </a:lnT>
-                    <a:lnB w="12700" cap="flat" cmpd="sng" algn="ctr">
-                      <a:solidFill>
-                        <a:schemeClr val="bg1"/>
-                      </a:solidFill>
-                      <a:prstDash val="solid"/>
-                      <a:round/>
-                      <a:headEnd type="none" w="med" len="med"/>
-                      <a:tailEnd type="none" w="med" len="med"/>
-                    </a:lnB>
-                    <a:lnTlToBr w="12700" cmpd="sng">
-                      <a:noFill/>
-                      <a:prstDash val="solid"/>
-                    </a:lnTlToBr>
-                    <a:lnBlToTr w="12700" cmpd="sng">
-                      <a:noFill/>
-                      <a:prstDash val="solid"/>
-                    </a:lnBlToTr>
-                  </a:tcPr>
-                </a:tc>
-                <a:tc>
-                  <a:txBody>
-                    <a:bodyPr/>
-                    <a:lstStyle/>
-                    <a:p>
-                      <a:pPr>
-                        <a:buNone/>
-                      </a:pPr>
-                      <a:r>
-                        <a:rPr lang="en-NZ" sz="700"/>
-                        <a:t>2010</a:t>
-                      </a:r>
-                    </a:p>
-                  </a:txBody>
-                  <a:tcPr anchor="ctr">
-                    <a:lnL>
-                      <a:noFill/>
-                    </a:lnL>
-                    <a:lnR>
-                      <a:noFill/>
-                    </a:lnR>
-                    <a:lnT>
-                      <a:noFill/>
-                    </a:lnT>
-                    <a:lnB w="12700" cap="flat" cmpd="sng" algn="ctr">
-                      <a:solidFill>
-                        <a:schemeClr val="bg1"/>
-                      </a:solidFill>
-                      <a:prstDash val="solid"/>
-                      <a:round/>
-                      <a:headEnd type="none" w="med" len="med"/>
-                      <a:tailEnd type="none" w="med" len="med"/>
-                    </a:lnB>
-                    <a:lnTlToBr w="12700" cmpd="sng">
-                      <a:noFill/>
-                      <a:prstDash val="solid"/>
-                    </a:lnTlToBr>
-                    <a:lnBlToTr w="12700" cmpd="sng">
-                      <a:noFill/>
-                      <a:prstDash val="solid"/>
-                    </a:lnBlToTr>
-                  </a:tcPr>
-                </a:tc>
-                <a:tc>
-                  <a:txBody>
-                    <a:bodyPr/>
-                    <a:lstStyle/>
-                    <a:p>
-                      <a:pPr>
-                        <a:buNone/>
-                      </a:pPr>
-                      <a:r>
-                        <a:rPr lang="en-NZ" sz="700"/>
-                        <a:t>5 years</a:t>
-                      </a:r>
-                    </a:p>
-                  </a:txBody>
-                  <a:tcPr anchor="ctr">
-                    <a:lnL>
-                      <a:noFill/>
-                    </a:lnL>
-                    <a:lnR w="12700" cap="flat" cmpd="sng" algn="ctr">
-                      <a:solidFill>
-                        <a:schemeClr val="bg1"/>
-                      </a:solidFill>
-                      <a:prstDash val="solid"/>
-                      <a:round/>
-                      <a:headEnd type="none" w="med" len="med"/>
-                      <a:tailEnd type="none" w="med" len="med"/>
-                    </a:lnR>
-                    <a:lnT>
-                      <a:noFill/>
-                    </a:lnT>
-                    <a:lnB w="12700" cap="flat" cmpd="sng" algn="ctr">
-                      <a:solidFill>
-                        <a:schemeClr val="bg1"/>
-                      </a:solidFill>
-                      <a:prstDash val="solid"/>
-                      <a:round/>
-                      <a:headEnd type="none" w="med" len="med"/>
-                      <a:tailEnd type="none" w="med" len="med"/>
-                    </a:lnB>
-                    <a:lnTlToBr w="12700" cmpd="sng">
-                      <a:noFill/>
-                      <a:prstDash val="solid"/>
-                    </a:lnTlToBr>
-                    <a:lnBlToTr w="12700" cmpd="sng">
-                      <a:noFill/>
-                      <a:prstDash val="solid"/>
-                    </a:lnBlToTr>
-                  </a:tcPr>
-                </a:tc>
-                <a:extLst>
-                  <a:ext uri="{0D108BD9-81ED-4DB2-BD59-A6C34878D82A}">
-                    <a16:rowId xmlns:a16="http://schemas.microsoft.com/office/drawing/2014/main" val="1206542046"/>
-                  </a:ext>
-                </a:extLst>
-              </a:tr>
-            </a:tbl>
-          </a:graphicData>
-        </a:graphic>
-      </p:graphicFrame>
-      <p:sp>
-        <p:nvSpPr>
-          <p:cNvPr id="9" name="Rectangle: Rounded Corners 8">
-            <a:extLst>
-              <a:ext uri="{FF2B5EF4-FFF2-40B4-BE49-F238E27FC236}">
-                <a16:creationId xmlns:a16="http://schemas.microsoft.com/office/drawing/2014/main" id="{92FC0C77-E551-9B0D-F87B-8721D0E04AC0}"/>
-              </a:ext>
-            </a:extLst>
-          </p:cNvPr>
-          <p:cNvSpPr>
-            <a:spLocks/>
-          </p:cNvSpPr>
-          <p:nvPr/>
-        </p:nvSpPr>
-        <p:spPr>
-          <a:xfrm>
-            <a:off x="138678" y="5207893"/>
-            <a:ext cx="6580645" cy="4297478"/>
-          </a:xfrm>
-          <a:prstGeom prst="roundRect">
-            <a:avLst>
-              <a:gd name="adj" fmla="val 0"/>
-            </a:avLst>
-          </a:prstGeom>
-          <a:solidFill>
-            <a:schemeClr val="bg1"/>
-          </a:solidFill>
-          <a:ln>
-            <a:solidFill>
-              <a:srgbClr val="004899"/>
-            </a:solidFill>
-          </a:ln>
-          <a:effectLst>
-            <a:softEdge rad="0"/>
-          </a:effectLst>
-        </p:spPr>
-        <p:style>
-          <a:lnRef idx="2">
-            <a:schemeClr val="accent1">
-              <a:shade val="15000"/>
-            </a:schemeClr>
-          </a:lnRef>
-          <a:fillRef idx="1">
-            <a:schemeClr val="accent1"/>
-          </a:fillRef>
-          <a:effectRef idx="0">
-            <a:schemeClr val="accent1"/>
-          </a:effectRef>
-          <a:fontRef idx="minor">
-            <a:schemeClr val="lt1"/>
-          </a:fontRef>
-        </p:style>
-        <p:txBody>
-          <a:bodyPr tIns="0" rtlCol="0" anchor="t" anchorCtr="0"/>
-          <a:lstStyle/>
-          <a:p>
-            <a:endParaRPr lang="en-NZ" sz="900">
-              <a:solidFill>
-                <a:schemeClr val="tx1"/>
-              </a:solidFill>
-            </a:endParaRPr>
-          </a:p>
-          <a:p>
-            <a:pPr algn="just"/>
-            <a:r>
-              <a:rPr lang="en-NZ" sz="900">
-                <a:solidFill>
-                  <a:schemeClr val="tx1"/>
-                </a:solidFill>
-              </a:rPr>
-              <a:t>Alex is currently leading the investment function for a small boutique social enterprise investment company, Soul Capital. She is looking to move on for a few reasons, but largely due to the organisation being owned and run by academics who lack the governance and experience to move quickly and take advantage of opportunities, as well as concerns about their ability to raise capital. Additionally, her career aligns more with high growth industries and hence her interest in this role at Evolution Healthcare. </a:t>
-            </a:r>
-          </a:p>
-          <a:p>
-            <a:pPr algn="just"/>
-            <a:endParaRPr lang="en-NZ" sz="900">
-              <a:solidFill>
-                <a:schemeClr val="tx1"/>
-              </a:solidFill>
-            </a:endParaRPr>
-          </a:p>
-          <a:p>
-            <a:pPr algn="just"/>
-            <a:r>
-              <a:rPr lang="en-NZ" sz="900">
-                <a:solidFill>
-                  <a:schemeClr val="tx1"/>
-                </a:solidFill>
-              </a:rPr>
-              <a:t>Alex has very good experience in not only M&amp;A but also large and complex capital development projects, most notably at Western Power where she led a complex tripartite commercial negotiation (company, commercial counterpart and various banks) on a $400M capital investment project to build new transmission lines in Western Australia. She led this entire process end to end including in house and external legal teams, procurement and others through to fruition.</a:t>
-            </a:r>
-          </a:p>
-          <a:p>
-            <a:pPr algn="just"/>
-            <a:endParaRPr lang="en-NZ" sz="900">
-              <a:solidFill>
-                <a:schemeClr val="tx1"/>
-              </a:solidFill>
-            </a:endParaRPr>
-          </a:p>
-          <a:p>
-            <a:pPr algn="just"/>
-            <a:r>
-              <a:rPr lang="en-NZ" sz="900">
-                <a:solidFill>
-                  <a:schemeClr val="tx1"/>
-                </a:solidFill>
-              </a:rPr>
-              <a:t>Alex is a very capable leader who is comfortable building high performing teams from scratch and has a focused and empowering leadership style that sets clear direction and expectations of her teams, with an outcome focused agenda. She is people centric and will build good relationships across all aspects of a business.</a:t>
-            </a:r>
-          </a:p>
-          <a:p>
-            <a:pPr algn="just"/>
-            <a:endParaRPr lang="en-NZ" sz="900">
-              <a:solidFill>
-                <a:schemeClr val="tx1"/>
-              </a:solidFill>
-            </a:endParaRPr>
-          </a:p>
-          <a:p>
-            <a:pPr algn="just"/>
-            <a:r>
-              <a:rPr lang="en-NZ" sz="900">
-                <a:solidFill>
-                  <a:schemeClr val="tx1"/>
-                </a:solidFill>
-              </a:rPr>
-              <a:t>Alex really does enjoy getting into the detail and driving process improvement but is extremely capable at a board room table. Her role at Powerglide (boutique New Zealand owned elevator company) perhaps best illustrates her experience of adding true commercial value to a company where she was brought in to turn the business around and prepare it for a potential sale. She drove all aspects of the commercial agenda including product, pricing, operational efficiencies, profit, people and process improvement.</a:t>
-            </a:r>
-          </a:p>
-          <a:p>
-            <a:pPr algn="just"/>
-            <a:endParaRPr lang="en-NZ" sz="900">
-              <a:solidFill>
-                <a:schemeClr val="tx1"/>
-              </a:solidFill>
-            </a:endParaRPr>
-          </a:p>
-          <a:p>
-            <a:pPr algn="just"/>
-            <a:r>
-              <a:rPr lang="en-NZ" sz="900">
-                <a:solidFill>
-                  <a:schemeClr val="tx1"/>
-                </a:solidFill>
-              </a:rPr>
-              <a:t>Alex is a very talented, smart and ambitious person who can operate at all levels of a business. She is very strategic, commercial and driven and could be a strong option for this role.</a:t>
-            </a:r>
-          </a:p>
-          <a:p>
-            <a:pPr algn="just"/>
-            <a:endParaRPr lang="en-NZ" sz="900">
-              <a:solidFill>
-                <a:schemeClr val="tx1"/>
-              </a:solidFill>
-            </a:endParaRPr>
-          </a:p>
-          <a:p>
-            <a:pPr algn="just"/>
-            <a:r>
-              <a:rPr lang="en-NZ" sz="900">
-                <a:solidFill>
-                  <a:schemeClr val="tx1"/>
-                </a:solidFill>
-              </a:rPr>
-              <a:t>It is worth noting that Alex is actively interviewing and does have another opportunity that is progressing so there is a chance that she could be offered a role before we complete this process.</a:t>
-            </a:r>
-          </a:p>
-          <a:p>
-            <a:pPr algn="just">
-              <a:lnSpc>
-                <a:spcPct val="107000"/>
-              </a:lnSpc>
-              <a:spcAft>
-                <a:spcPts val="800"/>
-              </a:spcAft>
-              <a:buNone/>
-            </a:pPr>
-            <a:endParaRPr lang="en-NZ" sz="900" kern="100">
-              <a:solidFill>
-                <a:schemeClr val="tx1"/>
-              </a:solidFill>
-              <a:effectLst/>
-              <a:latin typeface="Aptos" panose="020B0004020202020204" pitchFamily="34" charset="0"/>
-              <a:ea typeface="Aptos" panose="020B0004020202020204" pitchFamily="34" charset="0"/>
-              <a:cs typeface="Arial" panose="020B0604020202020204" pitchFamily="34" charset="0"/>
-            </a:endParaRPr>
-          </a:p>
-        </p:txBody>
-      </p:sp>
-      <p:graphicFrame>
-        <p:nvGraphicFramePr>
-          <p:cNvPr id="3" name="Table 2">
-            <a:extLst>
-              <a:ext uri="{FF2B5EF4-FFF2-40B4-BE49-F238E27FC236}">
-                <a16:creationId xmlns:a16="http://schemas.microsoft.com/office/drawing/2014/main" id="{61A903DE-505B-1144-0096-C98F882F0266}"/>
-              </a:ext>
-            </a:extLst>
-          </p:cNvPr>
-          <p:cNvGraphicFramePr>
-            <a:graphicFrameLocks/>
-          </p:cNvGraphicFramePr>
-          <p:nvPr/>
-        </p:nvGraphicFramePr>
-        <p:xfrm>
-          <a:off x="2429934" y="566496"/>
-          <a:ext cx="4186937" cy="2032512"/>
-        </p:xfrm>
-        <a:graphic>
-          <a:graphicData uri="http://schemas.openxmlformats.org/drawingml/2006/table">
-            <a:tbl>
-              <a:tblPr bandRow="1">
-                <a:tableStyleId>{2D5ABB26-0587-4C30-8999-92F81FD0307C}</a:tableStyleId>
-              </a:tblPr>
-              <a:tblGrid>
-                <a:gridCol w="1815753">
-                  <a:extLst>
-                    <a:ext uri="{9D8B030D-6E8A-4147-A177-3AD203B41FA5}">
-                      <a16:colId xmlns:a16="http://schemas.microsoft.com/office/drawing/2014/main" val="2252499205"/>
-                    </a:ext>
-                  </a:extLst>
-                </a:gridCol>
-                <a:gridCol w="2371184">
-                  <a:extLst>
-                    <a:ext uri="{9D8B030D-6E8A-4147-A177-3AD203B41FA5}">
-                      <a16:colId xmlns:a16="http://schemas.microsoft.com/office/drawing/2014/main" val="3268057789"/>
-                    </a:ext>
-                  </a:extLst>
-                </a:gridCol>
-              </a:tblGrid>
-              <a:tr h="363314">
-                <a:tc>
-                  <a:txBody>
-                    <a:bodyPr/>
-                    <a:lstStyle/>
-                    <a:p>
-                      <a:pPr>
-                        <a:buNone/>
-                      </a:pPr>
-                      <a:r>
-                        <a:rPr lang="en-NZ" sz="900" b="1">
-                          <a:solidFill>
-                            <a:schemeClr val="bg1"/>
-                          </a:solidFill>
-                        </a:rPr>
-                        <a:t>Notice Period</a:t>
-                      </a:r>
-                      <a:endParaRPr lang="en-NZ" sz="900">
-                        <a:solidFill>
-                          <a:schemeClr val="bg1"/>
-                        </a:solidFill>
-                      </a:endParaRPr>
-                    </a:p>
-                  </a:txBody>
-                  <a:tcPr anchor="ctr">
-                    <a:lnL>
-                      <a:noFill/>
-                    </a:lnL>
-                    <a:lnR>
-                      <a:noFill/>
-                    </a:lnR>
-                    <a:lnT>
-                      <a:noFill/>
-                    </a:lnT>
-                    <a:lnB>
-                      <a:noFill/>
-                    </a:lnB>
-                    <a:lnTlToBr w="12700" cmpd="sng">
-                      <a:noFill/>
-                      <a:prstDash val="solid"/>
-                    </a:lnTlToBr>
-                    <a:lnBlToTr w="12700" cmpd="sng">
-                      <a:noFill/>
-                      <a:prstDash val="solid"/>
-                    </a:lnBlToTr>
-                    <a:noFill/>
-                  </a:tcPr>
-                </a:tc>
-                <a:tc>
-                  <a:txBody>
-                    <a:bodyPr/>
-                    <a:lstStyle/>
-                    <a:p>
-                      <a:pPr>
-                        <a:buNone/>
-                      </a:pPr>
-                      <a:r>
-                        <a:rPr lang="en-NZ" sz="900">
-                          <a:solidFill>
-                            <a:schemeClr val="bg1"/>
-                          </a:solidFill>
-                        </a:rPr>
-                        <a:t>Four weeks</a:t>
-                      </a:r>
-                    </a:p>
-                  </a:txBody>
-                  <a:tcPr anchor="ctr">
-                    <a:lnL>
-                      <a:noFill/>
-                    </a:lnL>
-                    <a:lnR>
-                      <a:noFill/>
-                    </a:lnR>
-                    <a:lnT>
-                      <a:noFill/>
-                    </a:lnT>
-                    <a:lnB>
-                      <a:noFill/>
-                    </a:lnB>
-                    <a:lnTlToBr w="12700" cmpd="sng">
-                      <a:noFill/>
-                      <a:prstDash val="solid"/>
-                    </a:lnTlToBr>
-                    <a:lnBlToTr w="12700" cmpd="sng">
-                      <a:noFill/>
-                      <a:prstDash val="solid"/>
-                    </a:lnBlToTr>
-                    <a:noFill/>
-                  </a:tcPr>
-                </a:tc>
-                <a:extLst>
-                  <a:ext uri="{0D108BD9-81ED-4DB2-BD59-A6C34878D82A}">
-                    <a16:rowId xmlns:a16="http://schemas.microsoft.com/office/drawing/2014/main" val="358037502"/>
-                  </a:ext>
-                </a:extLst>
-              </a:tr>
-              <a:tr h="348198">
-                <a:tc>
-                  <a:txBody>
-                    <a:bodyPr/>
-                    <a:lstStyle/>
-                    <a:p>
-                      <a:pPr>
-                        <a:buNone/>
-                      </a:pPr>
-                      <a:r>
-                        <a:rPr lang="en-NZ" sz="900" b="1">
-                          <a:solidFill>
-                            <a:schemeClr val="bg1"/>
-                          </a:solidFill>
-                        </a:rPr>
-                        <a:t>Base Salary Expectation</a:t>
-                      </a:r>
-                      <a:endParaRPr lang="en-NZ" sz="900">
-                        <a:solidFill>
-                          <a:schemeClr val="bg1"/>
-                        </a:solidFill>
-                      </a:endParaRPr>
-                    </a:p>
-                  </a:txBody>
-                  <a:tcPr anchor="ctr">
-                    <a:lnL>
-                      <a:noFill/>
-                    </a:lnL>
-                    <a:lnR>
-                      <a:noFill/>
-                    </a:lnR>
-                    <a:lnT>
-                      <a:noFill/>
-                    </a:lnT>
-                    <a:lnB>
-                      <a:noFill/>
-                    </a:lnB>
-                    <a:lnTlToBr w="12700" cmpd="sng">
-                      <a:noFill/>
-                      <a:prstDash val="solid"/>
-                    </a:lnTlToBr>
-                    <a:lnBlToTr w="12700" cmpd="sng">
-                      <a:noFill/>
-                      <a:prstDash val="solid"/>
-                    </a:lnBlToTr>
-                    <a:noFill/>
-                  </a:tcPr>
-                </a:tc>
-                <a:tc>
-                  <a:txBody>
-                    <a:bodyPr/>
-                    <a:lstStyle/>
-                    <a:p>
-                      <a:pPr>
-                        <a:buNone/>
-                      </a:pPr>
-                      <a:r>
-                        <a:rPr lang="en-NZ" sz="900">
-                          <a:solidFill>
-                            <a:schemeClr val="bg1"/>
-                          </a:solidFill>
-                        </a:rPr>
-                        <a:t>$290,000</a:t>
-                      </a:r>
-                    </a:p>
-                  </a:txBody>
-                  <a:tcPr anchor="ctr">
-                    <a:lnL>
-                      <a:noFill/>
-                    </a:lnL>
-                    <a:lnR>
-                      <a:noFill/>
-                    </a:lnR>
-                    <a:lnT>
-                      <a:noFill/>
-                    </a:lnT>
-                    <a:lnB>
-                      <a:noFill/>
-                    </a:lnB>
-                    <a:lnTlToBr w="12700" cmpd="sng">
-                      <a:noFill/>
-                      <a:prstDash val="solid"/>
-                    </a:lnTlToBr>
-                    <a:lnBlToTr w="12700" cmpd="sng">
-                      <a:noFill/>
-                      <a:prstDash val="solid"/>
-                    </a:lnBlToTr>
-                    <a:noFill/>
-                  </a:tcPr>
-                </a:tc>
-                <a:extLst>
-                  <a:ext uri="{0D108BD9-81ED-4DB2-BD59-A6C34878D82A}">
-                    <a16:rowId xmlns:a16="http://schemas.microsoft.com/office/drawing/2014/main" val="49863457"/>
-                  </a:ext>
-                </a:extLst>
-              </a:tr>
-              <a:tr h="543760">
-                <a:tc>
-                  <a:txBody>
-                    <a:bodyPr/>
-                    <a:lstStyle/>
-                    <a:p>
-                      <a:pPr>
-                        <a:buNone/>
-                      </a:pPr>
-                      <a:r>
-                        <a:rPr lang="en-NZ" sz="900" b="1">
-                          <a:solidFill>
-                            <a:schemeClr val="bg1"/>
-                          </a:solidFill>
-                        </a:rPr>
-                        <a:t>Education</a:t>
-                      </a:r>
-                      <a:endParaRPr lang="en-NZ" sz="900">
-                        <a:solidFill>
-                          <a:schemeClr val="bg1"/>
-                        </a:solidFill>
-                      </a:endParaRPr>
-                    </a:p>
-                  </a:txBody>
-                  <a:tcPr anchor="ctr">
-                    <a:lnL>
-                      <a:noFill/>
-                    </a:lnL>
-                    <a:lnR>
-                      <a:noFill/>
-                    </a:lnR>
-                    <a:lnT>
-                      <a:noFill/>
-                    </a:lnT>
-                    <a:lnB>
-                      <a:noFill/>
-                    </a:lnB>
-                    <a:lnTlToBr w="12700" cmpd="sng">
-                      <a:noFill/>
-                      <a:prstDash val="solid"/>
-                    </a:lnTlToBr>
-                    <a:lnBlToTr w="12700" cmpd="sng">
-                      <a:noFill/>
-                      <a:prstDash val="solid"/>
-                    </a:lnBlToTr>
-                    <a:noFill/>
-                  </a:tcPr>
-                </a:tc>
-                <a:tc>
-                  <a:txBody>
-                    <a:bodyPr/>
-                    <a:lstStyle/>
-                    <a:p>
-                      <a:r>
-                        <a:rPr lang="en-GB" sz="900">
-                          <a:solidFill>
-                            <a:schemeClr val="bg1"/>
-                          </a:solidFill>
-                        </a:rPr>
-                        <a:t>The University of Edinburgh</a:t>
-                      </a:r>
-                      <a:br>
-                        <a:rPr lang="en-GB" sz="900">
-                          <a:solidFill>
-                            <a:schemeClr val="bg1"/>
-                          </a:solidFill>
-                        </a:rPr>
-                      </a:br>
-                      <a:r>
-                        <a:rPr lang="en-GB" sz="900">
-                          <a:solidFill>
-                            <a:schemeClr val="bg1"/>
-                          </a:solidFill>
-                        </a:rPr>
-                        <a:t>Bachelor of Commerce Honours Business Studies and Accounting</a:t>
-                      </a:r>
-                      <a:endParaRPr lang="en-NZ" sz="900">
-                        <a:solidFill>
-                          <a:schemeClr val="bg1"/>
-                        </a:solidFill>
-                        <a:ea typeface="Roboto" panose="02000000000000000000" pitchFamily="2" charset="0"/>
-                        <a:cs typeface="Roboto" panose="02000000000000000000" pitchFamily="2" charset="0"/>
-                      </a:endParaRPr>
-                    </a:p>
-                  </a:txBody>
-                  <a:tcPr anchor="ctr">
-                    <a:lnL>
-                      <a:noFill/>
-                    </a:lnL>
-                    <a:lnR>
-                      <a:noFill/>
-                    </a:lnR>
-                    <a:lnT>
-                      <a:noFill/>
-                    </a:lnT>
-                    <a:lnB>
-                      <a:noFill/>
-                    </a:lnB>
-                    <a:lnTlToBr w="12700" cmpd="sng">
-                      <a:noFill/>
-                      <a:prstDash val="solid"/>
-                    </a:lnTlToBr>
-                    <a:lnBlToTr w="12700" cmpd="sng">
-                      <a:noFill/>
-                      <a:prstDash val="solid"/>
-                    </a:lnBlToTr>
-                    <a:noFill/>
-                  </a:tcPr>
-                </a:tc>
-                <a:extLst>
-                  <a:ext uri="{0D108BD9-81ED-4DB2-BD59-A6C34878D82A}">
-                    <a16:rowId xmlns:a16="http://schemas.microsoft.com/office/drawing/2014/main" val="912871463"/>
-                  </a:ext>
-                </a:extLst>
-              </a:tr>
-              <a:tr h="543760">
-                <a:tc>
-                  <a:txBody>
-                    <a:bodyPr/>
-                    <a:lstStyle/>
-                    <a:p>
-                      <a:pPr>
-                        <a:buNone/>
-                      </a:pPr>
-                      <a:r>
-                        <a:rPr lang="en-NZ" sz="900" b="1">
-                          <a:solidFill>
-                            <a:schemeClr val="bg1"/>
-                          </a:solidFill>
-                        </a:rPr>
-                        <a:t>Professional Qualifications</a:t>
-                      </a:r>
-                      <a:endParaRPr lang="en-NZ" sz="900">
-                        <a:solidFill>
-                          <a:schemeClr val="bg1"/>
-                        </a:solidFill>
-                      </a:endParaRPr>
-                    </a:p>
-                  </a:txBody>
-                  <a:tcPr anchor="ctr">
-                    <a:lnL>
-                      <a:noFill/>
-                    </a:lnL>
-                    <a:lnR>
-                      <a:noFill/>
-                    </a:lnR>
-                    <a:lnT>
-                      <a:noFill/>
-                    </a:lnT>
-                    <a:lnB>
-                      <a:noFill/>
-                    </a:lnB>
-                    <a:lnTlToBr w="12700" cmpd="sng">
-                      <a:noFill/>
-                      <a:prstDash val="solid"/>
-                    </a:lnTlToBr>
-                    <a:lnBlToTr w="12700" cmpd="sng">
-                      <a:noFill/>
-                      <a:prstDash val="solid"/>
-                    </a:lnBlToTr>
-                    <a:noFill/>
-                  </a:tcPr>
-                </a:tc>
-                <a:tc>
-                  <a:txBody>
-                    <a:bodyPr/>
-                    <a:lstStyle/>
-                    <a:p>
-                      <a:r>
-                        <a:rPr lang="en-GB" sz="900">
-                          <a:solidFill>
-                            <a:schemeClr val="bg1"/>
-                          </a:solidFill>
-                        </a:rPr>
-                        <a:t>Institute of Directors New Zealand</a:t>
-                      </a:r>
-                      <a:br>
-                        <a:rPr lang="en-GB" sz="900">
-                          <a:solidFill>
-                            <a:schemeClr val="bg1"/>
-                          </a:solidFill>
-                        </a:rPr>
-                      </a:br>
-                      <a:r>
-                        <a:rPr lang="en-GB" sz="900">
-                          <a:solidFill>
-                            <a:schemeClr val="bg1"/>
-                          </a:solidFill>
-                        </a:rPr>
-                        <a:t>Company Directors Course</a:t>
-                      </a:r>
-                    </a:p>
-                    <a:p>
-                      <a:br>
-                        <a:rPr lang="en-GB" sz="900">
-                          <a:solidFill>
-                            <a:schemeClr val="bg1"/>
-                          </a:solidFill>
-                        </a:rPr>
-                      </a:br>
-                      <a:r>
-                        <a:rPr lang="en-GB" sz="900">
-                          <a:solidFill>
-                            <a:schemeClr val="bg1"/>
-                          </a:solidFill>
-                        </a:rPr>
-                        <a:t>Institute of Chartered Accountants Scotland Chartered Accountant</a:t>
-                      </a:r>
-                      <a:endParaRPr lang="en-NZ" sz="900">
-                        <a:solidFill>
-                          <a:schemeClr val="bg1"/>
-                        </a:solidFill>
-                      </a:endParaRPr>
-                    </a:p>
-                  </a:txBody>
-                  <a:tcPr anchor="ctr">
-                    <a:lnL>
-                      <a:noFill/>
-                    </a:lnL>
-                    <a:lnR>
-                      <a:noFill/>
-                    </a:lnR>
-                    <a:lnT>
-                      <a:noFill/>
-                    </a:lnT>
-                    <a:lnB>
-                      <a:noFill/>
-                    </a:lnB>
-                    <a:lnTlToBr w="12700" cmpd="sng">
-                      <a:noFill/>
-                      <a:prstDash val="solid"/>
-                    </a:lnTlToBr>
-                    <a:lnBlToTr w="12700" cmpd="sng">
-                      <a:noFill/>
-                      <a:prstDash val="solid"/>
-                    </a:lnBlToTr>
-                    <a:noFill/>
-                  </a:tcPr>
-                </a:tc>
-                <a:extLst>
-                  <a:ext uri="{0D108BD9-81ED-4DB2-BD59-A6C34878D82A}">
-                    <a16:rowId xmlns:a16="http://schemas.microsoft.com/office/drawing/2014/main" val="932259989"/>
-                  </a:ext>
-                </a:extLst>
-              </a:tr>
-            </a:tbl>
-          </a:graphicData>
-        </a:graphic>
-      </p:graphicFrame>
-      <p:sp>
-        <p:nvSpPr>
-          <p:cNvPr id="5" name="TextBox 4">
-            <a:extLst>
-              <a:ext uri="{FF2B5EF4-FFF2-40B4-BE49-F238E27FC236}">
-                <a16:creationId xmlns:a16="http://schemas.microsoft.com/office/drawing/2014/main" id="{2FA910FD-5382-5EA4-74F2-BFCDA675939D}"/>
-              </a:ext>
-            </a:extLst>
-          </p:cNvPr>
-          <p:cNvSpPr txBox="1">
-            <a:spLocks noGrp="1" noRot="1" noMove="1" noResize="1" noEditPoints="1" noAdjustHandles="1" noChangeArrowheads="1" noChangeShapeType="1"/>
-          </p:cNvSpPr>
-          <p:nvPr/>
-        </p:nvSpPr>
-        <p:spPr>
-          <a:xfrm>
-            <a:off x="2429934" y="9495846"/>
-            <a:ext cx="2078914" cy="400110"/>
-          </a:xfrm>
-          <a:prstGeom prst="rect">
-            <a:avLst/>
-          </a:prstGeom>
-          <a:noFill/>
-        </p:spPr>
-        <p:txBody>
-          <a:bodyPr wrap="square" rtlCol="0">
-            <a:spAutoFit/>
-          </a:bodyPr>
-          <a:lstStyle/>
-          <a:p>
-            <a:endParaRPr lang="en-NZ" sz="400"/>
-          </a:p>
-          <a:p>
-            <a:pPr lvl="0" algn="ctr" defTabSz="514344">
-              <a:tabLst>
-                <a:tab pos="1611791" algn="ctr"/>
-                <a:tab pos="3223581" algn="r"/>
-              </a:tabLst>
-              <a:defRPr/>
-            </a:pPr>
-            <a:r>
-              <a:rPr lang="en-NZ" altLang="en-US" sz="400">
-                <a:solidFill>
-                  <a:srgbClr val="6F6F6F"/>
-                </a:solidFill>
-                <a:ea typeface="Calibri" panose="020F0502020204030204" pitchFamily="34" charset="0"/>
-                <a:cs typeface="Arial" panose="020B0604020202020204" pitchFamily="34" charset="0"/>
-              </a:rPr>
-              <a:t>Infinitas Talent Limited, PO BOX 357, 2 Princes Street, Auckland, 1140</a:t>
-            </a:r>
-            <a:endParaRPr lang="en-NZ" altLang="en-US" sz="400">
-              <a:solidFill>
-                <a:prstClr val="black"/>
-              </a:solidFill>
-            </a:endParaRPr>
-          </a:p>
-          <a:p>
-            <a:pPr lvl="0" algn="ctr" defTabSz="514344">
-              <a:tabLst>
-                <a:tab pos="1611791" algn="ctr"/>
-                <a:tab pos="3223581" algn="r"/>
-              </a:tabLst>
-              <a:defRPr/>
-            </a:pPr>
-            <a:r>
-              <a:rPr lang="en-NZ" altLang="en-US" sz="400">
-                <a:solidFill>
-                  <a:srgbClr val="6F6F6F"/>
-                </a:solidFill>
-                <a:ea typeface="Calibri" panose="020F0502020204030204" pitchFamily="34" charset="0"/>
-                <a:cs typeface="Arial" panose="020B0604020202020204" pitchFamily="34" charset="0"/>
-              </a:rPr>
-              <a:t>https://infinitas.co.nz   Tel: +64 (0) 9218 6127 </a:t>
-            </a:r>
-            <a:endParaRPr lang="en-NZ" altLang="en-US" sz="400">
-              <a:solidFill>
-                <a:prstClr val="black"/>
-              </a:solidFill>
-            </a:endParaRPr>
-          </a:p>
-          <a:p>
-            <a:pPr lvl="0" algn="ctr" defTabSz="514344">
-              <a:tabLst>
-                <a:tab pos="1611791" algn="ctr"/>
-                <a:tab pos="3223581" algn="r"/>
-              </a:tabLst>
-              <a:defRPr/>
-            </a:pPr>
-            <a:r>
-              <a:rPr lang="en-NZ" altLang="en-US" sz="400">
-                <a:solidFill>
-                  <a:srgbClr val="6F6F6F"/>
-                </a:solidFill>
-                <a:ea typeface="Calibri" panose="020F0502020204030204" pitchFamily="34" charset="0"/>
-                <a:cs typeface="Arial" panose="020B0604020202020204" pitchFamily="34" charset="0"/>
-              </a:rPr>
-              <a:t>These candidates are being represented by Infinitas Talent Limited.</a:t>
-            </a:r>
-            <a:endParaRPr lang="en-NZ" altLang="en-US" sz="400">
-              <a:solidFill>
-                <a:prstClr val="black"/>
-              </a:solidFill>
-            </a:endParaRPr>
-          </a:p>
-          <a:p>
-            <a:pPr lvl="0" algn="ctr" defTabSz="514344">
-              <a:tabLst>
-                <a:tab pos="1611791" algn="ctr"/>
-                <a:tab pos="3223581" algn="r"/>
-              </a:tabLst>
-              <a:defRPr/>
-            </a:pPr>
-            <a:r>
-              <a:rPr lang="en-NZ" altLang="en-US" sz="400">
-                <a:solidFill>
-                  <a:srgbClr val="6F6F6F"/>
-                </a:solidFill>
-                <a:ea typeface="Calibri" panose="020F0502020204030204" pitchFamily="34" charset="0"/>
-                <a:cs typeface="Arial" panose="020B0604020202020204" pitchFamily="34" charset="0"/>
-              </a:rPr>
-              <a:t>Our standard terms of business will apply. This document is private and confidential.</a:t>
-            </a:r>
-            <a:endParaRPr lang="en-NZ" altLang="en-US" sz="400">
-              <a:solidFill>
-                <a:prstClr val="black"/>
-              </a:solidFill>
-            </a:endParaRPr>
-          </a:p>
-        </p:txBody>
-      </p:sp>
-      <p:pic>
-        <p:nvPicPr>
-          <p:cNvPr id="16" name="Picture 2" descr="Alex Dallas - ❚ Business builder - Investor - Executive - Director |  LinkedIn">
-            <a:extLst>
-              <a:ext uri="{FF2B5EF4-FFF2-40B4-BE49-F238E27FC236}">
-                <a16:creationId xmlns:a16="http://schemas.microsoft.com/office/drawing/2014/main" id="{14819016-9DED-FCDD-E900-F1B78EE3E7FF}"/>
-              </a:ext>
-            </a:extLst>
-          </p:cNvPr>
-          <p:cNvPicPr>
-            <a:picLocks noChangeAspect="1" noChangeArrowheads="1"/>
-          </p:cNvPicPr>
-          <p:nvPr/>
-        </p:nvPicPr>
-        <p:blipFill rotWithShape="1">
-          <a:blip r:embed="rId2">
-            <a:extLst>
-              <a:ext uri="{28A0092B-C50C-407E-A947-70E740481C1C}">
-                <a14:useLocalDpi xmlns:a14="http://schemas.microsoft.com/office/drawing/2010/main" val="0"/>
-              </a:ext>
-            </a:extLst>
-          </a:blip>
-          <a:srcRect l="807" t="513" r="2336" b="1125"/>
-          <a:stretch>
-            <a:fillRect/>
-          </a:stretch>
-        </p:blipFill>
-        <p:spPr bwMode="auto">
-          <a:xfrm>
-            <a:off x="503914" y="566496"/>
-            <a:ext cx="1799033" cy="1826977"/>
-          </a:xfrm>
-          <a:prstGeom prst="roundRect">
-            <a:avLst>
-              <a:gd name="adj" fmla="val 10041"/>
-            </a:avLst>
-          </a:prstGeom>
-          <a:noFill/>
-          <a:ln>
-            <a:solidFill>
-              <a:schemeClr val="bg1"/>
-            </a:solidFill>
-          </a:ln>
-          <a:extLst>
-            <a:ext uri="{909E8E84-426E-40DD-AFC4-6F175D3DCCD1}">
-              <a14:hiddenFill xmlns:a14="http://schemas.microsoft.com/office/drawing/2010/main">
-                <a:solidFill>
-                  <a:srgbClr val="FFFFFF"/>
-                </a:solidFill>
-              </a14:hiddenFill>
-            </a:ext>
-          </a:extLst>
-        </p:spPr>
-      </p:pic>
-    </p:spTree>
-    <p:extLst>
-      <p:ext uri="{BB962C8B-B14F-4D97-AF65-F5344CB8AC3E}">
-        <p14:creationId xmlns:p14="http://schemas.microsoft.com/office/powerpoint/2010/main" val="3941422164"/>
+        <p14:creationId xmlns:p14="http://schemas.microsoft.com/office/powerpoint/2010/main" val="1015836991"/>
       </p:ext>
     </p:extLst>
   </p:cSld>
@@ -15985,4 +10700,26 @@
     </a:ext>
   </a:extLst>
 </a:theme>
+</file>
+
+<file path=ppt/webextensions/taskpanes.xml><?xml version="1.0" encoding="utf-8"?>
+<wetp:taskpanes xmlns:wetp="http://schemas.microsoft.com/office/webextensions/taskpanes/2010/11">
+  <wetp:taskpane dockstate="right" visibility="0" width="700" row="0">
+    <wetp:webextensionref xmlns:r="http://schemas.openxmlformats.org/officeDocument/2006/relationships" r:id="rId1"/>
+  </wetp:taskpane>
+</wetp:taskpanes>
+</file>
+
+<file path=ppt/webextensions/webextension1.xml><?xml version="1.0" encoding="utf-8"?>
+<we:webextension xmlns:we="http://schemas.microsoft.com/office/webextensions/webextension/2010/11" id="{A5FCD6BB-B4A9-4853-AB7A-ED8FE93142DE}">
+  <we:reference id="WA200010001" version="1.0.0.1" store="Omex" storeType="OMEX"/>
+  <we:alternateReferences>
+    <we:reference id="WA200010001" version="1.0.0.1" store="WA200010001" storeType="OMEX"/>
+  </we:alternateReferences>
+  <we:properties>
+    <we:property name="Office.AutoShowTaskpaneWithDocument" value="true"/>
+  </we:properties>
+  <we:bindings/>
+  <we:snapshot xmlns:r="http://schemas.openxmlformats.org/officeDocument/2006/relationships"/>
+</we:webextension>
 </file>
--- a/templates/shortlist-template.pptx
+++ b/templates/shortlist-template.pptx
@@ -10700,26 +10700,4 @@
     </a:ext>
   </a:extLst>
 </a:theme>
-</file>
-
-<file path=ppt/webextensions/taskpanes.xml><?xml version="1.0" encoding="utf-8"?>
-<wetp:taskpanes xmlns:wetp="http://schemas.microsoft.com/office/webextensions/taskpanes/2010/11">
-  <wetp:taskpane dockstate="right" visibility="0" width="700" row="0">
-    <wetp:webextensionref xmlns:r="http://schemas.openxmlformats.org/officeDocument/2006/relationships" r:id="rId1"/>
-  </wetp:taskpane>
-</wetp:taskpanes>
-</file>
-
-<file path=ppt/webextensions/webextension1.xml><?xml version="1.0" encoding="utf-8"?>
-<we:webextension xmlns:we="http://schemas.microsoft.com/office/webextensions/webextension/2010/11" id="{A5FCD6BB-B4A9-4853-AB7A-ED8FE93142DE}">
-  <we:reference id="WA200010001" version="1.0.0.1" store="Omex" storeType="OMEX"/>
-  <we:alternateReferences>
-    <we:reference id="WA200010001" version="1.0.0.1" store="WA200010001" storeType="OMEX"/>
-  </we:alternateReferences>
-  <we:properties>
-    <we:property name="Office.AutoShowTaskpaneWithDocument" value="true"/>
-  </we:properties>
-  <we:bindings/>
-  <we:snapshot xmlns:r="http://schemas.openxmlformats.org/officeDocument/2006/relationships"/>
-</we:webextension>
 </file>